--- a/ppt_tasks/the-drop-studio-noir/output/TheDrop_Studio_Noir.pptx
+++ b/ppt_tasks/the-drop-studio-noir/output/TheDrop_Studio_Noir.pptx
@@ -22,6 +22,7 @@
     <p:sldId id="270" r:id="rId20"/>
     <p:sldId id="271" r:id="rId21"/>
     <p:sldId id="272" r:id="rId22"/>
+    <p:sldId id="273" r:id="rId23"/>
   </p:sldIdLst>
   <p:sldSz cx="12191695" cy="6858000" type="screen4x3"/>
   <p:notesSz cx="6858000" cy="9144000"/>
@@ -3354,7 +3355,7 @@
                 <a:cs typeface="Plus Jakarta Sans"/>
               </a:rPr>
               <a:t>One room. One delivery.
-Guest-ready in ten days.</a:t>
+Guest-ready in fifteen days.</a:t>
             </a:r>
           </a:p>
         </p:txBody>
@@ -4003,7 +4004,7 @@
                 <a:ea typeface="Plus Jakarta Sans"/>
                 <a:cs typeface="Plus Jakarta Sans"/>
               </a:rPr>
-              <a:t>10 / 17</a:t>
+              <a:t>10 / 18</a:t>
             </a:r>
           </a:p>
         </p:txBody>
@@ -6011,7 +6012,7 @@
                 <a:ea typeface="Plus Jakarta Sans"/>
                 <a:cs typeface="Plus Jakarta Sans"/>
               </a:rPr>
-              <a:t>11 / 17</a:t>
+              <a:t>11 / 18</a:t>
             </a:r>
           </a:p>
         </p:txBody>
@@ -6217,7 +6218,75 @@
       </p:sp>
       <p:sp>
         <p:nvSpPr>
-          <p:cNvPr id="13" name="TextBox 12"/>
+          <p:cNvPr id="13" name="Rounded Rectangle 12"/>
+          <p:cNvSpPr/>
+          <p:nvPr/>
+        </p:nvSpPr>
+        <p:spPr>
+          <a:xfrm>
+            <a:off x="2148840" y="2423160"/>
+            <a:ext cx="1783080" cy="310896"/>
+          </a:xfrm>
+          <a:prstGeom prst="roundRect">
+            <a:avLst>
+              <a:gd name="adj" fmla="val 50000"/>
+            </a:avLst>
+          </a:prstGeom>
+          <a:solidFill>
+            <a:srgbClr val="C4A06A"/>
+          </a:solidFill>
+          <a:ln>
+            <a:noFill/>
+          </a:ln>
+        </p:spPr>
+        <p:txBody>
+          <a:bodyPr rtlCol="0" anchor="ctr"/>
+          <a:lstStyle/>
+          <a:p>
+            <a:pPr algn="ctr"/>
+          </a:p>
+        </p:txBody>
+      </p:sp>
+      <p:sp>
+        <p:nvSpPr>
+          <p:cNvPr id="14" name="TextBox 13"/>
+          <p:cNvSpPr txBox="1"/>
+          <p:nvPr/>
+        </p:nvSpPr>
+        <p:spPr>
+          <a:xfrm>
+            <a:off x="2148840" y="2478024"/>
+            <a:ext cx="1783080" cy="228600"/>
+          </a:xfrm>
+          <a:prstGeom prst="rect">
+            <a:avLst/>
+          </a:prstGeom>
+          <a:noFill/>
+        </p:spPr>
+        <p:txBody>
+          <a:bodyPr wrap="square" lIns="0" rIns="0" tIns="0" bIns="0">
+            <a:spAutoFit/>
+          </a:bodyPr>
+          <a:lstStyle/>
+          <a:p>
+            <a:pPr algn="ctr"/>
+            <a:r>
+              <a:rPr sz="800" b="1" i="0" spc="100">
+                <a:solidFill>
+                  <a:srgbClr val="0E0D0C"/>
+                </a:solidFill>
+                <a:latin typeface="Plus Jakarta Sans"/>
+                <a:ea typeface="Plus Jakarta Sans"/>
+                <a:cs typeface="Plus Jakarta Sans"/>
+              </a:rPr>
+              <a:t>+ FREE RED FLAG GIFT</a:t>
+            </a:r>
+          </a:p>
+        </p:txBody>
+      </p:sp>
+      <p:sp>
+        <p:nvSpPr>
+          <p:cNvPr id="15" name="TextBox 14"/>
           <p:cNvSpPr txBox="1"/>
           <p:nvPr/>
         </p:nvSpPr>
@@ -6258,7 +6327,7 @@
       </p:sp>
       <p:sp>
         <p:nvSpPr>
-          <p:cNvPr id="14" name="TextBox 13"/>
+          <p:cNvPr id="16" name="TextBox 15"/>
           <p:cNvSpPr txBox="1"/>
           <p:nvPr/>
         </p:nvSpPr>
@@ -6295,7 +6364,7 @@
       </p:sp>
       <p:sp>
         <p:nvSpPr>
-          <p:cNvPr id="15" name="TextBox 14"/>
+          <p:cNvPr id="17" name="TextBox 16"/>
           <p:cNvSpPr txBox="1"/>
           <p:nvPr/>
         </p:nvSpPr>
@@ -6336,7 +6405,7 @@
       </p:sp>
       <p:sp>
         <p:nvSpPr>
-          <p:cNvPr id="16" name="TextBox 15"/>
+          <p:cNvPr id="18" name="TextBox 17"/>
           <p:cNvSpPr txBox="1"/>
           <p:nvPr/>
         </p:nvSpPr>
@@ -6373,7 +6442,7 @@
       </p:sp>
       <p:sp>
         <p:nvSpPr>
-          <p:cNvPr id="17" name="TextBox 16"/>
+          <p:cNvPr id="19" name="TextBox 18"/>
           <p:cNvSpPr txBox="1"/>
           <p:nvPr/>
         </p:nvSpPr>
@@ -6410,7 +6479,7 @@
       </p:sp>
       <p:sp>
         <p:nvSpPr>
-          <p:cNvPr id="18" name="TextBox 17"/>
+          <p:cNvPr id="20" name="TextBox 19"/>
           <p:cNvSpPr txBox="1"/>
           <p:nvPr/>
         </p:nvSpPr>
@@ -6447,7 +6516,7 @@
       </p:sp>
       <p:sp>
         <p:nvSpPr>
-          <p:cNvPr id="19" name="TextBox 18"/>
+          <p:cNvPr id="21" name="TextBox 20"/>
           <p:cNvSpPr txBox="1"/>
           <p:nvPr/>
         </p:nvSpPr>
@@ -6484,7 +6553,7 @@
       </p:sp>
       <p:sp>
         <p:nvSpPr>
-          <p:cNvPr id="20" name="TextBox 19"/>
+          <p:cNvPr id="22" name="TextBox 21"/>
           <p:cNvSpPr txBox="1"/>
           <p:nvPr/>
         </p:nvSpPr>
@@ -6521,7 +6590,7 @@
       </p:sp>
       <p:sp>
         <p:nvSpPr>
-          <p:cNvPr id="21" name="TextBox 20"/>
+          <p:cNvPr id="23" name="TextBox 22"/>
           <p:cNvSpPr txBox="1"/>
           <p:nvPr/>
         </p:nvSpPr>
@@ -6558,7 +6627,7 @@
       </p:sp>
       <p:sp>
         <p:nvSpPr>
-          <p:cNvPr id="22" name="TextBox 21"/>
+          <p:cNvPr id="24" name="TextBox 23"/>
           <p:cNvSpPr txBox="1"/>
           <p:nvPr/>
         </p:nvSpPr>
@@ -6595,7 +6664,7 @@
       </p:sp>
       <p:sp>
         <p:nvSpPr>
-          <p:cNvPr id="23" name="TextBox 22"/>
+          <p:cNvPr id="25" name="TextBox 24"/>
           <p:cNvSpPr txBox="1"/>
           <p:nvPr/>
         </p:nvSpPr>
@@ -6632,7 +6701,7 @@
       </p:sp>
       <p:sp>
         <p:nvSpPr>
-          <p:cNvPr id="24" name="TextBox 23"/>
+          <p:cNvPr id="26" name="TextBox 25"/>
           <p:cNvSpPr txBox="1"/>
           <p:nvPr/>
         </p:nvSpPr>
@@ -6669,7 +6738,7 @@
       </p:sp>
       <p:sp>
         <p:nvSpPr>
-          <p:cNvPr id="25" name="TextBox 24"/>
+          <p:cNvPr id="27" name="TextBox 26"/>
           <p:cNvSpPr txBox="1"/>
           <p:nvPr/>
         </p:nvSpPr>
@@ -6706,7 +6775,7 @@
       </p:sp>
       <p:sp>
         <p:nvSpPr>
-          <p:cNvPr id="26" name="Rectangle 25"/>
+          <p:cNvPr id="28" name="Rectangle 27"/>
           <p:cNvSpPr/>
           <p:nvPr/>
         </p:nvSpPr>
@@ -6737,7 +6806,7 @@
       </p:sp>
       <p:pic>
         <p:nvPicPr>
-          <p:cNvPr id="27" name="static-photo" descr="image.jpg"/>
+          <p:cNvPr id="29" name="static-photo" descr="image.jpg"/>
           <p:cNvPicPr>
             <a:picLocks noChangeAspect="1"/>
           </p:cNvPicPr>
@@ -6761,7 +6830,7 @@
       </p:pic>
       <p:sp>
         <p:nvSpPr>
-          <p:cNvPr id="28" name="Rounded Rectangle 27"/>
+          <p:cNvPr id="30" name="Rounded Rectangle 29"/>
           <p:cNvSpPr/>
           <p:nvPr/>
         </p:nvSpPr>
@@ -6792,7 +6861,7 @@
       </p:sp>
       <p:sp>
         <p:nvSpPr>
-          <p:cNvPr id="29" name="TextBox 28"/>
+          <p:cNvPr id="31" name="TextBox 30"/>
           <p:cNvSpPr txBox="1"/>
           <p:nvPr/>
         </p:nvSpPr>
@@ -6829,7 +6898,75 @@
       </p:sp>
       <p:sp>
         <p:nvSpPr>
-          <p:cNvPr id="30" name="TextBox 29"/>
+          <p:cNvPr id="32" name="Rounded Rectangle 31"/>
+          <p:cNvSpPr/>
+          <p:nvPr/>
+        </p:nvSpPr>
+        <p:spPr>
+          <a:xfrm>
+            <a:off x="7741767" y="2423160"/>
+            <a:ext cx="1783080" cy="310896"/>
+          </a:xfrm>
+          <a:prstGeom prst="roundRect">
+            <a:avLst>
+              <a:gd name="adj" fmla="val 50000"/>
+            </a:avLst>
+          </a:prstGeom>
+          <a:solidFill>
+            <a:srgbClr val="C4A06A"/>
+          </a:solidFill>
+          <a:ln>
+            <a:noFill/>
+          </a:ln>
+        </p:spPr>
+        <p:txBody>
+          <a:bodyPr rtlCol="0" anchor="ctr"/>
+          <a:lstStyle/>
+          <a:p>
+            <a:pPr algn="ctr"/>
+          </a:p>
+        </p:txBody>
+      </p:sp>
+      <p:sp>
+        <p:nvSpPr>
+          <p:cNvPr id="33" name="TextBox 32"/>
+          <p:cNvSpPr txBox="1"/>
+          <p:nvPr/>
+        </p:nvSpPr>
+        <p:spPr>
+          <a:xfrm>
+            <a:off x="7741767" y="2478024"/>
+            <a:ext cx="1783080" cy="228600"/>
+          </a:xfrm>
+          <a:prstGeom prst="rect">
+            <a:avLst/>
+          </a:prstGeom>
+          <a:noFill/>
+        </p:spPr>
+        <p:txBody>
+          <a:bodyPr wrap="square" lIns="0" rIns="0" tIns="0" bIns="0">
+            <a:spAutoFit/>
+          </a:bodyPr>
+          <a:lstStyle/>
+          <a:p>
+            <a:pPr algn="ctr"/>
+            <a:r>
+              <a:rPr sz="800" b="1" i="0" spc="100">
+                <a:solidFill>
+                  <a:srgbClr val="0E0D0C"/>
+                </a:solidFill>
+                <a:latin typeface="Plus Jakarta Sans"/>
+                <a:ea typeface="Plus Jakarta Sans"/>
+                <a:cs typeface="Plus Jakarta Sans"/>
+              </a:rPr>
+              <a:t>+ FREE RED FLAG GIFT</a:t>
+            </a:r>
+          </a:p>
+        </p:txBody>
+      </p:sp>
+      <p:sp>
+        <p:nvSpPr>
+          <p:cNvPr id="34" name="TextBox 33"/>
           <p:cNvSpPr txBox="1"/>
           <p:nvPr/>
         </p:nvSpPr>
@@ -6870,7 +7007,7 @@
       </p:sp>
       <p:sp>
         <p:nvSpPr>
-          <p:cNvPr id="31" name="TextBox 30"/>
+          <p:cNvPr id="35" name="TextBox 34"/>
           <p:cNvSpPr txBox="1"/>
           <p:nvPr/>
         </p:nvSpPr>
@@ -6907,7 +7044,7 @@
       </p:sp>
       <p:sp>
         <p:nvSpPr>
-          <p:cNvPr id="32" name="TextBox 31"/>
+          <p:cNvPr id="36" name="TextBox 35"/>
           <p:cNvSpPr txBox="1"/>
           <p:nvPr/>
         </p:nvSpPr>
@@ -6948,7 +7085,7 @@
       </p:sp>
       <p:sp>
         <p:nvSpPr>
-          <p:cNvPr id="33" name="TextBox 32"/>
+          <p:cNvPr id="37" name="TextBox 36"/>
           <p:cNvSpPr txBox="1"/>
           <p:nvPr/>
         </p:nvSpPr>
@@ -6985,7 +7122,7 @@
       </p:sp>
       <p:sp>
         <p:nvSpPr>
-          <p:cNvPr id="34" name="TextBox 33"/>
+          <p:cNvPr id="38" name="TextBox 37"/>
           <p:cNvSpPr txBox="1"/>
           <p:nvPr/>
         </p:nvSpPr>
@@ -7022,7 +7159,7 @@
       </p:sp>
       <p:sp>
         <p:nvSpPr>
-          <p:cNvPr id="35" name="TextBox 34"/>
+          <p:cNvPr id="39" name="TextBox 38"/>
           <p:cNvSpPr txBox="1"/>
           <p:nvPr/>
         </p:nvSpPr>
@@ -7059,7 +7196,7 @@
       </p:sp>
       <p:sp>
         <p:nvSpPr>
-          <p:cNvPr id="36" name="TextBox 35"/>
+          <p:cNvPr id="40" name="TextBox 39"/>
           <p:cNvSpPr txBox="1"/>
           <p:nvPr/>
         </p:nvSpPr>
@@ -7096,7 +7233,7 @@
       </p:sp>
       <p:sp>
         <p:nvSpPr>
-          <p:cNvPr id="37" name="TextBox 36"/>
+          <p:cNvPr id="41" name="TextBox 40"/>
           <p:cNvSpPr txBox="1"/>
           <p:nvPr/>
         </p:nvSpPr>
@@ -7133,7 +7270,7 @@
       </p:sp>
       <p:sp>
         <p:nvSpPr>
-          <p:cNvPr id="38" name="TextBox 37"/>
+          <p:cNvPr id="42" name="TextBox 41"/>
           <p:cNvSpPr txBox="1"/>
           <p:nvPr/>
         </p:nvSpPr>
@@ -7170,7 +7307,7 @@
       </p:sp>
       <p:sp>
         <p:nvSpPr>
-          <p:cNvPr id="39" name="TextBox 38"/>
+          <p:cNvPr id="43" name="TextBox 42"/>
           <p:cNvSpPr txBox="1"/>
           <p:nvPr/>
         </p:nvSpPr>
@@ -7207,7 +7344,7 @@
       </p:sp>
       <p:sp>
         <p:nvSpPr>
-          <p:cNvPr id="40" name="TextBox 39"/>
+          <p:cNvPr id="44" name="TextBox 43"/>
           <p:cNvSpPr txBox="1"/>
           <p:nvPr/>
         </p:nvSpPr>
@@ -7244,7 +7381,7 @@
       </p:sp>
       <p:sp>
         <p:nvSpPr>
-          <p:cNvPr id="41" name="TextBox 40"/>
+          <p:cNvPr id="45" name="TextBox 44"/>
           <p:cNvSpPr txBox="1"/>
           <p:nvPr/>
         </p:nvSpPr>
@@ -7281,7 +7418,7 @@
       </p:sp>
       <p:sp>
         <p:nvSpPr>
-          <p:cNvPr id="42" name="TextBox 41"/>
+          <p:cNvPr id="46" name="TextBox 45"/>
           <p:cNvSpPr txBox="1"/>
           <p:nvPr/>
         </p:nvSpPr>
@@ -7318,7 +7455,7 @@
       </p:sp>
       <p:sp>
         <p:nvSpPr>
-          <p:cNvPr id="43" name="TextBox 42"/>
+          <p:cNvPr id="47" name="TextBox 46"/>
           <p:cNvSpPr txBox="1"/>
           <p:nvPr/>
         </p:nvSpPr>
@@ -7446,7 +7583,7 @@
                               <p:par>
                                 <p:cTn id="8" presetID="42" presetClass="entr" presetSubtype="0" fill="hold" grpId="0" nodeType="withEffect">
                                   <p:stCondLst>
-                                    <p:cond delay="304"/>
+                                    <p:cond delay="298"/>
                                   </p:stCondLst>
                                   <p:childTnLst>
                                     <p:set>
@@ -7527,7 +7664,7 @@
                               <p:par>
                                 <p:cTn id="13" presetID="10" presetClass="entr" presetSubtype="0" fill="hold" grpId="0" nodeType="withEffect">
                                   <p:stCondLst>
-                                    <p:cond delay="358"/>
+                                    <p:cond delay="346"/>
                                   </p:stCondLst>
                                   <p:childTnLst>
                                     <p:set>
@@ -7562,7 +7699,7 @@
                               <p:par>
                                 <p:cTn id="16" presetID="10" presetClass="entr" presetSubtype="0" fill="hold" grpId="0" nodeType="withEffect">
                                   <p:stCondLst>
-                                    <p:cond delay="412"/>
+                                    <p:cond delay="394"/>
                                   </p:stCondLst>
                                   <p:childTnLst>
                                     <p:set>
@@ -7573,7 +7710,7 @@
                                           </p:stCondLst>
                                         </p:cTn>
                                         <p:tgtEl>
-                                          <p:spTgt spid="26"/>
+                                          <p:spTgt spid="28"/>
                                         </p:tgtEl>
                                         <p:attrNameLst>
                                           <p:attrName>style.visibility</p:attrName>
@@ -7587,7 +7724,7 @@
                                       <p:cBhvr>
                                         <p:cTn id="18" dur="700"/>
                                         <p:tgtEl>
-                                          <p:spTgt spid="26"/>
+                                          <p:spTgt spid="28"/>
                                         </p:tgtEl>
                                       </p:cBhvr>
                                     </p:animEffect>
@@ -7597,7 +7734,7 @@
                               <p:par>
                                 <p:cTn id="19" presetID="10" presetClass="entr" presetSubtype="0" fill="hold" grpId="0" nodeType="withEffect">
                                   <p:stCondLst>
-                                    <p:cond delay="466"/>
+                                    <p:cond delay="442"/>
                                   </p:stCondLst>
                                   <p:childTnLst>
                                     <p:set>
@@ -7632,7 +7769,7 @@
                               <p:par>
                                 <p:cTn id="22" presetID="10" presetClass="entr" presetSubtype="0" fill="hold" grpId="0" nodeType="withEffect">
                                   <p:stCondLst>
-                                    <p:cond delay="520"/>
+                                    <p:cond delay="490"/>
                                   </p:stCondLst>
                                   <p:childTnLst>
                                     <p:set>
@@ -7667,7 +7804,7 @@
                               <p:par>
                                 <p:cTn id="25" presetID="10" presetClass="entr" presetSubtype="0" fill="hold" grpId="0" nodeType="withEffect">
                                   <p:stCondLst>
-                                    <p:cond delay="574"/>
+                                    <p:cond delay="538"/>
                                   </p:stCondLst>
                                   <p:childTnLst>
                                     <p:set>
@@ -7678,7 +7815,7 @@
                                           </p:stCondLst>
                                         </p:cTn>
                                         <p:tgtEl>
-                                          <p:spTgt spid="28"/>
+                                          <p:spTgt spid="13"/>
                                         </p:tgtEl>
                                         <p:attrNameLst>
                                           <p:attrName>style.visibility</p:attrName>
@@ -7692,7 +7829,7 @@
                                       <p:cBhvr>
                                         <p:cTn id="27" dur="700"/>
                                         <p:tgtEl>
-                                          <p:spTgt spid="28"/>
+                                          <p:spTgt spid="13"/>
                                         </p:tgtEl>
                                       </p:cBhvr>
                                     </p:animEffect>
@@ -7702,7 +7839,7 @@
                               <p:par>
                                 <p:cTn id="28" presetID="10" presetClass="entr" presetSubtype="0" fill="hold" grpId="0" nodeType="withEffect">
                                   <p:stCondLst>
-                                    <p:cond delay="628"/>
+                                    <p:cond delay="586"/>
                                   </p:stCondLst>
                                   <p:childTnLst>
                                     <p:set>
@@ -7713,7 +7850,7 @@
                                           </p:stCondLst>
                                         </p:cTn>
                                         <p:tgtEl>
-                                          <p:spTgt spid="29"/>
+                                          <p:spTgt spid="14"/>
                                         </p:tgtEl>
                                         <p:attrNameLst>
                                           <p:attrName>style.visibility</p:attrName>
@@ -7727,7 +7864,7 @@
                                       <p:cBhvr>
                                         <p:cTn id="30" dur="700"/>
                                         <p:tgtEl>
-                                          <p:spTgt spid="29"/>
+                                          <p:spTgt spid="14"/>
                                         </p:tgtEl>
                                       </p:cBhvr>
                                     </p:animEffect>
@@ -7735,20 +7872,55 @@
                                 </p:cTn>
                               </p:par>
                               <p:par>
-                                <p:cTn id="31" presetID="42" presetClass="entr" presetSubtype="0" fill="hold" grpId="0" nodeType="withEffect">
+                                <p:cTn id="31" presetID="10" presetClass="entr" presetSubtype="0" fill="hold" grpId="0" nodeType="withEffect">
+                                  <p:stCondLst>
+                                    <p:cond delay="634"/>
+                                  </p:stCondLst>
+                                  <p:childTnLst>
+                                    <p:set>
+                                      <p:cBhvr>
+                                        <p:cTn id="32" dur="1" fill="hold">
+                                          <p:stCondLst>
+                                            <p:cond delay="0"/>
+                                          </p:stCondLst>
+                                        </p:cTn>
+                                        <p:tgtEl>
+                                          <p:spTgt spid="30"/>
+                                        </p:tgtEl>
+                                        <p:attrNameLst>
+                                          <p:attrName>style.visibility</p:attrName>
+                                        </p:attrNameLst>
+                                      </p:cBhvr>
+                                      <p:to>
+                                        <p:strVal val="visible"/>
+                                      </p:to>
+                                    </p:set>
+                                    <p:animEffect transition="in" filter="fade">
+                                      <p:cBhvr>
+                                        <p:cTn id="33" dur="700"/>
+                                        <p:tgtEl>
+                                          <p:spTgt spid="30"/>
+                                        </p:tgtEl>
+                                      </p:cBhvr>
+                                    </p:animEffect>
+                                  </p:childTnLst>
+                                </p:cTn>
+                              </p:par>
+                              <p:par>
+                                <p:cTn id="34" presetID="10" presetClass="entr" presetSubtype="0" fill="hold" grpId="0" nodeType="withEffect">
                                   <p:stCondLst>
                                     <p:cond delay="682"/>
                                   </p:stCondLst>
                                   <p:childTnLst>
                                     <p:set>
                                       <p:cBhvr>
-                                        <p:cTn id="32" dur="1" fill="hold">
+                                        <p:cTn id="35" dur="1" fill="hold">
                                           <p:stCondLst>
                                             <p:cond delay="0"/>
                                           </p:stCondLst>
                                         </p:cTn>
                                         <p:tgtEl>
-                                          <p:spTgt spid="13"/>
+                                          <p:spTgt spid="31"/>
                                         </p:tgtEl>
                                         <p:attrNameLst>
                                           <p:attrName>style.visibility</p:attrName>
@@ -7760,17 +7932,122 @@
                                     </p:set>
                                     <p:animEffect transition="in" filter="fade">
                                       <p:cBhvr>
-                                        <p:cTn id="33" dur="900"/>
-                                        <p:tgtEl>
-                                          <p:spTgt spid="13"/>
+                                        <p:cTn id="36" dur="700"/>
+                                        <p:tgtEl>
+                                          <p:spTgt spid="31"/>
+                                        </p:tgtEl>
+                                      </p:cBhvr>
+                                    </p:animEffect>
+                                  </p:childTnLst>
+                                </p:cTn>
+                              </p:par>
+                              <p:par>
+                                <p:cTn id="37" presetID="10" presetClass="entr" presetSubtype="0" fill="hold" grpId="0" nodeType="withEffect">
+                                  <p:stCondLst>
+                                    <p:cond delay="730"/>
+                                  </p:stCondLst>
+                                  <p:childTnLst>
+                                    <p:set>
+                                      <p:cBhvr>
+                                        <p:cTn id="38" dur="1" fill="hold">
+                                          <p:stCondLst>
+                                            <p:cond delay="0"/>
+                                          </p:stCondLst>
+                                        </p:cTn>
+                                        <p:tgtEl>
+                                          <p:spTgt spid="32"/>
+                                        </p:tgtEl>
+                                        <p:attrNameLst>
+                                          <p:attrName>style.visibility</p:attrName>
+                                        </p:attrNameLst>
+                                      </p:cBhvr>
+                                      <p:to>
+                                        <p:strVal val="visible"/>
+                                      </p:to>
+                                    </p:set>
+                                    <p:animEffect transition="in" filter="fade">
+                                      <p:cBhvr>
+                                        <p:cTn id="39" dur="700"/>
+                                        <p:tgtEl>
+                                          <p:spTgt spid="32"/>
+                                        </p:tgtEl>
+                                      </p:cBhvr>
+                                    </p:animEffect>
+                                  </p:childTnLst>
+                                </p:cTn>
+                              </p:par>
+                              <p:par>
+                                <p:cTn id="40" presetID="10" presetClass="entr" presetSubtype="0" fill="hold" grpId="0" nodeType="withEffect">
+                                  <p:stCondLst>
+                                    <p:cond delay="778"/>
+                                  </p:stCondLst>
+                                  <p:childTnLst>
+                                    <p:set>
+                                      <p:cBhvr>
+                                        <p:cTn id="41" dur="1" fill="hold">
+                                          <p:stCondLst>
+                                            <p:cond delay="0"/>
+                                          </p:stCondLst>
+                                        </p:cTn>
+                                        <p:tgtEl>
+                                          <p:spTgt spid="33"/>
+                                        </p:tgtEl>
+                                        <p:attrNameLst>
+                                          <p:attrName>style.visibility</p:attrName>
+                                        </p:attrNameLst>
+                                      </p:cBhvr>
+                                      <p:to>
+                                        <p:strVal val="visible"/>
+                                      </p:to>
+                                    </p:set>
+                                    <p:animEffect transition="in" filter="fade">
+                                      <p:cBhvr>
+                                        <p:cTn id="42" dur="700"/>
+                                        <p:tgtEl>
+                                          <p:spTgt spid="33"/>
+                                        </p:tgtEl>
+                                      </p:cBhvr>
+                                    </p:animEffect>
+                                  </p:childTnLst>
+                                </p:cTn>
+                              </p:par>
+                              <p:par>
+                                <p:cTn id="43" presetID="42" presetClass="entr" presetSubtype="0" fill="hold" grpId="0" nodeType="withEffect">
+                                  <p:stCondLst>
+                                    <p:cond delay="826"/>
+                                  </p:stCondLst>
+                                  <p:childTnLst>
+                                    <p:set>
+                                      <p:cBhvr>
+                                        <p:cTn id="44" dur="1" fill="hold">
+                                          <p:stCondLst>
+                                            <p:cond delay="0"/>
+                                          </p:stCondLst>
+                                        </p:cTn>
+                                        <p:tgtEl>
+                                          <p:spTgt spid="15"/>
+                                        </p:tgtEl>
+                                        <p:attrNameLst>
+                                          <p:attrName>style.visibility</p:attrName>
+                                        </p:attrNameLst>
+                                      </p:cBhvr>
+                                      <p:to>
+                                        <p:strVal val="visible"/>
+                                      </p:to>
+                                    </p:set>
+                                    <p:animEffect transition="in" filter="fade">
+                                      <p:cBhvr>
+                                        <p:cTn id="45" dur="900"/>
+                                        <p:tgtEl>
+                                          <p:spTgt spid="15"/>
                                         </p:tgtEl>
                                       </p:cBhvr>
                                     </p:animEffect>
                                     <p:anim calcmode="lin" valueType="num">
                                       <p:cBhvr>
-                                        <p:cTn id="34" dur="900" decel="100000"/>
-                                        <p:tgtEl>
-                                          <p:spTgt spid="13"/>
+                                        <p:cTn id="46" dur="900" decel="100000"/>
+                                        <p:tgtEl>
+                                          <p:spTgt spid="15"/>
                                         </p:tgtEl>
                                         <p:attrNameLst>
                                           <p:attrName>ppt_x</p:attrName>
@@ -7791,9 +8068,9 @@
                                     </p:anim>
                                     <p:anim calcmode="lin" valueType="num">
                                       <p:cBhvr>
-                                        <p:cTn id="35" dur="900" decel="100000"/>
-                                        <p:tgtEl>
-                                          <p:spTgt spid="13"/>
+                                        <p:cTn id="47" dur="900" decel="100000"/>
+                                        <p:tgtEl>
+                                          <p:spTgt spid="15"/>
                                         </p:tgtEl>
                                         <p:attrNameLst>
                                           <p:attrName>ppt_y</p:attrName>
@@ -7816,20 +8093,20 @@
                                 </p:cTn>
                               </p:par>
                               <p:par>
-                                <p:cTn id="36" presetID="42" presetClass="entr" presetSubtype="0" fill="hold" grpId="0" nodeType="withEffect">
+                                <p:cTn id="48" presetID="42" presetClass="entr" presetSubtype="0" fill="hold" grpId="0" nodeType="withEffect">
                                   <p:stCondLst>
-                                    <p:cond delay="736"/>
+                                    <p:cond delay="874"/>
                                   </p:stCondLst>
                                   <p:childTnLst>
                                     <p:set>
                                       <p:cBhvr>
-                                        <p:cTn id="37" dur="1" fill="hold">
+                                        <p:cTn id="49" dur="1" fill="hold">
                                           <p:stCondLst>
                                             <p:cond delay="0"/>
                                           </p:stCondLst>
                                         </p:cTn>
                                         <p:tgtEl>
-                                          <p:spTgt spid="30"/>
+                                          <p:spTgt spid="34"/>
                                         </p:tgtEl>
                                         <p:attrNameLst>
                                           <p:attrName>style.visibility</p:attrName>
@@ -7841,17 +8118,17 @@
                                     </p:set>
                                     <p:animEffect transition="in" filter="fade">
                                       <p:cBhvr>
-                                        <p:cTn id="38" dur="900"/>
-                                        <p:tgtEl>
-                                          <p:spTgt spid="30"/>
+                                        <p:cTn id="50" dur="900"/>
+                                        <p:tgtEl>
+                                          <p:spTgt spid="34"/>
                                         </p:tgtEl>
                                       </p:cBhvr>
                                     </p:animEffect>
                                     <p:anim calcmode="lin" valueType="num">
                                       <p:cBhvr>
-                                        <p:cTn id="39" dur="900" decel="100000"/>
-                                        <p:tgtEl>
-                                          <p:spTgt spid="30"/>
+                                        <p:cTn id="51" dur="900" decel="100000"/>
+                                        <p:tgtEl>
+                                          <p:spTgt spid="34"/>
                                         </p:tgtEl>
                                         <p:attrNameLst>
                                           <p:attrName>ppt_x</p:attrName>
@@ -7872,9 +8149,9 @@
                                     </p:anim>
                                     <p:anim calcmode="lin" valueType="num">
                                       <p:cBhvr>
-                                        <p:cTn id="40" dur="900" decel="100000"/>
-                                        <p:tgtEl>
-                                          <p:spTgt spid="30"/>
+                                        <p:cTn id="52" dur="900" decel="100000"/>
+                                        <p:tgtEl>
+                                          <p:spTgt spid="34"/>
                                         </p:tgtEl>
                                         <p:attrNameLst>
                                           <p:attrName>ppt_y</p:attrName>
@@ -7897,20 +8174,20 @@
                                 </p:cTn>
                               </p:par>
                               <p:par>
-                                <p:cTn id="41" presetID="10" presetClass="entr" presetSubtype="0" fill="hold" grpId="0" nodeType="withEffect">
+                                <p:cTn id="53" presetID="10" presetClass="entr" presetSubtype="0" fill="hold" grpId="0" nodeType="withEffect">
                                   <p:stCondLst>
-                                    <p:cond delay="790"/>
+                                    <p:cond delay="922"/>
                                   </p:stCondLst>
                                   <p:childTnLst>
                                     <p:set>
                                       <p:cBhvr>
-                                        <p:cTn id="42" dur="1" fill="hold">
+                                        <p:cTn id="54" dur="1" fill="hold">
                                           <p:stCondLst>
                                             <p:cond delay="0"/>
                                           </p:stCondLst>
                                         </p:cTn>
                                         <p:tgtEl>
-                                          <p:spTgt spid="14"/>
+                                          <p:spTgt spid="16"/>
                                         </p:tgtEl>
                                         <p:attrNameLst>
                                           <p:attrName>style.visibility</p:attrName>
@@ -7922,9 +8199,9 @@
                                     </p:set>
                                     <p:animEffect transition="in" filter="fade">
                                       <p:cBhvr>
-                                        <p:cTn id="43" dur="700"/>
-                                        <p:tgtEl>
-                                          <p:spTgt spid="14"/>
+                                        <p:cTn id="55" dur="700"/>
+                                        <p:tgtEl>
+                                          <p:spTgt spid="16"/>
                                         </p:tgtEl>
                                       </p:cBhvr>
                                     </p:animEffect>
@@ -7932,20 +8209,20 @@
                                 </p:cTn>
                               </p:par>
                               <p:par>
-                                <p:cTn id="44" presetID="42" presetClass="entr" presetSubtype="0" fill="hold" grpId="0" nodeType="withEffect">
+                                <p:cTn id="56" presetID="42" presetClass="entr" presetSubtype="0" fill="hold" grpId="0" nodeType="withEffect">
                                   <p:stCondLst>
-                                    <p:cond delay="844"/>
+                                    <p:cond delay="970"/>
                                   </p:stCondLst>
                                   <p:childTnLst>
                                     <p:set>
                                       <p:cBhvr>
-                                        <p:cTn id="45" dur="1" fill="hold">
+                                        <p:cTn id="57" dur="1" fill="hold">
                                           <p:stCondLst>
                                             <p:cond delay="0"/>
                                           </p:stCondLst>
                                         </p:cTn>
                                         <p:tgtEl>
-                                          <p:spTgt spid="15"/>
+                                          <p:spTgt spid="17"/>
                                         </p:tgtEl>
                                         <p:attrNameLst>
                                           <p:attrName>style.visibility</p:attrName>
@@ -7957,17 +8234,17 @@
                                     </p:set>
                                     <p:animEffect transition="in" filter="fade">
                                       <p:cBhvr>
-                                        <p:cTn id="46" dur="900"/>
-                                        <p:tgtEl>
-                                          <p:spTgt spid="15"/>
+                                        <p:cTn id="58" dur="900"/>
+                                        <p:tgtEl>
+                                          <p:spTgt spid="17"/>
                                         </p:tgtEl>
                                       </p:cBhvr>
                                     </p:animEffect>
                                     <p:anim calcmode="lin" valueType="num">
                                       <p:cBhvr>
-                                        <p:cTn id="47" dur="900" decel="100000"/>
-                                        <p:tgtEl>
-                                          <p:spTgt spid="15"/>
+                                        <p:cTn id="59" dur="900" decel="100000"/>
+                                        <p:tgtEl>
+                                          <p:spTgt spid="17"/>
                                         </p:tgtEl>
                                         <p:attrNameLst>
                                           <p:attrName>ppt_x</p:attrName>
@@ -7988,9 +8265,9 @@
                                     </p:anim>
                                     <p:anim calcmode="lin" valueType="num">
                                       <p:cBhvr>
-                                        <p:cTn id="48" dur="900" decel="100000"/>
-                                        <p:tgtEl>
-                                          <p:spTgt spid="15"/>
+                                        <p:cTn id="60" dur="900" decel="100000"/>
+                                        <p:tgtEl>
+                                          <p:spTgt spid="17"/>
                                         </p:tgtEl>
                                         <p:attrNameLst>
                                           <p:attrName>ppt_y</p:attrName>
@@ -8013,20 +8290,20 @@
                                 </p:cTn>
                               </p:par>
                               <p:par>
-                                <p:cTn id="49" presetID="10" presetClass="entr" presetSubtype="0" fill="hold" grpId="0" nodeType="withEffect">
+                                <p:cTn id="61" presetID="10" presetClass="entr" presetSubtype="0" fill="hold" grpId="0" nodeType="withEffect">
                                   <p:stCondLst>
-                                    <p:cond delay="898"/>
+                                    <p:cond delay="1018"/>
                                   </p:stCondLst>
                                   <p:childTnLst>
                                     <p:set>
                                       <p:cBhvr>
-                                        <p:cTn id="50" dur="1" fill="hold">
+                                        <p:cTn id="62" dur="1" fill="hold">
                                           <p:stCondLst>
                                             <p:cond delay="0"/>
                                           </p:stCondLst>
                                         </p:cTn>
                                         <p:tgtEl>
-                                          <p:spTgt spid="31"/>
+                                          <p:spTgt spid="35"/>
                                         </p:tgtEl>
                                         <p:attrNameLst>
                                           <p:attrName>style.visibility</p:attrName>
@@ -8038,9 +8315,9 @@
                                     </p:set>
                                     <p:animEffect transition="in" filter="fade">
                                       <p:cBhvr>
-                                        <p:cTn id="51" dur="700"/>
-                                        <p:tgtEl>
-                                          <p:spTgt spid="31"/>
+                                        <p:cTn id="63" dur="700"/>
+                                        <p:tgtEl>
+                                          <p:spTgt spid="35"/>
                                         </p:tgtEl>
                                       </p:cBhvr>
                                     </p:animEffect>
@@ -8048,20 +8325,20 @@
                                 </p:cTn>
                               </p:par>
                               <p:par>
-                                <p:cTn id="52" presetID="42" presetClass="entr" presetSubtype="0" fill="hold" grpId="0" nodeType="withEffect">
+                                <p:cTn id="64" presetID="42" presetClass="entr" presetSubtype="0" fill="hold" grpId="0" nodeType="withEffect">
                                   <p:stCondLst>
-                                    <p:cond delay="952"/>
+                                    <p:cond delay="1066"/>
                                   </p:stCondLst>
                                   <p:childTnLst>
                                     <p:set>
                                       <p:cBhvr>
-                                        <p:cTn id="53" dur="1" fill="hold">
+                                        <p:cTn id="65" dur="1" fill="hold">
                                           <p:stCondLst>
                                             <p:cond delay="0"/>
                                           </p:stCondLst>
                                         </p:cTn>
                                         <p:tgtEl>
-                                          <p:spTgt spid="32"/>
+                                          <p:spTgt spid="36"/>
                                         </p:tgtEl>
                                         <p:attrNameLst>
                                           <p:attrName>style.visibility</p:attrName>
@@ -8073,17 +8350,17 @@
                                     </p:set>
                                     <p:animEffect transition="in" filter="fade">
                                       <p:cBhvr>
-                                        <p:cTn id="54" dur="900"/>
-                                        <p:tgtEl>
-                                          <p:spTgt spid="32"/>
+                                        <p:cTn id="66" dur="900"/>
+                                        <p:tgtEl>
+                                          <p:spTgt spid="36"/>
                                         </p:tgtEl>
                                       </p:cBhvr>
                                     </p:animEffect>
                                     <p:anim calcmode="lin" valueType="num">
                                       <p:cBhvr>
-                                        <p:cTn id="55" dur="900" decel="100000"/>
-                                        <p:tgtEl>
-                                          <p:spTgt spid="32"/>
+                                        <p:cTn id="67" dur="900" decel="100000"/>
+                                        <p:tgtEl>
+                                          <p:spTgt spid="36"/>
                                         </p:tgtEl>
                                         <p:attrNameLst>
                                           <p:attrName>ppt_x</p:attrName>
@@ -8104,9 +8381,9 @@
                                     </p:anim>
                                     <p:anim calcmode="lin" valueType="num">
                                       <p:cBhvr>
-                                        <p:cTn id="56" dur="900" decel="100000"/>
-                                        <p:tgtEl>
-                                          <p:spTgt spid="32"/>
+                                        <p:cTn id="68" dur="900" decel="100000"/>
+                                        <p:tgtEl>
+                                          <p:spTgt spid="36"/>
                                         </p:tgtEl>
                                         <p:attrNameLst>
                                           <p:attrName>ppt_y</p:attrName>
@@ -8129,20 +8406,20 @@
                                 </p:cTn>
                               </p:par>
                               <p:par>
-                                <p:cTn id="57" presetID="10" presetClass="entr" presetSubtype="0" fill="hold" grpId="0" nodeType="withEffect">
+                                <p:cTn id="69" presetID="10" presetClass="entr" presetSubtype="0" fill="hold" grpId="0" nodeType="withEffect">
                                   <p:stCondLst>
-                                    <p:cond delay="1006"/>
+                                    <p:cond delay="1114"/>
                                   </p:stCondLst>
                                   <p:childTnLst>
                                     <p:set>
                                       <p:cBhvr>
-                                        <p:cTn id="58" dur="1" fill="hold">
+                                        <p:cTn id="70" dur="1" fill="hold">
                                           <p:stCondLst>
                                             <p:cond delay="0"/>
                                           </p:stCondLst>
                                         </p:cTn>
                                         <p:tgtEl>
-                                          <p:spTgt spid="16"/>
+                                          <p:spTgt spid="18"/>
                                         </p:tgtEl>
                                         <p:attrNameLst>
                                           <p:attrName>style.visibility</p:attrName>
@@ -8154,149 +8431,9 @@
                                     </p:set>
                                     <p:animEffect transition="in" filter="fade">
                                       <p:cBhvr>
-                                        <p:cTn id="59" dur="700"/>
-                                        <p:tgtEl>
-                                          <p:spTgt spid="16"/>
-                                        </p:tgtEl>
-                                      </p:cBhvr>
-                                    </p:animEffect>
-                                  </p:childTnLst>
-                                </p:cTn>
-                              </p:par>
-                              <p:par>
-                                <p:cTn id="60" presetID="10" presetClass="entr" presetSubtype="0" fill="hold" grpId="0" nodeType="withEffect">
-                                  <p:stCondLst>
-                                    <p:cond delay="1060"/>
-                                  </p:stCondLst>
-                                  <p:childTnLst>
-                                    <p:set>
-                                      <p:cBhvr>
-                                        <p:cTn id="61" dur="1" fill="hold">
-                                          <p:stCondLst>
-                                            <p:cond delay="0"/>
-                                          </p:stCondLst>
-                                        </p:cTn>
-                                        <p:tgtEl>
-                                          <p:spTgt spid="33"/>
-                                        </p:tgtEl>
-                                        <p:attrNameLst>
-                                          <p:attrName>style.visibility</p:attrName>
-                                        </p:attrNameLst>
-                                      </p:cBhvr>
-                                      <p:to>
-                                        <p:strVal val="visible"/>
-                                      </p:to>
-                                    </p:set>
-                                    <p:animEffect transition="in" filter="fade">
-                                      <p:cBhvr>
-                                        <p:cTn id="62" dur="700"/>
-                                        <p:tgtEl>
-                                          <p:spTgt spid="33"/>
-                                        </p:tgtEl>
-                                      </p:cBhvr>
-                                    </p:animEffect>
-                                  </p:childTnLst>
-                                </p:cTn>
-                              </p:par>
-                              <p:par>
-                                <p:cTn id="63" presetID="10" presetClass="entr" presetSubtype="0" fill="hold" grpId="0" nodeType="withEffect">
-                                  <p:stCondLst>
-                                    <p:cond delay="1114"/>
-                                  </p:stCondLst>
-                                  <p:childTnLst>
-                                    <p:set>
-                                      <p:cBhvr>
-                                        <p:cTn id="64" dur="1" fill="hold">
-                                          <p:stCondLst>
-                                            <p:cond delay="0"/>
-                                          </p:stCondLst>
-                                        </p:cTn>
-                                        <p:tgtEl>
-                                          <p:spTgt spid="17"/>
-                                        </p:tgtEl>
-                                        <p:attrNameLst>
-                                          <p:attrName>style.visibility</p:attrName>
-                                        </p:attrNameLst>
-                                      </p:cBhvr>
-                                      <p:to>
-                                        <p:strVal val="visible"/>
-                                      </p:to>
-                                    </p:set>
-                                    <p:animEffect transition="in" filter="fade">
-                                      <p:cBhvr>
-                                        <p:cTn id="65" dur="700"/>
-                                        <p:tgtEl>
-                                          <p:spTgt spid="17"/>
-                                        </p:tgtEl>
-                                      </p:cBhvr>
-                                    </p:animEffect>
-                                  </p:childTnLst>
-                                </p:cTn>
-                              </p:par>
-                              <p:par>
-                                <p:cTn id="66" presetID="10" presetClass="entr" presetSubtype="0" fill="hold" grpId="0" nodeType="withEffect">
-                                  <p:stCondLst>
-                                    <p:cond delay="1168"/>
-                                  </p:stCondLst>
-                                  <p:childTnLst>
-                                    <p:set>
-                                      <p:cBhvr>
-                                        <p:cTn id="67" dur="1" fill="hold">
-                                          <p:stCondLst>
-                                            <p:cond delay="0"/>
-                                          </p:stCondLst>
-                                        </p:cTn>
+                                        <p:cTn id="71" dur="700"/>
                                         <p:tgtEl>
                                           <p:spTgt spid="18"/>
-                                        </p:tgtEl>
-                                        <p:attrNameLst>
-                                          <p:attrName>style.visibility</p:attrName>
-                                        </p:attrNameLst>
-                                      </p:cBhvr>
-                                      <p:to>
-                                        <p:strVal val="visible"/>
-                                      </p:to>
-                                    </p:set>
-                                    <p:animEffect transition="in" filter="fade">
-                                      <p:cBhvr>
-                                        <p:cTn id="68" dur="700"/>
-                                        <p:tgtEl>
-                                          <p:spTgt spid="18"/>
-                                        </p:tgtEl>
-                                      </p:cBhvr>
-                                    </p:animEffect>
-                                  </p:childTnLst>
-                                </p:cTn>
-                              </p:par>
-                              <p:par>
-                                <p:cTn id="69" presetID="10" presetClass="entr" presetSubtype="0" fill="hold" grpId="0" nodeType="withEffect">
-                                  <p:stCondLst>
-                                    <p:cond delay="1222"/>
-                                  </p:stCondLst>
-                                  <p:childTnLst>
-                                    <p:set>
-                                      <p:cBhvr>
-                                        <p:cTn id="70" dur="1" fill="hold">
-                                          <p:stCondLst>
-                                            <p:cond delay="0"/>
-                                          </p:stCondLst>
-                                        </p:cTn>
-                                        <p:tgtEl>
-                                          <p:spTgt spid="34"/>
-                                        </p:tgtEl>
-                                        <p:attrNameLst>
-                                          <p:attrName>style.visibility</p:attrName>
-                                        </p:attrNameLst>
-                                      </p:cBhvr>
-                                      <p:to>
-                                        <p:strVal val="visible"/>
-                                      </p:to>
-                                    </p:set>
-                                    <p:animEffect transition="in" filter="fade">
-                                      <p:cBhvr>
-                                        <p:cTn id="71" dur="700"/>
-                                        <p:tgtEl>
-                                          <p:spTgt spid="34"/>
                                         </p:tgtEl>
                                       </p:cBhvr>
                                     </p:animEffect>
@@ -8306,7 +8443,7 @@
                               <p:par>
                                 <p:cTn id="72" presetID="10" presetClass="entr" presetSubtype="0" fill="hold" grpId="0" nodeType="withEffect">
                                   <p:stCondLst>
-                                    <p:cond delay="1276"/>
+                                    <p:cond delay="1162"/>
                                   </p:stCondLst>
                                   <p:childTnLst>
                                     <p:set>
@@ -8317,7 +8454,7 @@
                                           </p:stCondLst>
                                         </p:cTn>
                                         <p:tgtEl>
-                                          <p:spTgt spid="35"/>
+                                          <p:spTgt spid="37"/>
                                         </p:tgtEl>
                                         <p:attrNameLst>
                                           <p:attrName>style.visibility</p:attrName>
@@ -8331,7 +8468,7 @@
                                       <p:cBhvr>
                                         <p:cTn id="74" dur="700"/>
                                         <p:tgtEl>
-                                          <p:spTgt spid="35"/>
+                                          <p:spTgt spid="37"/>
                                         </p:tgtEl>
                                       </p:cBhvr>
                                     </p:animEffect>
@@ -8341,7 +8478,7 @@
                               <p:par>
                                 <p:cTn id="75" presetID="10" presetClass="entr" presetSubtype="0" fill="hold" grpId="0" nodeType="withEffect">
                                   <p:stCondLst>
-                                    <p:cond delay="1330"/>
+                                    <p:cond delay="1210"/>
                                   </p:stCondLst>
                                   <p:childTnLst>
                                     <p:set>
@@ -8376,7 +8513,7 @@
                               <p:par>
                                 <p:cTn id="78" presetID="10" presetClass="entr" presetSubtype="0" fill="hold" grpId="0" nodeType="withEffect">
                                   <p:stCondLst>
-                                    <p:cond delay="1384"/>
+                                    <p:cond delay="1258"/>
                                   </p:stCondLst>
                                   <p:childTnLst>
                                     <p:set>
@@ -8411,7 +8548,7 @@
                               <p:par>
                                 <p:cTn id="81" presetID="10" presetClass="entr" presetSubtype="0" fill="hold" grpId="0" nodeType="withEffect">
                                   <p:stCondLst>
-                                    <p:cond delay="1438"/>
+                                    <p:cond delay="1306"/>
                                   </p:stCondLst>
                                   <p:childTnLst>
                                     <p:set>
@@ -8422,7 +8559,7 @@
                                           </p:stCondLst>
                                         </p:cTn>
                                         <p:tgtEl>
-                                          <p:spTgt spid="36"/>
+                                          <p:spTgt spid="38"/>
                                         </p:tgtEl>
                                         <p:attrNameLst>
                                           <p:attrName>style.visibility</p:attrName>
@@ -8436,7 +8573,7 @@
                                       <p:cBhvr>
                                         <p:cTn id="83" dur="700"/>
                                         <p:tgtEl>
-                                          <p:spTgt spid="36"/>
+                                          <p:spTgt spid="38"/>
                                         </p:tgtEl>
                                       </p:cBhvr>
                                     </p:animEffect>
@@ -8446,7 +8583,7 @@
                               <p:par>
                                 <p:cTn id="84" presetID="10" presetClass="entr" presetSubtype="0" fill="hold" grpId="0" nodeType="withEffect">
                                   <p:stCondLst>
-                                    <p:cond delay="1492"/>
+                                    <p:cond delay="1354"/>
                                   </p:stCondLst>
                                   <p:childTnLst>
                                     <p:set>
@@ -8457,7 +8594,7 @@
                                           </p:stCondLst>
                                         </p:cTn>
                                         <p:tgtEl>
-                                          <p:spTgt spid="37"/>
+                                          <p:spTgt spid="39"/>
                                         </p:tgtEl>
                                         <p:attrNameLst>
                                           <p:attrName>style.visibility</p:attrName>
@@ -8471,7 +8608,7 @@
                                       <p:cBhvr>
                                         <p:cTn id="86" dur="700"/>
                                         <p:tgtEl>
-                                          <p:spTgt spid="37"/>
+                                          <p:spTgt spid="39"/>
                                         </p:tgtEl>
                                       </p:cBhvr>
                                     </p:animEffect>
@@ -8481,7 +8618,7 @@
                               <p:par>
                                 <p:cTn id="87" presetID="10" presetClass="entr" presetSubtype="0" fill="hold" grpId="0" nodeType="withEffect">
                                   <p:stCondLst>
-                                    <p:cond delay="1546"/>
+                                    <p:cond delay="1402"/>
                                   </p:stCondLst>
                                   <p:childTnLst>
                                     <p:set>
@@ -8516,7 +8653,7 @@
                               <p:par>
                                 <p:cTn id="90" presetID="10" presetClass="entr" presetSubtype="0" fill="hold" grpId="0" nodeType="withEffect">
                                   <p:stCondLst>
-                                    <p:cond delay="1600"/>
+                                    <p:cond delay="1450"/>
                                   </p:stCondLst>
                                   <p:childTnLst>
                                     <p:set>
@@ -8527,7 +8664,7 @@
                                           </p:stCondLst>
                                         </p:cTn>
                                         <p:tgtEl>
-                                          <p:spTgt spid="23"/>
+                                          <p:spTgt spid="22"/>
                                         </p:tgtEl>
                                         <p:attrNameLst>
                                           <p:attrName>style.visibility</p:attrName>
@@ -8541,7 +8678,7 @@
                                       <p:cBhvr>
                                         <p:cTn id="92" dur="700"/>
                                         <p:tgtEl>
-                                          <p:spTgt spid="23"/>
+                                          <p:spTgt spid="22"/>
                                         </p:tgtEl>
                                       </p:cBhvr>
                                     </p:animEffect>
@@ -8551,7 +8688,7 @@
                               <p:par>
                                 <p:cTn id="93" presetID="10" presetClass="entr" presetSubtype="0" fill="hold" grpId="0" nodeType="withEffect">
                                   <p:stCondLst>
-                                    <p:cond delay="1654"/>
+                                    <p:cond delay="1498"/>
                                   </p:stCondLst>
                                   <p:childTnLst>
                                     <p:set>
@@ -8562,7 +8699,7 @@
                                           </p:stCondLst>
                                         </p:cTn>
                                         <p:tgtEl>
-                                          <p:spTgt spid="22"/>
+                                          <p:spTgt spid="40"/>
                                         </p:tgtEl>
                                         <p:attrNameLst>
                                           <p:attrName>style.visibility</p:attrName>
@@ -8576,7 +8713,7 @@
                                       <p:cBhvr>
                                         <p:cTn id="95" dur="700"/>
                                         <p:tgtEl>
-                                          <p:spTgt spid="22"/>
+                                          <p:spTgt spid="40"/>
                                         </p:tgtEl>
                                       </p:cBhvr>
                                     </p:animEffect>
@@ -8586,7 +8723,7 @@
                               <p:par>
                                 <p:cTn id="96" presetID="10" presetClass="entr" presetSubtype="0" fill="hold" grpId="0" nodeType="withEffect">
                                   <p:stCondLst>
-                                    <p:cond delay="1708"/>
+                                    <p:cond delay="1546"/>
                                   </p:stCondLst>
                                   <p:childTnLst>
                                     <p:set>
@@ -8597,7 +8734,7 @@
                                           </p:stCondLst>
                                         </p:cTn>
                                         <p:tgtEl>
-                                          <p:spTgt spid="24"/>
+                                          <p:spTgt spid="41"/>
                                         </p:tgtEl>
                                         <p:attrNameLst>
                                           <p:attrName>style.visibility</p:attrName>
@@ -8611,7 +8748,7 @@
                                       <p:cBhvr>
                                         <p:cTn id="98" dur="700"/>
                                         <p:tgtEl>
-                                          <p:spTgt spid="24"/>
+                                          <p:spTgt spid="41"/>
                                         </p:tgtEl>
                                       </p:cBhvr>
                                     </p:animEffect>
@@ -8621,7 +8758,7 @@
                               <p:par>
                                 <p:cTn id="99" presetID="10" presetClass="entr" presetSubtype="0" fill="hold" grpId="0" nodeType="withEffect">
                                   <p:stCondLst>
-                                    <p:cond delay="1762"/>
+                                    <p:cond delay="1594"/>
                                   </p:stCondLst>
                                   <p:childTnLst>
                                     <p:set>
@@ -8632,7 +8769,7 @@
                                           </p:stCondLst>
                                         </p:cTn>
                                         <p:tgtEl>
-                                          <p:spTgt spid="38"/>
+                                          <p:spTgt spid="23"/>
                                         </p:tgtEl>
                                         <p:attrNameLst>
                                           <p:attrName>style.visibility</p:attrName>
@@ -8646,7 +8783,7 @@
                                       <p:cBhvr>
                                         <p:cTn id="101" dur="700"/>
                                         <p:tgtEl>
-                                          <p:spTgt spid="38"/>
+                                          <p:spTgt spid="23"/>
                                         </p:tgtEl>
                                       </p:cBhvr>
                                     </p:animEffect>
@@ -8656,7 +8793,7 @@
                               <p:par>
                                 <p:cTn id="102" presetID="10" presetClass="entr" presetSubtype="0" fill="hold" grpId="0" nodeType="withEffect">
                                   <p:stCondLst>
-                                    <p:cond delay="1816"/>
+                                    <p:cond delay="1642"/>
                                   </p:stCondLst>
                                   <p:childTnLst>
                                     <p:set>
@@ -8667,7 +8804,7 @@
                                           </p:stCondLst>
                                         </p:cTn>
                                         <p:tgtEl>
-                                          <p:spTgt spid="40"/>
+                                          <p:spTgt spid="25"/>
                                         </p:tgtEl>
                                         <p:attrNameLst>
                                           <p:attrName>style.visibility</p:attrName>
@@ -8681,7 +8818,7 @@
                                       <p:cBhvr>
                                         <p:cTn id="104" dur="700"/>
                                         <p:tgtEl>
-                                          <p:spTgt spid="40"/>
+                                          <p:spTgt spid="25"/>
                                         </p:tgtEl>
                                       </p:cBhvr>
                                     </p:animEffect>
@@ -8691,7 +8828,7 @@
                               <p:par>
                                 <p:cTn id="105" presetID="10" presetClass="entr" presetSubtype="0" fill="hold" grpId="0" nodeType="withEffect">
                                   <p:stCondLst>
-                                    <p:cond delay="1870"/>
+                                    <p:cond delay="1690"/>
                                   </p:stCondLst>
                                   <p:childTnLst>
                                     <p:set>
@@ -8702,7 +8839,7 @@
                                           </p:stCondLst>
                                         </p:cTn>
                                         <p:tgtEl>
-                                          <p:spTgt spid="39"/>
+                                          <p:spTgt spid="24"/>
                                         </p:tgtEl>
                                         <p:attrNameLst>
                                           <p:attrName>style.visibility</p:attrName>
@@ -8716,7 +8853,7 @@
                                       <p:cBhvr>
                                         <p:cTn id="107" dur="700"/>
                                         <p:tgtEl>
-                                          <p:spTgt spid="39"/>
+                                          <p:spTgt spid="24"/>
                                         </p:tgtEl>
                                       </p:cBhvr>
                                     </p:animEffect>
@@ -8726,7 +8863,7 @@
                               <p:par>
                                 <p:cTn id="108" presetID="10" presetClass="entr" presetSubtype="0" fill="hold" grpId="0" nodeType="withEffect">
                                   <p:stCondLst>
-                                    <p:cond delay="1924"/>
+                                    <p:cond delay="1738"/>
                                   </p:stCondLst>
                                   <p:childTnLst>
                                     <p:set>
@@ -8737,7 +8874,7 @@
                                           </p:stCondLst>
                                         </p:cTn>
                                         <p:tgtEl>
-                                          <p:spTgt spid="41"/>
+                                          <p:spTgt spid="26"/>
                                         </p:tgtEl>
                                         <p:attrNameLst>
                                           <p:attrName>style.visibility</p:attrName>
@@ -8751,7 +8888,7 @@
                                       <p:cBhvr>
                                         <p:cTn id="110" dur="700"/>
                                         <p:tgtEl>
-                                          <p:spTgt spid="41"/>
+                                          <p:spTgt spid="26"/>
                                         </p:tgtEl>
                                       </p:cBhvr>
                                     </p:animEffect>
@@ -8761,7 +8898,7 @@
                               <p:par>
                                 <p:cTn id="111" presetID="10" presetClass="entr" presetSubtype="0" fill="hold" grpId="0" nodeType="withEffect">
                                   <p:stCondLst>
-                                    <p:cond delay="1978"/>
+                                    <p:cond delay="1786"/>
                                   </p:stCondLst>
                                   <p:childTnLst>
                                     <p:set>
@@ -8772,7 +8909,7 @@
                                           </p:stCondLst>
                                         </p:cTn>
                                         <p:tgtEl>
-                                          <p:spTgt spid="25"/>
+                                          <p:spTgt spid="42"/>
                                         </p:tgtEl>
                                         <p:attrNameLst>
                                           <p:attrName>style.visibility</p:attrName>
@@ -8786,7 +8923,7 @@
                                       <p:cBhvr>
                                         <p:cTn id="113" dur="700"/>
                                         <p:tgtEl>
-                                          <p:spTgt spid="25"/>
+                                          <p:spTgt spid="42"/>
                                         </p:tgtEl>
                                       </p:cBhvr>
                                     </p:animEffect>
@@ -8796,7 +8933,7 @@
                               <p:par>
                                 <p:cTn id="114" presetID="10" presetClass="entr" presetSubtype="0" fill="hold" grpId="0" nodeType="withEffect">
                                   <p:stCondLst>
-                                    <p:cond delay="2032"/>
+                                    <p:cond delay="1834"/>
                                   </p:stCondLst>
                                   <p:childTnLst>
                                     <p:set>
@@ -8807,7 +8944,7 @@
                                           </p:stCondLst>
                                         </p:cTn>
                                         <p:tgtEl>
-                                          <p:spTgt spid="42"/>
+                                          <p:spTgt spid="44"/>
                                         </p:tgtEl>
                                         <p:attrNameLst>
                                           <p:attrName>style.visibility</p:attrName>
@@ -8821,7 +8958,7 @@
                                       <p:cBhvr>
                                         <p:cTn id="116" dur="700"/>
                                         <p:tgtEl>
-                                          <p:spTgt spid="42"/>
+                                          <p:spTgt spid="44"/>
                                         </p:tgtEl>
                                       </p:cBhvr>
                                     </p:animEffect>
@@ -8831,7 +8968,7 @@
                               <p:par>
                                 <p:cTn id="117" presetID="10" presetClass="entr" presetSubtype="0" fill="hold" grpId="0" nodeType="withEffect">
                                   <p:stCondLst>
-                                    <p:cond delay="2086"/>
+                                    <p:cond delay="1882"/>
                                   </p:stCondLst>
                                   <p:childTnLst>
                                     <p:set>
@@ -8857,6 +8994,146 @@
                                         <p:cTn id="119" dur="700"/>
                                         <p:tgtEl>
                                           <p:spTgt spid="43"/>
+                                        </p:tgtEl>
+                                      </p:cBhvr>
+                                    </p:animEffect>
+                                  </p:childTnLst>
+                                </p:cTn>
+                              </p:par>
+                              <p:par>
+                                <p:cTn id="120" presetID="10" presetClass="entr" presetSubtype="0" fill="hold" grpId="0" nodeType="withEffect">
+                                  <p:stCondLst>
+                                    <p:cond delay="1930"/>
+                                  </p:stCondLst>
+                                  <p:childTnLst>
+                                    <p:set>
+                                      <p:cBhvr>
+                                        <p:cTn id="121" dur="1" fill="hold">
+                                          <p:stCondLst>
+                                            <p:cond delay="0"/>
+                                          </p:stCondLst>
+                                        </p:cTn>
+                                        <p:tgtEl>
+                                          <p:spTgt spid="45"/>
+                                        </p:tgtEl>
+                                        <p:attrNameLst>
+                                          <p:attrName>style.visibility</p:attrName>
+                                        </p:attrNameLst>
+                                      </p:cBhvr>
+                                      <p:to>
+                                        <p:strVal val="visible"/>
+                                      </p:to>
+                                    </p:set>
+                                    <p:animEffect transition="in" filter="fade">
+                                      <p:cBhvr>
+                                        <p:cTn id="122" dur="700"/>
+                                        <p:tgtEl>
+                                          <p:spTgt spid="45"/>
+                                        </p:tgtEl>
+                                      </p:cBhvr>
+                                    </p:animEffect>
+                                  </p:childTnLst>
+                                </p:cTn>
+                              </p:par>
+                              <p:par>
+                                <p:cTn id="123" presetID="10" presetClass="entr" presetSubtype="0" fill="hold" grpId="0" nodeType="withEffect">
+                                  <p:stCondLst>
+                                    <p:cond delay="1978"/>
+                                  </p:stCondLst>
+                                  <p:childTnLst>
+                                    <p:set>
+                                      <p:cBhvr>
+                                        <p:cTn id="124" dur="1" fill="hold">
+                                          <p:stCondLst>
+                                            <p:cond delay="0"/>
+                                          </p:stCondLst>
+                                        </p:cTn>
+                                        <p:tgtEl>
+                                          <p:spTgt spid="27"/>
+                                        </p:tgtEl>
+                                        <p:attrNameLst>
+                                          <p:attrName>style.visibility</p:attrName>
+                                        </p:attrNameLst>
+                                      </p:cBhvr>
+                                      <p:to>
+                                        <p:strVal val="visible"/>
+                                      </p:to>
+                                    </p:set>
+                                    <p:animEffect transition="in" filter="fade">
+                                      <p:cBhvr>
+                                        <p:cTn id="125" dur="700"/>
+                                        <p:tgtEl>
+                                          <p:spTgt spid="27"/>
+                                        </p:tgtEl>
+                                      </p:cBhvr>
+                                    </p:animEffect>
+                                  </p:childTnLst>
+                                </p:cTn>
+                              </p:par>
+                              <p:par>
+                                <p:cTn id="126" presetID="10" presetClass="entr" presetSubtype="0" fill="hold" grpId="0" nodeType="withEffect">
+                                  <p:stCondLst>
+                                    <p:cond delay="2026"/>
+                                  </p:stCondLst>
+                                  <p:childTnLst>
+                                    <p:set>
+                                      <p:cBhvr>
+                                        <p:cTn id="127" dur="1" fill="hold">
+                                          <p:stCondLst>
+                                            <p:cond delay="0"/>
+                                          </p:stCondLst>
+                                        </p:cTn>
+                                        <p:tgtEl>
+                                          <p:spTgt spid="46"/>
+                                        </p:tgtEl>
+                                        <p:attrNameLst>
+                                          <p:attrName>style.visibility</p:attrName>
+                                        </p:attrNameLst>
+                                      </p:cBhvr>
+                                      <p:to>
+                                        <p:strVal val="visible"/>
+                                      </p:to>
+                                    </p:set>
+                                    <p:animEffect transition="in" filter="fade">
+                                      <p:cBhvr>
+                                        <p:cTn id="128" dur="700"/>
+                                        <p:tgtEl>
+                                          <p:spTgt spid="46"/>
+                                        </p:tgtEl>
+                                      </p:cBhvr>
+                                    </p:animEffect>
+                                  </p:childTnLst>
+                                </p:cTn>
+                              </p:par>
+                              <p:par>
+                                <p:cTn id="129" presetID="10" presetClass="entr" presetSubtype="0" fill="hold" grpId="0" nodeType="withEffect">
+                                  <p:stCondLst>
+                                    <p:cond delay="2074"/>
+                                  </p:stCondLst>
+                                  <p:childTnLst>
+                                    <p:set>
+                                      <p:cBhvr>
+                                        <p:cTn id="130" dur="1" fill="hold">
+                                          <p:stCondLst>
+                                            <p:cond delay="0"/>
+                                          </p:stCondLst>
+                                        </p:cTn>
+                                        <p:tgtEl>
+                                          <p:spTgt spid="47"/>
+                                        </p:tgtEl>
+                                        <p:attrNameLst>
+                                          <p:attrName>style.visibility</p:attrName>
+                                        </p:attrNameLst>
+                                      </p:cBhvr>
+                                      <p:to>
+                                        <p:strVal val="visible"/>
+                                      </p:to>
+                                    </p:set>
+                                    <p:animEffect transition="in" filter="fade">
+                                      <p:cBhvr>
+                                        <p:cTn id="131" dur="700"/>
+                                        <p:tgtEl>
+                                          <p:spTgt spid="47"/>
                                         </p:tgtEl>
                                       </p:cBhvr>
                                     </p:animEffect>
@@ -8894,38 +9171,42 @@
       <p:bldP spid="7" grpId="0" animBg="1"/>
       <p:bldP spid="8" grpId="0" animBg="1"/>
       <p:bldP spid="9" grpId="0" animBg="1"/>
-      <p:bldP spid="26" grpId="0" animBg="1"/>
+      <p:bldP spid="28" grpId="0" animBg="1"/>
       <p:bldP spid="11" grpId="0" animBg="1"/>
       <p:bldP spid="12" grpId="0" animBg="1"/>
-      <p:bldP spid="28" grpId="0" animBg="1"/>
-      <p:bldP spid="29" grpId="0" animBg="1"/>
       <p:bldP spid="13" grpId="0" animBg="1"/>
+      <p:bldP spid="14" grpId="0" animBg="1"/>
       <p:bldP spid="30" grpId="0" animBg="1"/>
-      <p:bldP spid="14" grpId="0" animBg="1"/>
-      <p:bldP spid="15" grpId="0" animBg="1"/>
       <p:bldP spid="31" grpId="0" animBg="1"/>
       <p:bldP spid="32" grpId="0" animBg="1"/>
+      <p:bldP spid="33" grpId="0" animBg="1"/>
+      <p:bldP spid="15" grpId="0" animBg="1"/>
+      <p:bldP spid="34" grpId="0" animBg="1"/>
       <p:bldP spid="16" grpId="0" animBg="1"/>
-      <p:bldP spid="33" grpId="0" animBg="1"/>
       <p:bldP spid="17" grpId="0" animBg="1"/>
+      <p:bldP spid="35" grpId="0" animBg="1"/>
+      <p:bldP spid="36" grpId="0" animBg="1"/>
       <p:bldP spid="18" grpId="0" animBg="1"/>
-      <p:bldP spid="34" grpId="0" animBg="1"/>
-      <p:bldP spid="35" grpId="0" animBg="1"/>
+      <p:bldP spid="37" grpId="0" animBg="1"/>
       <p:bldP spid="19" grpId="0" animBg="1"/>
       <p:bldP spid="20" grpId="0" animBg="1"/>
-      <p:bldP spid="36" grpId="0" animBg="1"/>
-      <p:bldP spid="37" grpId="0" animBg="1"/>
+      <p:bldP spid="38" grpId="0" animBg="1"/>
+      <p:bldP spid="39" grpId="0" animBg="1"/>
       <p:bldP spid="21" grpId="0" animBg="1"/>
+      <p:bldP spid="22" grpId="0" animBg="1"/>
+      <p:bldP spid="40" grpId="0" animBg="1"/>
+      <p:bldP spid="41" grpId="0" animBg="1"/>
       <p:bldP spid="23" grpId="0" animBg="1"/>
-      <p:bldP spid="22" grpId="0" animBg="1"/>
+      <p:bldP spid="25" grpId="0" animBg="1"/>
       <p:bldP spid="24" grpId="0" animBg="1"/>
-      <p:bldP spid="38" grpId="0" animBg="1"/>
-      <p:bldP spid="40" grpId="0" animBg="1"/>
-      <p:bldP spid="39" grpId="0" animBg="1"/>
-      <p:bldP spid="41" grpId="0" animBg="1"/>
-      <p:bldP spid="25" grpId="0" animBg="1"/>
+      <p:bldP spid="26" grpId="0" animBg="1"/>
       <p:bldP spid="42" grpId="0" animBg="1"/>
+      <p:bldP spid="44" grpId="0" animBg="1"/>
       <p:bldP spid="43" grpId="0" animBg="1"/>
+      <p:bldP spid="45" grpId="0" animBg="1"/>
+      <p:bldP spid="27" grpId="0" animBg="1"/>
+      <p:bldP spid="46" grpId="0" animBg="1"/>
+      <p:bldP spid="47" grpId="0" animBg="1"/>
     </p:bldLst>
   </p:timing>
 </p:sld>
@@ -8956,6 +9237,2431 @@
             <a:avLst/>
           </a:prstGeom>
           <a:solidFill>
+            <a:srgbClr val="151311"/>
+          </a:solidFill>
+          <a:ln>
+            <a:noFill/>
+          </a:ln>
+        </p:spPr>
+        <p:txBody>
+          <a:bodyPr rtlCol="0" anchor="ctr"/>
+          <a:lstStyle/>
+          <a:p>
+            <a:pPr algn="ctr"/>
+          </a:p>
+        </p:txBody>
+      </p:sp>
+      <p:sp>
+        <p:nvSpPr>
+          <p:cNvPr id="4" name="chrome"/>
+          <p:cNvSpPr txBox="1"/>
+          <p:nvPr/>
+        </p:nvSpPr>
+        <p:spPr>
+          <a:xfrm>
+            <a:off x="685800" y="475488"/>
+            <a:ext cx="5486400" cy="228600"/>
+          </a:xfrm>
+          <a:prstGeom prst="rect">
+            <a:avLst/>
+          </a:prstGeom>
+          <a:noFill/>
+        </p:spPr>
+        <p:txBody>
+          <a:bodyPr wrap="square" lIns="0" rIns="0" tIns="0" bIns="0">
+            <a:spAutoFit/>
+          </a:bodyPr>
+          <a:lstStyle/>
+          <a:p>
+            <a:pPr algn="l"/>
+            <a:r>
+              <a:rPr sz="700" b="1" i="0" spc="300">
+                <a:solidFill>
+                  <a:srgbClr val="958A7B"/>
+                </a:solidFill>
+                <a:latin typeface="Plus Jakarta Sans"/>
+                <a:ea typeface="Plus Jakarta Sans"/>
+                <a:cs typeface="Plus Jakarta Sans"/>
+              </a:rPr>
+              <a:t>THE DROP  ·  STUDIO NOIR</a:t>
+            </a:r>
+          </a:p>
+        </p:txBody>
+      </p:sp>
+      <p:sp>
+        <p:nvSpPr>
+          <p:cNvPr id="5" name="chrome"/>
+          <p:cNvSpPr txBox="1"/>
+          <p:nvPr/>
+        </p:nvSpPr>
+        <p:spPr>
+          <a:xfrm>
+            <a:off x="685800" y="6400800"/>
+            <a:ext cx="3657600" cy="228600"/>
+          </a:xfrm>
+          <a:prstGeom prst="rect">
+            <a:avLst/>
+          </a:prstGeom>
+          <a:noFill/>
+        </p:spPr>
+        <p:txBody>
+          <a:bodyPr wrap="square" lIns="0" rIns="0" tIns="0" bIns="0">
+            <a:spAutoFit/>
+          </a:bodyPr>
+          <a:lstStyle/>
+          <a:p>
+            <a:pPr algn="l"/>
+            <a:r>
+              <a:rPr sz="700" b="1" i="0" spc="300">
+                <a:solidFill>
+                  <a:srgbClr val="958A7B"/>
+                </a:solidFill>
+                <a:latin typeface="Plus Jakarta Sans"/>
+                <a:ea typeface="Plus Jakarta Sans"/>
+                <a:cs typeface="Plus Jakarta Sans"/>
+              </a:rPr>
+              <a:t>REDFLAGHOMES.IN</a:t>
+            </a:r>
+          </a:p>
+        </p:txBody>
+      </p:sp>
+      <p:sp>
+        <p:nvSpPr>
+          <p:cNvPr id="6" name="chrome"/>
+          <p:cNvSpPr txBox="1"/>
+          <p:nvPr/>
+        </p:nvSpPr>
+        <p:spPr>
+          <a:xfrm>
+            <a:off x="10134295" y="6400800"/>
+            <a:ext cx="1371600" cy="228600"/>
+          </a:xfrm>
+          <a:prstGeom prst="rect">
+            <a:avLst/>
+          </a:prstGeom>
+          <a:noFill/>
+        </p:spPr>
+        <p:txBody>
+          <a:bodyPr wrap="square" lIns="0" rIns="0" tIns="0" bIns="0">
+            <a:spAutoFit/>
+          </a:bodyPr>
+          <a:lstStyle/>
+          <a:p>
+            <a:pPr algn="r"/>
+            <a:r>
+              <a:rPr sz="700" b="1" i="0" spc="200">
+                <a:solidFill>
+                  <a:srgbClr val="958A7B"/>
+                </a:solidFill>
+                <a:latin typeface="Plus Jakarta Sans"/>
+                <a:ea typeface="Plus Jakarta Sans"/>
+                <a:cs typeface="Plus Jakarta Sans"/>
+              </a:rPr>
+              <a:t>12 / 18</a:t>
+            </a:r>
+          </a:p>
+        </p:txBody>
+      </p:sp>
+      <p:sp>
+        <p:nvSpPr>
+          <p:cNvPr id="7" name="Rectangle 6"/>
+          <p:cNvSpPr/>
+          <p:nvPr/>
+        </p:nvSpPr>
+        <p:spPr>
+          <a:xfrm>
+            <a:off x="685800" y="1005840"/>
+            <a:ext cx="5303520" cy="5120640"/>
+          </a:xfrm>
+          <a:prstGeom prst="rect">
+            <a:avLst/>
+          </a:prstGeom>
+          <a:solidFill>
+            <a:srgbClr val="201C19"/>
+          </a:solidFill>
+          <a:ln>
+            <a:noFill/>
+          </a:ln>
+        </p:spPr>
+        <p:txBody>
+          <a:bodyPr rtlCol="0" anchor="ctr"/>
+          <a:lstStyle/>
+          <a:p>
+            <a:pPr algn="ctr"/>
+          </a:p>
+        </p:txBody>
+      </p:sp>
+      <p:sp>
+        <p:nvSpPr>
+          <p:cNvPr id="8" name="static-plate"/>
+          <p:cNvSpPr/>
+          <p:nvPr/>
+        </p:nvSpPr>
+        <p:spPr>
+          <a:xfrm>
+            <a:off x="868680" y="2011680"/>
+            <a:ext cx="4937760" cy="2377440"/>
+          </a:xfrm>
+          <a:prstGeom prst="roundRect">
+            <a:avLst>
+              <a:gd name="adj" fmla="val 5000"/>
+            </a:avLst>
+          </a:prstGeom>
+          <a:solidFill>
+            <a:srgbClr val="C4A06A"/>
+          </a:solidFill>
+          <a:ln w="12700">
+            <a:solidFill>
+              <a:srgbClr val="E2C48E"/>
+            </a:solidFill>
+          </a:ln>
+        </p:spPr>
+        <p:txBody>
+          <a:bodyPr rtlCol="0" anchor="ctr"/>
+          <a:lstStyle/>
+          <a:p>
+            <a:pPr algn="ctr"/>
+          </a:p>
+        </p:txBody>
+      </p:sp>
+      <p:sp>
+        <p:nvSpPr>
+          <p:cNvPr id="9" name="static-plate"/>
+          <p:cNvSpPr/>
+          <p:nvPr/>
+        </p:nvSpPr>
+        <p:spPr>
+          <a:xfrm>
+            <a:off x="1033271" y="2176272"/>
+            <a:ext cx="4608576" cy="2048256"/>
+          </a:xfrm>
+          <a:prstGeom prst="roundRect">
+            <a:avLst>
+              <a:gd name="adj" fmla="val 4000"/>
+            </a:avLst>
+          </a:prstGeom>
+          <a:solidFill>
+            <a:srgbClr val="C4A06A"/>
+          </a:solidFill>
+          <a:ln w="12700">
+            <a:solidFill>
+              <a:srgbClr val="8E6C3A"/>
+            </a:solidFill>
+          </a:ln>
+        </p:spPr>
+        <p:txBody>
+          <a:bodyPr rtlCol="0" anchor="ctr"/>
+          <a:lstStyle/>
+          <a:p>
+            <a:pPr algn="ctr"/>
+          </a:p>
+        </p:txBody>
+      </p:sp>
+      <p:sp>
+        <p:nvSpPr>
+          <p:cNvPr id="10" name="static-screw"/>
+          <p:cNvSpPr/>
+          <p:nvPr/>
+        </p:nvSpPr>
+        <p:spPr>
+          <a:xfrm>
+            <a:off x="1188719" y="2331720"/>
+            <a:ext cx="137160" cy="137160"/>
+          </a:xfrm>
+          <a:prstGeom prst="ellipse">
+            <a:avLst/>
+          </a:prstGeom>
+          <a:solidFill>
+            <a:srgbClr val="7A5C2E"/>
+          </a:solidFill>
+          <a:ln>
+            <a:noFill/>
+          </a:ln>
+        </p:spPr>
+        <p:txBody>
+          <a:bodyPr rtlCol="0" anchor="ctr"/>
+          <a:lstStyle/>
+          <a:p>
+            <a:pPr algn="ctr"/>
+          </a:p>
+        </p:txBody>
+      </p:sp>
+      <p:sp>
+        <p:nvSpPr>
+          <p:cNvPr id="11" name="static-screw"/>
+          <p:cNvSpPr/>
+          <p:nvPr/>
+        </p:nvSpPr>
+        <p:spPr>
+          <a:xfrm>
+            <a:off x="5349240" y="2331720"/>
+            <a:ext cx="137160" cy="137160"/>
+          </a:xfrm>
+          <a:prstGeom prst="ellipse">
+            <a:avLst/>
+          </a:prstGeom>
+          <a:solidFill>
+            <a:srgbClr val="7A5C2E"/>
+          </a:solidFill>
+          <a:ln>
+            <a:noFill/>
+          </a:ln>
+        </p:spPr>
+        <p:txBody>
+          <a:bodyPr rtlCol="0" anchor="ctr"/>
+          <a:lstStyle/>
+          <a:p>
+            <a:pPr algn="ctr"/>
+          </a:p>
+        </p:txBody>
+      </p:sp>
+      <p:sp>
+        <p:nvSpPr>
+          <p:cNvPr id="12" name="static-screw"/>
+          <p:cNvSpPr/>
+          <p:nvPr/>
+        </p:nvSpPr>
+        <p:spPr>
+          <a:xfrm>
+            <a:off x="1188719" y="3931920"/>
+            <a:ext cx="137160" cy="137160"/>
+          </a:xfrm>
+          <a:prstGeom prst="ellipse">
+            <a:avLst/>
+          </a:prstGeom>
+          <a:solidFill>
+            <a:srgbClr val="7A5C2E"/>
+          </a:solidFill>
+          <a:ln>
+            <a:noFill/>
+          </a:ln>
+        </p:spPr>
+        <p:txBody>
+          <a:bodyPr rtlCol="0" anchor="ctr"/>
+          <a:lstStyle/>
+          <a:p>
+            <a:pPr algn="ctr"/>
+          </a:p>
+        </p:txBody>
+      </p:sp>
+      <p:sp>
+        <p:nvSpPr>
+          <p:cNvPr id="13" name="static-screw"/>
+          <p:cNvSpPr/>
+          <p:nvPr/>
+        </p:nvSpPr>
+        <p:spPr>
+          <a:xfrm>
+            <a:off x="5349240" y="3931920"/>
+            <a:ext cx="137160" cy="137160"/>
+          </a:xfrm>
+          <a:prstGeom prst="ellipse">
+            <a:avLst/>
+          </a:prstGeom>
+          <a:solidFill>
+            <a:srgbClr val="7A5C2E"/>
+          </a:solidFill>
+          <a:ln>
+            <a:noFill/>
+          </a:ln>
+        </p:spPr>
+        <p:txBody>
+          <a:bodyPr rtlCol="0" anchor="ctr"/>
+          <a:lstStyle/>
+          <a:p>
+            <a:pPr algn="ctr"/>
+          </a:p>
+        </p:txBody>
+      </p:sp>
+      <p:sp>
+        <p:nvSpPr>
+          <p:cNvPr id="14" name="TextBox 13"/>
+          <p:cNvSpPr txBox="1"/>
+          <p:nvPr/>
+        </p:nvSpPr>
+        <p:spPr>
+          <a:xfrm>
+            <a:off x="868680" y="2697480"/>
+            <a:ext cx="4937760" cy="365760"/>
+          </a:xfrm>
+          <a:prstGeom prst="rect">
+            <a:avLst/>
+          </a:prstGeom>
+          <a:noFill/>
+        </p:spPr>
+        <p:txBody>
+          <a:bodyPr wrap="square" lIns="0" rIns="0" tIns="0" bIns="0">
+            <a:spAutoFit/>
+          </a:bodyPr>
+          <a:lstStyle/>
+          <a:p>
+            <a:pPr algn="ctr"/>
+            <a:r>
+              <a:rPr sz="1500" b="1" i="0" spc="500">
+                <a:solidFill>
+                  <a:srgbClr val="0E0D0C"/>
+                </a:solidFill>
+                <a:latin typeface="Plus Jakarta Sans"/>
+                <a:ea typeface="Plus Jakarta Sans"/>
+                <a:cs typeface="Plus Jakarta Sans"/>
+              </a:rPr>
+              <a:t>RED FLAG  ×</a:t>
+            </a:r>
+          </a:p>
+        </p:txBody>
+      </p:sp>
+      <p:sp>
+        <p:nvSpPr>
+          <p:cNvPr id="15" name="TextBox 14"/>
+          <p:cNvSpPr txBox="1"/>
+          <p:nvPr/>
+        </p:nvSpPr>
+        <p:spPr>
+          <a:xfrm>
+            <a:off x="868680" y="3108960"/>
+            <a:ext cx="4937760" cy="731520"/>
+          </a:xfrm>
+          <a:prstGeom prst="rect">
+            <a:avLst/>
+          </a:prstGeom>
+          <a:noFill/>
+        </p:spPr>
+        <p:txBody>
+          <a:bodyPr wrap="square" lIns="0" rIns="0" tIns="0" bIns="0">
+            <a:spAutoFit/>
+          </a:bodyPr>
+          <a:lstStyle/>
+          <a:p>
+            <a:pPr algn="ctr">
+              <a:lnSpc>
+                <a:spcPct val="92000"/>
+              </a:lnSpc>
+            </a:pPr>
+            <a:r>
+              <a:rPr sz="4000" b="0" i="1">
+                <a:solidFill>
+                  <a:srgbClr val="0E0D0C"/>
+                </a:solidFill>
+                <a:latin typeface="Cormorant Garamond"/>
+                <a:ea typeface="Plus Jakarta Sans"/>
+                <a:cs typeface="Plus Jakarta Sans"/>
+              </a:rPr>
+              <a:t>Your Property</a:t>
+            </a:r>
+          </a:p>
+        </p:txBody>
+      </p:sp>
+      <p:sp>
+        <p:nvSpPr>
+          <p:cNvPr id="16" name="TextBox 15"/>
+          <p:cNvSpPr txBox="1"/>
+          <p:nvPr/>
+        </p:nvSpPr>
+        <p:spPr>
+          <a:xfrm>
+            <a:off x="685800" y="4846320"/>
+            <a:ext cx="5303520" cy="274320"/>
+          </a:xfrm>
+          <a:prstGeom prst="rect">
+            <a:avLst/>
+          </a:prstGeom>
+          <a:noFill/>
+        </p:spPr>
+        <p:txBody>
+          <a:bodyPr wrap="square" lIns="0" rIns="0" tIns="0" bIns="0">
+            <a:spAutoFit/>
+          </a:bodyPr>
+          <a:lstStyle/>
+          <a:p>
+            <a:pPr algn="ctr"/>
+            <a:r>
+              <a:rPr sz="1000" b="0" i="1">
+                <a:solidFill>
+                  <a:srgbClr val="958A7B"/>
+                </a:solidFill>
+                <a:latin typeface="Plus Jakarta Sans"/>
+                <a:ea typeface="Plus Jakarta Sans"/>
+                <a:cs typeface="Plus Jakarta Sans"/>
+              </a:rPr>
+              <a:t>Branded brass name plate</a:t>
+            </a:r>
+          </a:p>
+        </p:txBody>
+      </p:sp>
+      <p:sp>
+        <p:nvSpPr>
+          <p:cNvPr id="17" name="TextBox 16"/>
+          <p:cNvSpPr txBox="1"/>
+          <p:nvPr/>
+        </p:nvSpPr>
+        <p:spPr>
+          <a:xfrm>
+            <a:off x="6583680" y="1005840"/>
+            <a:ext cx="5486400" cy="228600"/>
+          </a:xfrm>
+          <a:prstGeom prst="rect">
+            <a:avLst/>
+          </a:prstGeom>
+          <a:noFill/>
+        </p:spPr>
+        <p:txBody>
+          <a:bodyPr wrap="square" lIns="0" rIns="0" tIns="0" bIns="0">
+            <a:spAutoFit/>
+          </a:bodyPr>
+          <a:lstStyle/>
+          <a:p>
+            <a:pPr algn="l"/>
+            <a:r>
+              <a:rPr sz="800" b="1" i="0" spc="300">
+                <a:solidFill>
+                  <a:srgbClr val="C4A06A"/>
+                </a:solidFill>
+                <a:latin typeface="Plus Jakarta Sans"/>
+                <a:ea typeface="Plus Jakarta Sans"/>
+                <a:cs typeface="Plus Jakarta Sans"/>
+              </a:rPr>
+              <a:t>FREE WITH BOTH PACKAGES</a:t>
+            </a:r>
+          </a:p>
+        </p:txBody>
+      </p:sp>
+      <p:sp>
+        <p:nvSpPr>
+          <p:cNvPr id="18" name="TextBox 17"/>
+          <p:cNvSpPr txBox="1"/>
+          <p:nvPr/>
+        </p:nvSpPr>
+        <p:spPr>
+          <a:xfrm>
+            <a:off x="6583680" y="1280160"/>
+            <a:ext cx="4922215" cy="1280160"/>
+          </a:xfrm>
+          <a:prstGeom prst="rect">
+            <a:avLst/>
+          </a:prstGeom>
+          <a:noFill/>
+        </p:spPr>
+        <p:txBody>
+          <a:bodyPr wrap="square" lIns="0" rIns="0" tIns="0" bIns="0">
+            <a:spAutoFit/>
+          </a:bodyPr>
+          <a:lstStyle/>
+          <a:p>
+            <a:pPr algn="l">
+              <a:lnSpc>
+                <a:spcPct val="98000"/>
+              </a:lnSpc>
+            </a:pPr>
+            <a:r>
+              <a:rPr sz="3800" b="0" i="0">
+                <a:solidFill>
+                  <a:srgbClr val="EFE6D8"/>
+                </a:solidFill>
+                <a:latin typeface="Cormorant Garamond"/>
+                <a:ea typeface="Plus Jakarta Sans"/>
+                <a:cs typeface="Plus Jakarta Sans"/>
+              </a:rPr>
+              <a:t>A welcome gift
+from Red Flag Homes.</a:t>
+            </a:r>
+          </a:p>
+        </p:txBody>
+      </p:sp>
+      <p:sp>
+        <p:nvSpPr>
+          <p:cNvPr id="19" name="Rectangle 18"/>
+          <p:cNvSpPr/>
+          <p:nvPr/>
+        </p:nvSpPr>
+        <p:spPr>
+          <a:xfrm>
+            <a:off x="6583680" y="2788920"/>
+            <a:ext cx="4922215" cy="10972"/>
+          </a:xfrm>
+          <a:prstGeom prst="rect">
+            <a:avLst/>
+          </a:prstGeom>
+          <a:solidFill>
+            <a:srgbClr val="39322B"/>
+          </a:solidFill>
+          <a:ln>
+            <a:noFill/>
+          </a:ln>
+        </p:spPr>
+        <p:txBody>
+          <a:bodyPr rtlCol="0" anchor="ctr"/>
+          <a:lstStyle/>
+          <a:p>
+            <a:pPr algn="ctr"/>
+          </a:p>
+        </p:txBody>
+      </p:sp>
+      <p:sp>
+        <p:nvSpPr>
+          <p:cNvPr id="20" name="TextBox 19"/>
+          <p:cNvSpPr txBox="1"/>
+          <p:nvPr/>
+        </p:nvSpPr>
+        <p:spPr>
+          <a:xfrm>
+            <a:off x="6583680" y="2935224"/>
+            <a:ext cx="548640" cy="365760"/>
+          </a:xfrm>
+          <a:prstGeom prst="rect">
+            <a:avLst/>
+          </a:prstGeom>
+          <a:noFill/>
+        </p:spPr>
+        <p:txBody>
+          <a:bodyPr wrap="square" lIns="0" rIns="0" tIns="0" bIns="0">
+            <a:spAutoFit/>
+          </a:bodyPr>
+          <a:lstStyle/>
+          <a:p>
+            <a:pPr algn="l"/>
+            <a:r>
+              <a:rPr sz="1200" b="1" i="0">
+                <a:solidFill>
+                  <a:srgbClr val="C4A06A"/>
+                </a:solidFill>
+                <a:latin typeface="Plus Jakarta Sans"/>
+                <a:ea typeface="Plus Jakarta Sans"/>
+                <a:cs typeface="Plus Jakarta Sans"/>
+              </a:rPr>
+              <a:t>01</a:t>
+            </a:r>
+          </a:p>
+        </p:txBody>
+      </p:sp>
+      <p:sp>
+        <p:nvSpPr>
+          <p:cNvPr id="21" name="TextBox 20"/>
+          <p:cNvSpPr txBox="1"/>
+          <p:nvPr/>
+        </p:nvSpPr>
+        <p:spPr>
+          <a:xfrm>
+            <a:off x="7223760" y="2880360"/>
+            <a:ext cx="4282135" cy="365760"/>
+          </a:xfrm>
+          <a:prstGeom prst="rect">
+            <a:avLst/>
+          </a:prstGeom>
+          <a:noFill/>
+        </p:spPr>
+        <p:txBody>
+          <a:bodyPr wrap="square" lIns="0" rIns="0" tIns="0" bIns="0">
+            <a:spAutoFit/>
+          </a:bodyPr>
+          <a:lstStyle/>
+          <a:p>
+            <a:pPr algn="l">
+              <a:lnSpc>
+                <a:spcPct val="92000"/>
+              </a:lnSpc>
+            </a:pPr>
+            <a:r>
+              <a:rPr sz="2000" b="0" i="0">
+                <a:solidFill>
+                  <a:srgbClr val="EFE6D8"/>
+                </a:solidFill>
+                <a:latin typeface="Cormorant Garamond"/>
+                <a:ea typeface="Plus Jakarta Sans"/>
+                <a:cs typeface="Plus Jakarta Sans"/>
+              </a:rPr>
+              <a:t>Branded brass name plate</a:t>
+            </a:r>
+          </a:p>
+        </p:txBody>
+      </p:sp>
+      <p:sp>
+        <p:nvSpPr>
+          <p:cNvPr id="22" name="TextBox 21"/>
+          <p:cNvSpPr txBox="1"/>
+          <p:nvPr/>
+        </p:nvSpPr>
+        <p:spPr>
+          <a:xfrm>
+            <a:off x="7223760" y="3246120"/>
+            <a:ext cx="4282135" cy="274320"/>
+          </a:xfrm>
+          <a:prstGeom prst="rect">
+            <a:avLst/>
+          </a:prstGeom>
+          <a:noFill/>
+        </p:spPr>
+        <p:txBody>
+          <a:bodyPr wrap="square" lIns="0" rIns="0" tIns="0" bIns="0">
+            <a:spAutoFit/>
+          </a:bodyPr>
+          <a:lstStyle/>
+          <a:p>
+            <a:pPr algn="l"/>
+            <a:r>
+              <a:rPr sz="1000" b="0" i="0">
+                <a:solidFill>
+                  <a:srgbClr val="958A7B"/>
+                </a:solidFill>
+                <a:latin typeface="Plus Jakarta Sans"/>
+                <a:ea typeface="Plus Jakarta Sans"/>
+                <a:cs typeface="Plus Jakarta Sans"/>
+              </a:rPr>
+              <a:t>Engraved, for your front door</a:t>
+            </a:r>
+          </a:p>
+        </p:txBody>
+      </p:sp>
+      <p:sp>
+        <p:nvSpPr>
+          <p:cNvPr id="23" name="Rectangle 22"/>
+          <p:cNvSpPr/>
+          <p:nvPr/>
+        </p:nvSpPr>
+        <p:spPr>
+          <a:xfrm>
+            <a:off x="6583680" y="3566160"/>
+            <a:ext cx="4922215" cy="10972"/>
+          </a:xfrm>
+          <a:prstGeom prst="rect">
+            <a:avLst/>
+          </a:prstGeom>
+          <a:solidFill>
+            <a:srgbClr val="39322B"/>
+          </a:solidFill>
+          <a:ln>
+            <a:noFill/>
+          </a:ln>
+        </p:spPr>
+        <p:txBody>
+          <a:bodyPr rtlCol="0" anchor="ctr"/>
+          <a:lstStyle/>
+          <a:p>
+            <a:pPr algn="ctr"/>
+          </a:p>
+        </p:txBody>
+      </p:sp>
+      <p:sp>
+        <p:nvSpPr>
+          <p:cNvPr id="24" name="TextBox 23"/>
+          <p:cNvSpPr txBox="1"/>
+          <p:nvPr/>
+        </p:nvSpPr>
+        <p:spPr>
+          <a:xfrm>
+            <a:off x="6583680" y="3712463"/>
+            <a:ext cx="548640" cy="365760"/>
+          </a:xfrm>
+          <a:prstGeom prst="rect">
+            <a:avLst/>
+          </a:prstGeom>
+          <a:noFill/>
+        </p:spPr>
+        <p:txBody>
+          <a:bodyPr wrap="square" lIns="0" rIns="0" tIns="0" bIns="0">
+            <a:spAutoFit/>
+          </a:bodyPr>
+          <a:lstStyle/>
+          <a:p>
+            <a:pPr algn="l"/>
+            <a:r>
+              <a:rPr sz="1200" b="1" i="0">
+                <a:solidFill>
+                  <a:srgbClr val="C4A06A"/>
+                </a:solidFill>
+                <a:latin typeface="Plus Jakarta Sans"/>
+                <a:ea typeface="Plus Jakarta Sans"/>
+                <a:cs typeface="Plus Jakarta Sans"/>
+              </a:rPr>
+              <a:t>02</a:t>
+            </a:r>
+          </a:p>
+        </p:txBody>
+      </p:sp>
+      <p:sp>
+        <p:nvSpPr>
+          <p:cNvPr id="25" name="TextBox 24"/>
+          <p:cNvSpPr txBox="1"/>
+          <p:nvPr/>
+        </p:nvSpPr>
+        <p:spPr>
+          <a:xfrm>
+            <a:off x="7223760" y="3657600"/>
+            <a:ext cx="4282135" cy="365760"/>
+          </a:xfrm>
+          <a:prstGeom prst="rect">
+            <a:avLst/>
+          </a:prstGeom>
+          <a:noFill/>
+        </p:spPr>
+        <p:txBody>
+          <a:bodyPr wrap="square" lIns="0" rIns="0" tIns="0" bIns="0">
+            <a:spAutoFit/>
+          </a:bodyPr>
+          <a:lstStyle/>
+          <a:p>
+            <a:pPr algn="l">
+              <a:lnSpc>
+                <a:spcPct val="92000"/>
+              </a:lnSpc>
+            </a:pPr>
+            <a:r>
+              <a:rPr sz="2000" b="0" i="0">
+                <a:solidFill>
+                  <a:srgbClr val="EFE6D8"/>
+                </a:solidFill>
+                <a:latin typeface="Cormorant Garamond"/>
+                <a:ea typeface="Plus Jakarta Sans"/>
+                <a:cs typeface="Plus Jakarta Sans"/>
+              </a:rPr>
+              <a:t>Branded tissues</a:t>
+            </a:r>
+          </a:p>
+        </p:txBody>
+      </p:sp>
+      <p:sp>
+        <p:nvSpPr>
+          <p:cNvPr id="26" name="TextBox 25"/>
+          <p:cNvSpPr txBox="1"/>
+          <p:nvPr/>
+        </p:nvSpPr>
+        <p:spPr>
+          <a:xfrm>
+            <a:off x="7223760" y="4023360"/>
+            <a:ext cx="4282135" cy="274320"/>
+          </a:xfrm>
+          <a:prstGeom prst="rect">
+            <a:avLst/>
+          </a:prstGeom>
+          <a:noFill/>
+        </p:spPr>
+        <p:txBody>
+          <a:bodyPr wrap="square" lIns="0" rIns="0" tIns="0" bIns="0">
+            <a:spAutoFit/>
+          </a:bodyPr>
+          <a:lstStyle/>
+          <a:p>
+            <a:pPr algn="l"/>
+            <a:r>
+              <a:rPr sz="1000" b="0" i="0">
+                <a:solidFill>
+                  <a:srgbClr val="958A7B"/>
+                </a:solidFill>
+                <a:latin typeface="Plus Jakarta Sans"/>
+                <a:ea typeface="Plus Jakarta Sans"/>
+                <a:cs typeface="Plus Jakarta Sans"/>
+              </a:rPr>
+              <a:t>For the room and the bathroom</a:t>
+            </a:r>
+          </a:p>
+        </p:txBody>
+      </p:sp>
+      <p:sp>
+        <p:nvSpPr>
+          <p:cNvPr id="27" name="Rectangle 26"/>
+          <p:cNvSpPr/>
+          <p:nvPr/>
+        </p:nvSpPr>
+        <p:spPr>
+          <a:xfrm>
+            <a:off x="6583680" y="4343400"/>
+            <a:ext cx="4922215" cy="10972"/>
+          </a:xfrm>
+          <a:prstGeom prst="rect">
+            <a:avLst/>
+          </a:prstGeom>
+          <a:solidFill>
+            <a:srgbClr val="39322B"/>
+          </a:solidFill>
+          <a:ln>
+            <a:noFill/>
+          </a:ln>
+        </p:spPr>
+        <p:txBody>
+          <a:bodyPr rtlCol="0" anchor="ctr"/>
+          <a:lstStyle/>
+          <a:p>
+            <a:pPr algn="ctr"/>
+          </a:p>
+        </p:txBody>
+      </p:sp>
+      <p:sp>
+        <p:nvSpPr>
+          <p:cNvPr id="28" name="TextBox 27"/>
+          <p:cNvSpPr txBox="1"/>
+          <p:nvPr/>
+        </p:nvSpPr>
+        <p:spPr>
+          <a:xfrm>
+            <a:off x="6583680" y="4489704"/>
+            <a:ext cx="548640" cy="365760"/>
+          </a:xfrm>
+          <a:prstGeom prst="rect">
+            <a:avLst/>
+          </a:prstGeom>
+          <a:noFill/>
+        </p:spPr>
+        <p:txBody>
+          <a:bodyPr wrap="square" lIns="0" rIns="0" tIns="0" bIns="0">
+            <a:spAutoFit/>
+          </a:bodyPr>
+          <a:lstStyle/>
+          <a:p>
+            <a:pPr algn="l"/>
+            <a:r>
+              <a:rPr sz="1200" b="1" i="0">
+                <a:solidFill>
+                  <a:srgbClr val="C4A06A"/>
+                </a:solidFill>
+                <a:latin typeface="Plus Jakarta Sans"/>
+                <a:ea typeface="Plus Jakarta Sans"/>
+                <a:cs typeface="Plus Jakarta Sans"/>
+              </a:rPr>
+              <a:t>03</a:t>
+            </a:r>
+          </a:p>
+        </p:txBody>
+      </p:sp>
+      <p:sp>
+        <p:nvSpPr>
+          <p:cNvPr id="29" name="TextBox 28"/>
+          <p:cNvSpPr txBox="1"/>
+          <p:nvPr/>
+        </p:nvSpPr>
+        <p:spPr>
+          <a:xfrm>
+            <a:off x="7223760" y="4434840"/>
+            <a:ext cx="4282135" cy="365760"/>
+          </a:xfrm>
+          <a:prstGeom prst="rect">
+            <a:avLst/>
+          </a:prstGeom>
+          <a:noFill/>
+        </p:spPr>
+        <p:txBody>
+          <a:bodyPr wrap="square" lIns="0" rIns="0" tIns="0" bIns="0">
+            <a:spAutoFit/>
+          </a:bodyPr>
+          <a:lstStyle/>
+          <a:p>
+            <a:pPr algn="l">
+              <a:lnSpc>
+                <a:spcPct val="92000"/>
+              </a:lnSpc>
+            </a:pPr>
+            <a:r>
+              <a:rPr sz="2000" b="0" i="0">
+                <a:solidFill>
+                  <a:srgbClr val="EFE6D8"/>
+                </a:solidFill>
+                <a:latin typeface="Cormorant Garamond"/>
+                <a:ea typeface="Plus Jakarta Sans"/>
+                <a:cs typeface="Plus Jakarta Sans"/>
+              </a:rPr>
+              <a:t>Branded slippers</a:t>
+            </a:r>
+          </a:p>
+        </p:txBody>
+      </p:sp>
+      <p:sp>
+        <p:nvSpPr>
+          <p:cNvPr id="30" name="TextBox 29"/>
+          <p:cNvSpPr txBox="1"/>
+          <p:nvPr/>
+        </p:nvSpPr>
+        <p:spPr>
+          <a:xfrm>
+            <a:off x="7223760" y="4800600"/>
+            <a:ext cx="4282135" cy="274320"/>
+          </a:xfrm>
+          <a:prstGeom prst="rect">
+            <a:avLst/>
+          </a:prstGeom>
+          <a:noFill/>
+        </p:spPr>
+        <p:txBody>
+          <a:bodyPr wrap="square" lIns="0" rIns="0" tIns="0" bIns="0">
+            <a:spAutoFit/>
+          </a:bodyPr>
+          <a:lstStyle/>
+          <a:p>
+            <a:pPr algn="l"/>
+            <a:r>
+              <a:rPr sz="1000" b="0" i="0">
+                <a:solidFill>
+                  <a:srgbClr val="958A7B"/>
+                </a:solidFill>
+                <a:latin typeface="Plus Jakarta Sans"/>
+                <a:ea typeface="Plus Jakarta Sans"/>
+                <a:cs typeface="Plus Jakarta Sans"/>
+              </a:rPr>
+              <a:t>Waiting by the bed for every guest</a:t>
+            </a:r>
+          </a:p>
+        </p:txBody>
+      </p:sp>
+      <p:sp>
+        <p:nvSpPr>
+          <p:cNvPr id="31" name="Rectangle 30"/>
+          <p:cNvSpPr/>
+          <p:nvPr/>
+        </p:nvSpPr>
+        <p:spPr>
+          <a:xfrm>
+            <a:off x="6583680" y="5120640"/>
+            <a:ext cx="4922215" cy="10972"/>
+          </a:xfrm>
+          <a:prstGeom prst="rect">
+            <a:avLst/>
+          </a:prstGeom>
+          <a:solidFill>
+            <a:srgbClr val="39322B"/>
+          </a:solidFill>
+          <a:ln>
+            <a:noFill/>
+          </a:ln>
+        </p:spPr>
+        <p:txBody>
+          <a:bodyPr rtlCol="0" anchor="ctr"/>
+          <a:lstStyle/>
+          <a:p>
+            <a:pPr algn="ctr"/>
+          </a:p>
+        </p:txBody>
+      </p:sp>
+      <p:sp>
+        <p:nvSpPr>
+          <p:cNvPr id="32" name="TextBox 31"/>
+          <p:cNvSpPr txBox="1"/>
+          <p:nvPr/>
+        </p:nvSpPr>
+        <p:spPr>
+          <a:xfrm>
+            <a:off x="6583680" y="5266944"/>
+            <a:ext cx="548640" cy="365760"/>
+          </a:xfrm>
+          <a:prstGeom prst="rect">
+            <a:avLst/>
+          </a:prstGeom>
+          <a:noFill/>
+        </p:spPr>
+        <p:txBody>
+          <a:bodyPr wrap="square" lIns="0" rIns="0" tIns="0" bIns="0">
+            <a:spAutoFit/>
+          </a:bodyPr>
+          <a:lstStyle/>
+          <a:p>
+            <a:pPr algn="l"/>
+            <a:r>
+              <a:rPr sz="1200" b="1" i="0">
+                <a:solidFill>
+                  <a:srgbClr val="C4A06A"/>
+                </a:solidFill>
+                <a:latin typeface="Plus Jakarta Sans"/>
+                <a:ea typeface="Plus Jakarta Sans"/>
+                <a:cs typeface="Plus Jakarta Sans"/>
+              </a:rPr>
+              <a:t>04</a:t>
+            </a:r>
+          </a:p>
+        </p:txBody>
+      </p:sp>
+      <p:sp>
+        <p:nvSpPr>
+          <p:cNvPr id="33" name="TextBox 32"/>
+          <p:cNvSpPr txBox="1"/>
+          <p:nvPr/>
+        </p:nvSpPr>
+        <p:spPr>
+          <a:xfrm>
+            <a:off x="7223760" y="5212079"/>
+            <a:ext cx="4282135" cy="365760"/>
+          </a:xfrm>
+          <a:prstGeom prst="rect">
+            <a:avLst/>
+          </a:prstGeom>
+          <a:noFill/>
+        </p:spPr>
+        <p:txBody>
+          <a:bodyPr wrap="square" lIns="0" rIns="0" tIns="0" bIns="0">
+            <a:spAutoFit/>
+          </a:bodyPr>
+          <a:lstStyle/>
+          <a:p>
+            <a:pPr algn="l">
+              <a:lnSpc>
+                <a:spcPct val="92000"/>
+              </a:lnSpc>
+            </a:pPr>
+            <a:r>
+              <a:rPr sz="2000" b="0" i="0">
+                <a:solidFill>
+                  <a:srgbClr val="EFE6D8"/>
+                </a:solidFill>
+                <a:latin typeface="Cormorant Garamond"/>
+                <a:ea typeface="Plus Jakarta Sans"/>
+                <a:cs typeface="Plus Jakarta Sans"/>
+              </a:rPr>
+              <a:t>Branded glass water bottles</a:t>
+            </a:r>
+          </a:p>
+        </p:txBody>
+      </p:sp>
+      <p:sp>
+        <p:nvSpPr>
+          <p:cNvPr id="34" name="TextBox 33"/>
+          <p:cNvSpPr txBox="1"/>
+          <p:nvPr/>
+        </p:nvSpPr>
+        <p:spPr>
+          <a:xfrm>
+            <a:off x="7223760" y="5577840"/>
+            <a:ext cx="4282135" cy="274320"/>
+          </a:xfrm>
+          <a:prstGeom prst="rect">
+            <a:avLst/>
+          </a:prstGeom>
+          <a:noFill/>
+        </p:spPr>
+        <p:txBody>
+          <a:bodyPr wrap="square" lIns="0" rIns="0" tIns="0" bIns="0">
+            <a:spAutoFit/>
+          </a:bodyPr>
+          <a:lstStyle/>
+          <a:p>
+            <a:pPr algn="l"/>
+            <a:r>
+              <a:rPr sz="1000" b="0" i="0">
+                <a:solidFill>
+                  <a:srgbClr val="958A7B"/>
+                </a:solidFill>
+                <a:latin typeface="Plus Jakarta Sans"/>
+                <a:ea typeface="Plus Jakarta Sans"/>
+                <a:cs typeface="Plus Jakarta Sans"/>
+              </a:rPr>
+              <a:t>On the bedside, ready for check-in</a:t>
+            </a:r>
+          </a:p>
+        </p:txBody>
+      </p:sp>
+      <p:sp>
+        <p:nvSpPr>
+          <p:cNvPr id="35" name="Rectangle 34"/>
+          <p:cNvSpPr/>
+          <p:nvPr/>
+        </p:nvSpPr>
+        <p:spPr>
+          <a:xfrm>
+            <a:off x="6583680" y="5897879"/>
+            <a:ext cx="4922215" cy="10972"/>
+          </a:xfrm>
+          <a:prstGeom prst="rect">
+            <a:avLst/>
+          </a:prstGeom>
+          <a:solidFill>
+            <a:srgbClr val="39322B"/>
+          </a:solidFill>
+          <a:ln>
+            <a:noFill/>
+          </a:ln>
+        </p:spPr>
+        <p:txBody>
+          <a:bodyPr rtlCol="0" anchor="ctr"/>
+          <a:lstStyle/>
+          <a:p>
+            <a:pPr algn="ctr"/>
+          </a:p>
+        </p:txBody>
+      </p:sp>
+      <p:sp>
+        <p:nvSpPr>
+          <p:cNvPr id="36" name="TextBox 35"/>
+          <p:cNvSpPr txBox="1"/>
+          <p:nvPr/>
+        </p:nvSpPr>
+        <p:spPr>
+          <a:xfrm>
+            <a:off x="6583680" y="6053328"/>
+            <a:ext cx="4922215" cy="274320"/>
+          </a:xfrm>
+          <a:prstGeom prst="rect">
+            <a:avLst/>
+          </a:prstGeom>
+          <a:noFill/>
+        </p:spPr>
+        <p:txBody>
+          <a:bodyPr wrap="square" lIns="0" rIns="0" tIns="0" bIns="0">
+            <a:spAutoFit/>
+          </a:bodyPr>
+          <a:lstStyle/>
+          <a:p>
+            <a:pPr algn="l"/>
+            <a:r>
+              <a:rPr sz="1050" b="1" i="0">
+                <a:solidFill>
+                  <a:srgbClr val="B8845A"/>
+                </a:solidFill>
+                <a:latin typeface="Plus Jakarta Sans"/>
+                <a:ea typeface="Plus Jakarta Sans"/>
+                <a:cs typeface="Plus Jakarta Sans"/>
+              </a:rPr>
+              <a:t>Included free with Core and Full Noir.</a:t>
+            </a:r>
+          </a:p>
+        </p:txBody>
+      </p:sp>
+      <p:pic>
+        <p:nvPicPr>
+          <p:cNvPr id="3" name="!!logo" descr="logobg.png"/>
+          <p:cNvPicPr>
+            <a:picLocks noChangeAspect="1"/>
+          </p:cNvPicPr>
+          <p:nvPr/>
+        </p:nvPicPr>
+        <p:blipFill>
+          <a:blip r:embed="rId2"/>
+          <a:stretch>
+            <a:fillRect/>
+          </a:stretch>
+        </p:blipFill>
+        <p:spPr>
+          <a:xfrm>
+            <a:off x="11002975" y="292608"/>
+            <a:ext cx="502920" cy="502920"/>
+          </a:xfrm>
+          <a:prstGeom prst="rect">
+            <a:avLst/>
+          </a:prstGeom>
+        </p:spPr>
+      </p:pic>
+    </p:spTree>
+  </p:cSld>
+  <p:clrMapOvr>
+    <a:masterClrMapping/>
+  </p:clrMapOvr>
+  <p:transition spd="slow" advClick="1">
+    <p:fade thruBlk="1"/>
+  </p:transition>
+  <p:timing>
+    <p:tnLst>
+      <p:par>
+        <p:cTn id="1" dur="indefinite" restart="never" nodeType="tmRoot">
+          <p:childTnLst>
+            <p:seq concurrent="1" nextAc="seek">
+              <p:cTn id="2" dur="indefinite" nodeType="mainSeq">
+                <p:childTnLst>
+                  <p:par>
+                    <p:cTn id="3" fill="hold">
+                      <p:stCondLst>
+                        <p:cond delay="indefinite"/>
+                        <p:cond evt="onBegin" delay="0">
+                          <p:tn val="2"/>
+                        </p:cond>
+                      </p:stCondLst>
+                      <p:childTnLst>
+                        <p:par>
+                          <p:cTn id="4" fill="hold">
+                            <p:stCondLst>
+                              <p:cond delay="0"/>
+                            </p:stCondLst>
+                            <p:childTnLst>
+                              <p:par>
+                                <p:cTn id="5" presetID="10" presetClass="entr" presetSubtype="0" fill="hold" grpId="0" nodeType="afterEffect">
+                                  <p:stCondLst>
+                                    <p:cond delay="250"/>
+                                  </p:stCondLst>
+                                  <p:childTnLst>
+                                    <p:set>
+                                      <p:cBhvr>
+                                        <p:cTn id="6" dur="1" fill="hold">
+                                          <p:stCondLst>
+                                            <p:cond delay="0"/>
+                                          </p:stCondLst>
+                                        </p:cTn>
+                                        <p:tgtEl>
+                                          <p:spTgt spid="7"/>
+                                        </p:tgtEl>
+                                        <p:attrNameLst>
+                                          <p:attrName>style.visibility</p:attrName>
+                                        </p:attrNameLst>
+                                      </p:cBhvr>
+                                      <p:to>
+                                        <p:strVal val="visible"/>
+                                      </p:to>
+                                    </p:set>
+                                    <p:animEffect transition="in" filter="fade">
+                                      <p:cBhvr>
+                                        <p:cTn id="7" dur="700"/>
+                                        <p:tgtEl>
+                                          <p:spTgt spid="7"/>
+                                        </p:tgtEl>
+                                      </p:cBhvr>
+                                    </p:animEffect>
+                                  </p:childTnLst>
+                                </p:cTn>
+                              </p:par>
+                              <p:par>
+                                <p:cTn id="8" presetID="10" presetClass="entr" presetSubtype="0" fill="hold" grpId="0" nodeType="withEffect">
+                                  <p:stCondLst>
+                                    <p:cond delay="329"/>
+                                  </p:stCondLst>
+                                  <p:childTnLst>
+                                    <p:set>
+                                      <p:cBhvr>
+                                        <p:cTn id="9" dur="1" fill="hold">
+                                          <p:stCondLst>
+                                            <p:cond delay="0"/>
+                                          </p:stCondLst>
+                                        </p:cTn>
+                                        <p:tgtEl>
+                                          <p:spTgt spid="17"/>
+                                        </p:tgtEl>
+                                        <p:attrNameLst>
+                                          <p:attrName>style.visibility</p:attrName>
+                                        </p:attrNameLst>
+                                      </p:cBhvr>
+                                      <p:to>
+                                        <p:strVal val="visible"/>
+                                      </p:to>
+                                    </p:set>
+                                    <p:animEffect transition="in" filter="fade">
+                                      <p:cBhvr>
+                                        <p:cTn id="10" dur="700"/>
+                                        <p:tgtEl>
+                                          <p:spTgt spid="17"/>
+                                        </p:tgtEl>
+                                      </p:cBhvr>
+                                    </p:animEffect>
+                                  </p:childTnLst>
+                                </p:cTn>
+                              </p:par>
+                              <p:par>
+                                <p:cTn id="11" presetID="42" presetClass="entr" presetSubtype="0" fill="hold" grpId="0" nodeType="withEffect">
+                                  <p:stCondLst>
+                                    <p:cond delay="408"/>
+                                  </p:stCondLst>
+                                  <p:childTnLst>
+                                    <p:set>
+                                      <p:cBhvr>
+                                        <p:cTn id="12" dur="1" fill="hold">
+                                          <p:stCondLst>
+                                            <p:cond delay="0"/>
+                                          </p:stCondLst>
+                                        </p:cTn>
+                                        <p:tgtEl>
+                                          <p:spTgt spid="18"/>
+                                        </p:tgtEl>
+                                        <p:attrNameLst>
+                                          <p:attrName>style.visibility</p:attrName>
+                                        </p:attrNameLst>
+                                      </p:cBhvr>
+                                      <p:to>
+                                        <p:strVal val="visible"/>
+                                      </p:to>
+                                    </p:set>
+                                    <p:animEffect transition="in" filter="fade">
+                                      <p:cBhvr>
+                                        <p:cTn id="13" dur="900"/>
+                                        <p:tgtEl>
+                                          <p:spTgt spid="18"/>
+                                        </p:tgtEl>
+                                      </p:cBhvr>
+                                    </p:animEffect>
+                                    <p:anim calcmode="lin" valueType="num">
+                                      <p:cBhvr>
+                                        <p:cTn id="14" dur="900" decel="100000"/>
+                                        <p:tgtEl>
+                                          <p:spTgt spid="18"/>
+                                        </p:tgtEl>
+                                        <p:attrNameLst>
+                                          <p:attrName>ppt_x</p:attrName>
+                                        </p:attrNameLst>
+                                      </p:cBhvr>
+                                      <p:tavLst>
+                                        <p:tav tm="0">
+                                          <p:val>
+                                            <p:strVal val="#ppt_x"/>
+                                          </p:val>
+                                        </p:tav>
+                                        <p:tav tm="100000">
+                                          <p:val>
+                                            <p:strVal val="#ppt_x"/>
+                                          </p:val>
+                                        </p:tav>
+                                      </p:tavLst>
+                                    </p:anim>
+                                    <p:anim calcmode="lin" valueType="num">
+                                      <p:cBhvr>
+                                        <p:cTn id="15" dur="900" decel="100000"/>
+                                        <p:tgtEl>
+                                          <p:spTgt spid="18"/>
+                                        </p:tgtEl>
+                                        <p:attrNameLst>
+                                          <p:attrName>ppt_y</p:attrName>
+                                        </p:attrNameLst>
+                                      </p:cBhvr>
+                                      <p:tavLst>
+                                        <p:tav tm="0">
+                                          <p:val>
+                                            <p:strVal val="#ppt_y+.035"/>
+                                          </p:val>
+                                        </p:tav>
+                                        <p:tav tm="100000">
+                                          <p:val>
+                                            <p:strVal val="#ppt_y"/>
+                                          </p:val>
+                                        </p:tav>
+                                      </p:tavLst>
+                                    </p:anim>
+                                  </p:childTnLst>
+                                </p:cTn>
+                              </p:par>
+                              <p:par>
+                                <p:cTn id="16" presetID="10" presetClass="entr" presetSubtype="0" fill="hold" grpId="0" nodeType="withEffect">
+                                  <p:stCondLst>
+                                    <p:cond delay="487"/>
+                                  </p:stCondLst>
+                                  <p:childTnLst>
+                                    <p:set>
+                                      <p:cBhvr>
+                                        <p:cTn id="17" dur="1" fill="hold">
+                                          <p:stCondLst>
+                                            <p:cond delay="0"/>
+                                          </p:stCondLst>
+                                        </p:cTn>
+                                        <p:tgtEl>
+                                          <p:spTgt spid="14"/>
+                                        </p:tgtEl>
+                                        <p:attrNameLst>
+                                          <p:attrName>style.visibility</p:attrName>
+                                        </p:attrNameLst>
+                                      </p:cBhvr>
+                                      <p:to>
+                                        <p:strVal val="visible"/>
+                                      </p:to>
+                                    </p:set>
+                                    <p:animEffect transition="in" filter="fade">
+                                      <p:cBhvr>
+                                        <p:cTn id="18" dur="700"/>
+                                        <p:tgtEl>
+                                          <p:spTgt spid="14"/>
+                                        </p:tgtEl>
+                                      </p:cBhvr>
+                                    </p:animEffect>
+                                  </p:childTnLst>
+                                </p:cTn>
+                              </p:par>
+                              <p:par>
+                                <p:cTn id="19" presetID="22" presetClass="entr" presetSubtype="8" fill="hold" grpId="0" nodeType="withEffect">
+                                  <p:stCondLst>
+                                    <p:cond delay="566"/>
+                                  </p:stCondLst>
+                                  <p:childTnLst>
+                                    <p:set>
+                                      <p:cBhvr>
+                                        <p:cTn id="20" dur="1" fill="hold">
+                                          <p:stCondLst>
+                                            <p:cond delay="0"/>
+                                          </p:stCondLst>
+                                        </p:cTn>
+                                        <p:tgtEl>
+                                          <p:spTgt spid="19"/>
+                                        </p:tgtEl>
+                                        <p:attrNameLst>
+                                          <p:attrName>style.visibility</p:attrName>
+                                        </p:attrNameLst>
+                                      </p:cBhvr>
+                                      <p:to>
+                                        <p:strVal val="visible"/>
+                                      </p:to>
+                                    </p:set>
+                                    <p:animEffect transition="in" filter="wipe(left)">
+                                      <p:cBhvr>
+                                        <p:cTn id="21" dur="700"/>
+                                        <p:tgtEl>
+                                          <p:spTgt spid="19"/>
+                                        </p:tgtEl>
+                                      </p:cBhvr>
+                                    </p:animEffect>
+                                  </p:childTnLst>
+                                </p:cTn>
+                              </p:par>
+                              <p:par>
+                                <p:cTn id="22" presetID="10" presetClass="entr" presetSubtype="0" fill="hold" grpId="0" nodeType="withEffect">
+                                  <p:stCondLst>
+                                    <p:cond delay="645"/>
+                                  </p:stCondLst>
+                                  <p:childTnLst>
+                                    <p:set>
+                                      <p:cBhvr>
+                                        <p:cTn id="23" dur="1" fill="hold">
+                                          <p:stCondLst>
+                                            <p:cond delay="0"/>
+                                          </p:stCondLst>
+                                        </p:cTn>
+                                        <p:tgtEl>
+                                          <p:spTgt spid="20"/>
+                                        </p:tgtEl>
+                                        <p:attrNameLst>
+                                          <p:attrName>style.visibility</p:attrName>
+                                        </p:attrNameLst>
+                                      </p:cBhvr>
+                                      <p:to>
+                                        <p:strVal val="visible"/>
+                                      </p:to>
+                                    </p:set>
+                                    <p:animEffect transition="in" filter="fade">
+                                      <p:cBhvr>
+                                        <p:cTn id="24" dur="700"/>
+                                        <p:tgtEl>
+                                          <p:spTgt spid="20"/>
+                                        </p:tgtEl>
+                                      </p:cBhvr>
+                                    </p:animEffect>
+                                  </p:childTnLst>
+                                </p:cTn>
+                              </p:par>
+                              <p:par>
+                                <p:cTn id="25" presetID="42" presetClass="entr" presetSubtype="0" fill="hold" grpId="0" nodeType="withEffect">
+                                  <p:stCondLst>
+                                    <p:cond delay="724"/>
+                                  </p:stCondLst>
+                                  <p:childTnLst>
+                                    <p:set>
+                                      <p:cBhvr>
+                                        <p:cTn id="26" dur="1" fill="hold">
+                                          <p:stCondLst>
+                                            <p:cond delay="0"/>
+                                          </p:stCondLst>
+                                        </p:cTn>
+                                        <p:tgtEl>
+                                          <p:spTgt spid="21"/>
+                                        </p:tgtEl>
+                                        <p:attrNameLst>
+                                          <p:attrName>style.visibility</p:attrName>
+                                        </p:attrNameLst>
+                                      </p:cBhvr>
+                                      <p:to>
+                                        <p:strVal val="visible"/>
+                                      </p:to>
+                                    </p:set>
+                                    <p:animEffect transition="in" filter="fade">
+                                      <p:cBhvr>
+                                        <p:cTn id="27" dur="900"/>
+                                        <p:tgtEl>
+                                          <p:spTgt spid="21"/>
+                                        </p:tgtEl>
+                                      </p:cBhvr>
+                                    </p:animEffect>
+                                    <p:anim calcmode="lin" valueType="num">
+                                      <p:cBhvr>
+                                        <p:cTn id="28" dur="900" decel="100000"/>
+                                        <p:tgtEl>
+                                          <p:spTgt spid="21"/>
+                                        </p:tgtEl>
+                                        <p:attrNameLst>
+                                          <p:attrName>ppt_x</p:attrName>
+                                        </p:attrNameLst>
+                                      </p:cBhvr>
+                                      <p:tavLst>
+                                        <p:tav tm="0">
+                                          <p:val>
+                                            <p:strVal val="#ppt_x"/>
+                                          </p:val>
+                                        </p:tav>
+                                        <p:tav tm="100000">
+                                          <p:val>
+                                            <p:strVal val="#ppt_x"/>
+                                          </p:val>
+                                        </p:tav>
+                                      </p:tavLst>
+                                    </p:anim>
+                                    <p:anim calcmode="lin" valueType="num">
+                                      <p:cBhvr>
+                                        <p:cTn id="29" dur="900" decel="100000"/>
+                                        <p:tgtEl>
+                                          <p:spTgt spid="21"/>
+                                        </p:tgtEl>
+                                        <p:attrNameLst>
+                                          <p:attrName>ppt_y</p:attrName>
+                                        </p:attrNameLst>
+                                      </p:cBhvr>
+                                      <p:tavLst>
+                                        <p:tav tm="0">
+                                          <p:val>
+                                            <p:strVal val="#ppt_y+.035"/>
+                                          </p:val>
+                                        </p:tav>
+                                        <p:tav tm="100000">
+                                          <p:val>
+                                            <p:strVal val="#ppt_y"/>
+                                          </p:val>
+                                        </p:tav>
+                                      </p:tavLst>
+                                    </p:anim>
+                                  </p:childTnLst>
+                                </p:cTn>
+                              </p:par>
+                              <p:par>
+                                <p:cTn id="30" presetID="42" presetClass="entr" presetSubtype="0" fill="hold" grpId="0" nodeType="withEffect">
+                                  <p:stCondLst>
+                                    <p:cond delay="803"/>
+                                  </p:stCondLst>
+                                  <p:childTnLst>
+                                    <p:set>
+                                      <p:cBhvr>
+                                        <p:cTn id="31" dur="1" fill="hold">
+                                          <p:stCondLst>
+                                            <p:cond delay="0"/>
+                                          </p:stCondLst>
+                                        </p:cTn>
+                                        <p:tgtEl>
+                                          <p:spTgt spid="15"/>
+                                        </p:tgtEl>
+                                        <p:attrNameLst>
+                                          <p:attrName>style.visibility</p:attrName>
+                                        </p:attrNameLst>
+                                      </p:cBhvr>
+                                      <p:to>
+                                        <p:strVal val="visible"/>
+                                      </p:to>
+                                    </p:set>
+                                    <p:animEffect transition="in" filter="fade">
+                                      <p:cBhvr>
+                                        <p:cTn id="32" dur="900"/>
+                                        <p:tgtEl>
+                                          <p:spTgt spid="15"/>
+                                        </p:tgtEl>
+                                      </p:cBhvr>
+                                    </p:animEffect>
+                                    <p:anim calcmode="lin" valueType="num">
+                                      <p:cBhvr>
+                                        <p:cTn id="33" dur="900" decel="100000"/>
+                                        <p:tgtEl>
+                                          <p:spTgt spid="15"/>
+                                        </p:tgtEl>
+                                        <p:attrNameLst>
+                                          <p:attrName>ppt_x</p:attrName>
+                                        </p:attrNameLst>
+                                      </p:cBhvr>
+                                      <p:tavLst>
+                                        <p:tav tm="0">
+                                          <p:val>
+                                            <p:strVal val="#ppt_x"/>
+                                          </p:val>
+                                        </p:tav>
+                                        <p:tav tm="100000">
+                                          <p:val>
+                                            <p:strVal val="#ppt_x"/>
+                                          </p:val>
+                                        </p:tav>
+                                      </p:tavLst>
+                                    </p:anim>
+                                    <p:anim calcmode="lin" valueType="num">
+                                      <p:cBhvr>
+                                        <p:cTn id="34" dur="900" decel="100000"/>
+                                        <p:tgtEl>
+                                          <p:spTgt spid="15"/>
+                                        </p:tgtEl>
+                                        <p:attrNameLst>
+                                          <p:attrName>ppt_y</p:attrName>
+                                        </p:attrNameLst>
+                                      </p:cBhvr>
+                                      <p:tavLst>
+                                        <p:tav tm="0">
+                                          <p:val>
+                                            <p:strVal val="#ppt_y+.035"/>
+                                          </p:val>
+                                        </p:tav>
+                                        <p:tav tm="100000">
+                                          <p:val>
+                                            <p:strVal val="#ppt_y"/>
+                                          </p:val>
+                                        </p:tav>
+                                      </p:tavLst>
+                                    </p:anim>
+                                  </p:childTnLst>
+                                </p:cTn>
+                              </p:par>
+                              <p:par>
+                                <p:cTn id="35" presetID="10" presetClass="entr" presetSubtype="0" fill="hold" grpId="0" nodeType="withEffect">
+                                  <p:stCondLst>
+                                    <p:cond delay="882"/>
+                                  </p:stCondLst>
+                                  <p:childTnLst>
+                                    <p:set>
+                                      <p:cBhvr>
+                                        <p:cTn id="36" dur="1" fill="hold">
+                                          <p:stCondLst>
+                                            <p:cond delay="0"/>
+                                          </p:stCondLst>
+                                        </p:cTn>
+                                        <p:tgtEl>
+                                          <p:spTgt spid="22"/>
+                                        </p:tgtEl>
+                                        <p:attrNameLst>
+                                          <p:attrName>style.visibility</p:attrName>
+                                        </p:attrNameLst>
+                                      </p:cBhvr>
+                                      <p:to>
+                                        <p:strVal val="visible"/>
+                                      </p:to>
+                                    </p:set>
+                                    <p:animEffect transition="in" filter="fade">
+                                      <p:cBhvr>
+                                        <p:cTn id="37" dur="700"/>
+                                        <p:tgtEl>
+                                          <p:spTgt spid="22"/>
+                                        </p:tgtEl>
+                                      </p:cBhvr>
+                                    </p:animEffect>
+                                  </p:childTnLst>
+                                </p:cTn>
+                              </p:par>
+                              <p:par>
+                                <p:cTn id="38" presetID="22" presetClass="entr" presetSubtype="8" fill="hold" grpId="0" nodeType="withEffect">
+                                  <p:stCondLst>
+                                    <p:cond delay="961"/>
+                                  </p:stCondLst>
+                                  <p:childTnLst>
+                                    <p:set>
+                                      <p:cBhvr>
+                                        <p:cTn id="39" dur="1" fill="hold">
+                                          <p:stCondLst>
+                                            <p:cond delay="0"/>
+                                          </p:stCondLst>
+                                        </p:cTn>
+                                        <p:tgtEl>
+                                          <p:spTgt spid="23"/>
+                                        </p:tgtEl>
+                                        <p:attrNameLst>
+                                          <p:attrName>style.visibility</p:attrName>
+                                        </p:attrNameLst>
+                                      </p:cBhvr>
+                                      <p:to>
+                                        <p:strVal val="visible"/>
+                                      </p:to>
+                                    </p:set>
+                                    <p:animEffect transition="in" filter="wipe(left)">
+                                      <p:cBhvr>
+                                        <p:cTn id="40" dur="700"/>
+                                        <p:tgtEl>
+                                          <p:spTgt spid="23"/>
+                                        </p:tgtEl>
+                                      </p:cBhvr>
+                                    </p:animEffect>
+                                  </p:childTnLst>
+                                </p:cTn>
+                              </p:par>
+                              <p:par>
+                                <p:cTn id="41" presetID="42" presetClass="entr" presetSubtype="0" fill="hold" grpId="0" nodeType="withEffect">
+                                  <p:stCondLst>
+                                    <p:cond delay="1040"/>
+                                  </p:stCondLst>
+                                  <p:childTnLst>
+                                    <p:set>
+                                      <p:cBhvr>
+                                        <p:cTn id="42" dur="1" fill="hold">
+                                          <p:stCondLst>
+                                            <p:cond delay="0"/>
+                                          </p:stCondLst>
+                                        </p:cTn>
+                                        <p:tgtEl>
+                                          <p:spTgt spid="25"/>
+                                        </p:tgtEl>
+                                        <p:attrNameLst>
+                                          <p:attrName>style.visibility</p:attrName>
+                                        </p:attrNameLst>
+                                      </p:cBhvr>
+                                      <p:to>
+                                        <p:strVal val="visible"/>
+                                      </p:to>
+                                    </p:set>
+                                    <p:animEffect transition="in" filter="fade">
+                                      <p:cBhvr>
+                                        <p:cTn id="43" dur="900"/>
+                                        <p:tgtEl>
+                                          <p:spTgt spid="25"/>
+                                        </p:tgtEl>
+                                      </p:cBhvr>
+                                    </p:animEffect>
+                                    <p:anim calcmode="lin" valueType="num">
+                                      <p:cBhvr>
+                                        <p:cTn id="44" dur="900" decel="100000"/>
+                                        <p:tgtEl>
+                                          <p:spTgt spid="25"/>
+                                        </p:tgtEl>
+                                        <p:attrNameLst>
+                                          <p:attrName>ppt_x</p:attrName>
+                                        </p:attrNameLst>
+                                      </p:cBhvr>
+                                      <p:tavLst>
+                                        <p:tav tm="0">
+                                          <p:val>
+                                            <p:strVal val="#ppt_x"/>
+                                          </p:val>
+                                        </p:tav>
+                                        <p:tav tm="100000">
+                                          <p:val>
+                                            <p:strVal val="#ppt_x"/>
+                                          </p:val>
+                                        </p:tav>
+                                      </p:tavLst>
+                                    </p:anim>
+                                    <p:anim calcmode="lin" valueType="num">
+                                      <p:cBhvr>
+                                        <p:cTn id="45" dur="900" decel="100000"/>
+                                        <p:tgtEl>
+                                          <p:spTgt spid="25"/>
+                                        </p:tgtEl>
+                                        <p:attrNameLst>
+                                          <p:attrName>ppt_y</p:attrName>
+                                        </p:attrNameLst>
+                                      </p:cBhvr>
+                                      <p:tavLst>
+                                        <p:tav tm="0">
+                                          <p:val>
+                                            <p:strVal val="#ppt_y+.035"/>
+                                          </p:val>
+                                        </p:tav>
+                                        <p:tav tm="100000">
+                                          <p:val>
+                                            <p:strVal val="#ppt_y"/>
+                                          </p:val>
+                                        </p:tav>
+                                      </p:tavLst>
+                                    </p:anim>
+                                  </p:childTnLst>
+                                </p:cTn>
+                              </p:par>
+                              <p:par>
+                                <p:cTn id="46" presetID="10" presetClass="entr" presetSubtype="0" fill="hold" grpId="0" nodeType="withEffect">
+                                  <p:stCondLst>
+                                    <p:cond delay="1119"/>
+                                  </p:stCondLst>
+                                  <p:childTnLst>
+                                    <p:set>
+                                      <p:cBhvr>
+                                        <p:cTn id="47" dur="1" fill="hold">
+                                          <p:stCondLst>
+                                            <p:cond delay="0"/>
+                                          </p:stCondLst>
+                                        </p:cTn>
+                                        <p:tgtEl>
+                                          <p:spTgt spid="24"/>
+                                        </p:tgtEl>
+                                        <p:attrNameLst>
+                                          <p:attrName>style.visibility</p:attrName>
+                                        </p:attrNameLst>
+                                      </p:cBhvr>
+                                      <p:to>
+                                        <p:strVal val="visible"/>
+                                      </p:to>
+                                    </p:set>
+                                    <p:animEffect transition="in" filter="fade">
+                                      <p:cBhvr>
+                                        <p:cTn id="48" dur="700"/>
+                                        <p:tgtEl>
+                                          <p:spTgt spid="24"/>
+                                        </p:tgtEl>
+                                      </p:cBhvr>
+                                    </p:animEffect>
+                                  </p:childTnLst>
+                                </p:cTn>
+                              </p:par>
+                              <p:par>
+                                <p:cTn id="49" presetID="10" presetClass="entr" presetSubtype="0" fill="hold" grpId="0" nodeType="withEffect">
+                                  <p:stCondLst>
+                                    <p:cond delay="1198"/>
+                                  </p:stCondLst>
+                                  <p:childTnLst>
+                                    <p:set>
+                                      <p:cBhvr>
+                                        <p:cTn id="50" dur="1" fill="hold">
+                                          <p:stCondLst>
+                                            <p:cond delay="0"/>
+                                          </p:stCondLst>
+                                        </p:cTn>
+                                        <p:tgtEl>
+                                          <p:spTgt spid="26"/>
+                                        </p:tgtEl>
+                                        <p:attrNameLst>
+                                          <p:attrName>style.visibility</p:attrName>
+                                        </p:attrNameLst>
+                                      </p:cBhvr>
+                                      <p:to>
+                                        <p:strVal val="visible"/>
+                                      </p:to>
+                                    </p:set>
+                                    <p:animEffect transition="in" filter="fade">
+                                      <p:cBhvr>
+                                        <p:cTn id="51" dur="700"/>
+                                        <p:tgtEl>
+                                          <p:spTgt spid="26"/>
+                                        </p:tgtEl>
+                                      </p:cBhvr>
+                                    </p:animEffect>
+                                  </p:childTnLst>
+                                </p:cTn>
+                              </p:par>
+                              <p:par>
+                                <p:cTn id="52" presetID="22" presetClass="entr" presetSubtype="8" fill="hold" grpId="0" nodeType="withEffect">
+                                  <p:stCondLst>
+                                    <p:cond delay="1277"/>
+                                  </p:stCondLst>
+                                  <p:childTnLst>
+                                    <p:set>
+                                      <p:cBhvr>
+                                        <p:cTn id="53" dur="1" fill="hold">
+                                          <p:stCondLst>
+                                            <p:cond delay="0"/>
+                                          </p:stCondLst>
+                                        </p:cTn>
+                                        <p:tgtEl>
+                                          <p:spTgt spid="27"/>
+                                        </p:tgtEl>
+                                        <p:attrNameLst>
+                                          <p:attrName>style.visibility</p:attrName>
+                                        </p:attrNameLst>
+                                      </p:cBhvr>
+                                      <p:to>
+                                        <p:strVal val="visible"/>
+                                      </p:to>
+                                    </p:set>
+                                    <p:animEffect transition="in" filter="wipe(left)">
+                                      <p:cBhvr>
+                                        <p:cTn id="54" dur="700"/>
+                                        <p:tgtEl>
+                                          <p:spTgt spid="27"/>
+                                        </p:tgtEl>
+                                      </p:cBhvr>
+                                    </p:animEffect>
+                                  </p:childTnLst>
+                                </p:cTn>
+                              </p:par>
+                              <p:par>
+                                <p:cTn id="55" presetID="10" presetClass="entr" presetSubtype="0" fill="hold" grpId="0" nodeType="withEffect">
+                                  <p:stCondLst>
+                                    <p:cond delay="1356"/>
+                                  </p:stCondLst>
+                                  <p:childTnLst>
+                                    <p:set>
+                                      <p:cBhvr>
+                                        <p:cTn id="56" dur="1" fill="hold">
+                                          <p:stCondLst>
+                                            <p:cond delay="0"/>
+                                          </p:stCondLst>
+                                        </p:cTn>
+                                        <p:tgtEl>
+                                          <p:spTgt spid="28"/>
+                                        </p:tgtEl>
+                                        <p:attrNameLst>
+                                          <p:attrName>style.visibility</p:attrName>
+                                        </p:attrNameLst>
+                                      </p:cBhvr>
+                                      <p:to>
+                                        <p:strVal val="visible"/>
+                                      </p:to>
+                                    </p:set>
+                                    <p:animEffect transition="in" filter="fade">
+                                      <p:cBhvr>
+                                        <p:cTn id="57" dur="700"/>
+                                        <p:tgtEl>
+                                          <p:spTgt spid="28"/>
+                                        </p:tgtEl>
+                                      </p:cBhvr>
+                                    </p:animEffect>
+                                  </p:childTnLst>
+                                </p:cTn>
+                              </p:par>
+                              <p:par>
+                                <p:cTn id="58" presetID="42" presetClass="entr" presetSubtype="0" fill="hold" grpId="0" nodeType="withEffect">
+                                  <p:stCondLst>
+                                    <p:cond delay="1435"/>
+                                  </p:stCondLst>
+                                  <p:childTnLst>
+                                    <p:set>
+                                      <p:cBhvr>
+                                        <p:cTn id="59" dur="1" fill="hold">
+                                          <p:stCondLst>
+                                            <p:cond delay="0"/>
+                                          </p:stCondLst>
+                                        </p:cTn>
+                                        <p:tgtEl>
+                                          <p:spTgt spid="29"/>
+                                        </p:tgtEl>
+                                        <p:attrNameLst>
+                                          <p:attrName>style.visibility</p:attrName>
+                                        </p:attrNameLst>
+                                      </p:cBhvr>
+                                      <p:to>
+                                        <p:strVal val="visible"/>
+                                      </p:to>
+                                    </p:set>
+                                    <p:animEffect transition="in" filter="fade">
+                                      <p:cBhvr>
+                                        <p:cTn id="60" dur="900"/>
+                                        <p:tgtEl>
+                                          <p:spTgt spid="29"/>
+                                        </p:tgtEl>
+                                      </p:cBhvr>
+                                    </p:animEffect>
+                                    <p:anim calcmode="lin" valueType="num">
+                                      <p:cBhvr>
+                                        <p:cTn id="61" dur="900" decel="100000"/>
+                                        <p:tgtEl>
+                                          <p:spTgt spid="29"/>
+                                        </p:tgtEl>
+                                        <p:attrNameLst>
+                                          <p:attrName>ppt_x</p:attrName>
+                                        </p:attrNameLst>
+                                      </p:cBhvr>
+                                      <p:tavLst>
+                                        <p:tav tm="0">
+                                          <p:val>
+                                            <p:strVal val="#ppt_x"/>
+                                          </p:val>
+                                        </p:tav>
+                                        <p:tav tm="100000">
+                                          <p:val>
+                                            <p:strVal val="#ppt_x"/>
+                                          </p:val>
+                                        </p:tav>
+                                      </p:tavLst>
+                                    </p:anim>
+                                    <p:anim calcmode="lin" valueType="num">
+                                      <p:cBhvr>
+                                        <p:cTn id="62" dur="900" decel="100000"/>
+                                        <p:tgtEl>
+                                          <p:spTgt spid="29"/>
+                                        </p:tgtEl>
+                                        <p:attrNameLst>
+                                          <p:attrName>ppt_y</p:attrName>
+                                        </p:attrNameLst>
+                                      </p:cBhvr>
+                                      <p:tavLst>
+                                        <p:tav tm="0">
+                                          <p:val>
+                                            <p:strVal val="#ppt_y+.035"/>
+                                          </p:val>
+                                        </p:tav>
+                                        <p:tav tm="100000">
+                                          <p:val>
+                                            <p:strVal val="#ppt_y"/>
+                                          </p:val>
+                                        </p:tav>
+                                      </p:tavLst>
+                                    </p:anim>
+                                  </p:childTnLst>
+                                </p:cTn>
+                              </p:par>
+                              <p:par>
+                                <p:cTn id="63" presetID="10" presetClass="entr" presetSubtype="0" fill="hold" grpId="0" nodeType="withEffect">
+                                  <p:stCondLst>
+                                    <p:cond delay="1514"/>
+                                  </p:stCondLst>
+                                  <p:childTnLst>
+                                    <p:set>
+                                      <p:cBhvr>
+                                        <p:cTn id="64" dur="1" fill="hold">
+                                          <p:stCondLst>
+                                            <p:cond delay="0"/>
+                                          </p:stCondLst>
+                                        </p:cTn>
+                                        <p:tgtEl>
+                                          <p:spTgt spid="16"/>
+                                        </p:tgtEl>
+                                        <p:attrNameLst>
+                                          <p:attrName>style.visibility</p:attrName>
+                                        </p:attrNameLst>
+                                      </p:cBhvr>
+                                      <p:to>
+                                        <p:strVal val="visible"/>
+                                      </p:to>
+                                    </p:set>
+                                    <p:animEffect transition="in" filter="fade">
+                                      <p:cBhvr>
+                                        <p:cTn id="65" dur="700"/>
+                                        <p:tgtEl>
+                                          <p:spTgt spid="16"/>
+                                        </p:tgtEl>
+                                      </p:cBhvr>
+                                    </p:animEffect>
+                                  </p:childTnLst>
+                                </p:cTn>
+                              </p:par>
+                              <p:par>
+                                <p:cTn id="66" presetID="10" presetClass="entr" presetSubtype="0" fill="hold" grpId="0" nodeType="withEffect">
+                                  <p:stCondLst>
+                                    <p:cond delay="1593"/>
+                                  </p:stCondLst>
+                                  <p:childTnLst>
+                                    <p:set>
+                                      <p:cBhvr>
+                                        <p:cTn id="67" dur="1" fill="hold">
+                                          <p:stCondLst>
+                                            <p:cond delay="0"/>
+                                          </p:stCondLst>
+                                        </p:cTn>
+                                        <p:tgtEl>
+                                          <p:spTgt spid="30"/>
+                                        </p:tgtEl>
+                                        <p:attrNameLst>
+                                          <p:attrName>style.visibility</p:attrName>
+                                        </p:attrNameLst>
+                                      </p:cBhvr>
+                                      <p:to>
+                                        <p:strVal val="visible"/>
+                                      </p:to>
+                                    </p:set>
+                                    <p:animEffect transition="in" filter="fade">
+                                      <p:cBhvr>
+                                        <p:cTn id="68" dur="700"/>
+                                        <p:tgtEl>
+                                          <p:spTgt spid="30"/>
+                                        </p:tgtEl>
+                                      </p:cBhvr>
+                                    </p:animEffect>
+                                  </p:childTnLst>
+                                </p:cTn>
+                              </p:par>
+                              <p:par>
+                                <p:cTn id="69" presetID="22" presetClass="entr" presetSubtype="8" fill="hold" grpId="0" nodeType="withEffect">
+                                  <p:stCondLst>
+                                    <p:cond delay="1672"/>
+                                  </p:stCondLst>
+                                  <p:childTnLst>
+                                    <p:set>
+                                      <p:cBhvr>
+                                        <p:cTn id="70" dur="1" fill="hold">
+                                          <p:stCondLst>
+                                            <p:cond delay="0"/>
+                                          </p:stCondLst>
+                                        </p:cTn>
+                                        <p:tgtEl>
+                                          <p:spTgt spid="31"/>
+                                        </p:tgtEl>
+                                        <p:attrNameLst>
+                                          <p:attrName>style.visibility</p:attrName>
+                                        </p:attrNameLst>
+                                      </p:cBhvr>
+                                      <p:to>
+                                        <p:strVal val="visible"/>
+                                      </p:to>
+                                    </p:set>
+                                    <p:animEffect transition="in" filter="wipe(left)">
+                                      <p:cBhvr>
+                                        <p:cTn id="71" dur="700"/>
+                                        <p:tgtEl>
+                                          <p:spTgt spid="31"/>
+                                        </p:tgtEl>
+                                      </p:cBhvr>
+                                    </p:animEffect>
+                                  </p:childTnLst>
+                                </p:cTn>
+                              </p:par>
+                              <p:par>
+                                <p:cTn id="72" presetID="10" presetClass="entr" presetSubtype="0" fill="hold" grpId="0" nodeType="withEffect">
+                                  <p:stCondLst>
+                                    <p:cond delay="1751"/>
+                                  </p:stCondLst>
+                                  <p:childTnLst>
+                                    <p:set>
+                                      <p:cBhvr>
+                                        <p:cTn id="73" dur="1" fill="hold">
+                                          <p:stCondLst>
+                                            <p:cond delay="0"/>
+                                          </p:stCondLst>
+                                        </p:cTn>
+                                        <p:tgtEl>
+                                          <p:spTgt spid="32"/>
+                                        </p:tgtEl>
+                                        <p:attrNameLst>
+                                          <p:attrName>style.visibility</p:attrName>
+                                        </p:attrNameLst>
+                                      </p:cBhvr>
+                                      <p:to>
+                                        <p:strVal val="visible"/>
+                                      </p:to>
+                                    </p:set>
+                                    <p:animEffect transition="in" filter="fade">
+                                      <p:cBhvr>
+                                        <p:cTn id="74" dur="700"/>
+                                        <p:tgtEl>
+                                          <p:spTgt spid="32"/>
+                                        </p:tgtEl>
+                                      </p:cBhvr>
+                                    </p:animEffect>
+                                  </p:childTnLst>
+                                </p:cTn>
+                              </p:par>
+                              <p:par>
+                                <p:cTn id="75" presetID="42" presetClass="entr" presetSubtype="0" fill="hold" grpId="0" nodeType="withEffect">
+                                  <p:stCondLst>
+                                    <p:cond delay="1830"/>
+                                  </p:stCondLst>
+                                  <p:childTnLst>
+                                    <p:set>
+                                      <p:cBhvr>
+                                        <p:cTn id="76" dur="1" fill="hold">
+                                          <p:stCondLst>
+                                            <p:cond delay="0"/>
+                                          </p:stCondLst>
+                                        </p:cTn>
+                                        <p:tgtEl>
+                                          <p:spTgt spid="33"/>
+                                        </p:tgtEl>
+                                        <p:attrNameLst>
+                                          <p:attrName>style.visibility</p:attrName>
+                                        </p:attrNameLst>
+                                      </p:cBhvr>
+                                      <p:to>
+                                        <p:strVal val="visible"/>
+                                      </p:to>
+                                    </p:set>
+                                    <p:animEffect transition="in" filter="fade">
+                                      <p:cBhvr>
+                                        <p:cTn id="77" dur="900"/>
+                                        <p:tgtEl>
+                                          <p:spTgt spid="33"/>
+                                        </p:tgtEl>
+                                      </p:cBhvr>
+                                    </p:animEffect>
+                                    <p:anim calcmode="lin" valueType="num">
+                                      <p:cBhvr>
+                                        <p:cTn id="78" dur="900" decel="100000"/>
+                                        <p:tgtEl>
+                                          <p:spTgt spid="33"/>
+                                        </p:tgtEl>
+                                        <p:attrNameLst>
+                                          <p:attrName>ppt_x</p:attrName>
+                                        </p:attrNameLst>
+                                      </p:cBhvr>
+                                      <p:tavLst>
+                                        <p:tav tm="0">
+                                          <p:val>
+                                            <p:strVal val="#ppt_x"/>
+                                          </p:val>
+                                        </p:tav>
+                                        <p:tav tm="100000">
+                                          <p:val>
+                                            <p:strVal val="#ppt_x"/>
+                                          </p:val>
+                                        </p:tav>
+                                      </p:tavLst>
+                                    </p:anim>
+                                    <p:anim calcmode="lin" valueType="num">
+                                      <p:cBhvr>
+                                        <p:cTn id="79" dur="900" decel="100000"/>
+                                        <p:tgtEl>
+                                          <p:spTgt spid="33"/>
+                                        </p:tgtEl>
+                                        <p:attrNameLst>
+                                          <p:attrName>ppt_y</p:attrName>
+                                        </p:attrNameLst>
+                                      </p:cBhvr>
+                                      <p:tavLst>
+                                        <p:tav tm="0">
+                                          <p:val>
+                                            <p:strVal val="#ppt_y+.035"/>
+                                          </p:val>
+                                        </p:tav>
+                                        <p:tav tm="100000">
+                                          <p:val>
+                                            <p:strVal val="#ppt_y"/>
+                                          </p:val>
+                                        </p:tav>
+                                      </p:tavLst>
+                                    </p:anim>
+                                  </p:childTnLst>
+                                </p:cTn>
+                              </p:par>
+                              <p:par>
+                                <p:cTn id="80" presetID="10" presetClass="entr" presetSubtype="0" fill="hold" grpId="0" nodeType="withEffect">
+                                  <p:stCondLst>
+                                    <p:cond delay="1909"/>
+                                  </p:stCondLst>
+                                  <p:childTnLst>
+                                    <p:set>
+                                      <p:cBhvr>
+                                        <p:cTn id="81" dur="1" fill="hold">
+                                          <p:stCondLst>
+                                            <p:cond delay="0"/>
+                                          </p:stCondLst>
+                                        </p:cTn>
+                                        <p:tgtEl>
+                                          <p:spTgt spid="34"/>
+                                        </p:tgtEl>
+                                        <p:attrNameLst>
+                                          <p:attrName>style.visibility</p:attrName>
+                                        </p:attrNameLst>
+                                      </p:cBhvr>
+                                      <p:to>
+                                        <p:strVal val="visible"/>
+                                      </p:to>
+                                    </p:set>
+                                    <p:animEffect transition="in" filter="fade">
+                                      <p:cBhvr>
+                                        <p:cTn id="82" dur="700"/>
+                                        <p:tgtEl>
+                                          <p:spTgt spid="34"/>
+                                        </p:tgtEl>
+                                      </p:cBhvr>
+                                    </p:animEffect>
+                                  </p:childTnLst>
+                                </p:cTn>
+                              </p:par>
+                              <p:par>
+                                <p:cTn id="83" presetID="22" presetClass="entr" presetSubtype="8" fill="hold" grpId="0" nodeType="withEffect">
+                                  <p:stCondLst>
+                                    <p:cond delay="1988"/>
+                                  </p:stCondLst>
+                                  <p:childTnLst>
+                                    <p:set>
+                                      <p:cBhvr>
+                                        <p:cTn id="84" dur="1" fill="hold">
+                                          <p:stCondLst>
+                                            <p:cond delay="0"/>
+                                          </p:stCondLst>
+                                        </p:cTn>
+                                        <p:tgtEl>
+                                          <p:spTgt spid="35"/>
+                                        </p:tgtEl>
+                                        <p:attrNameLst>
+                                          <p:attrName>style.visibility</p:attrName>
+                                        </p:attrNameLst>
+                                      </p:cBhvr>
+                                      <p:to>
+                                        <p:strVal val="visible"/>
+                                      </p:to>
+                                    </p:set>
+                                    <p:animEffect transition="in" filter="wipe(left)">
+                                      <p:cBhvr>
+                                        <p:cTn id="85" dur="700"/>
+                                        <p:tgtEl>
+                                          <p:spTgt spid="35"/>
+                                        </p:tgtEl>
+                                      </p:cBhvr>
+                                    </p:animEffect>
+                                  </p:childTnLst>
+                                </p:cTn>
+                              </p:par>
+                              <p:par>
+                                <p:cTn id="86" presetID="10" presetClass="entr" presetSubtype="0" fill="hold" grpId="0" nodeType="withEffect">
+                                  <p:stCondLst>
+                                    <p:cond delay="2067"/>
+                                  </p:stCondLst>
+                                  <p:childTnLst>
+                                    <p:set>
+                                      <p:cBhvr>
+                                        <p:cTn id="87" dur="1" fill="hold">
+                                          <p:stCondLst>
+                                            <p:cond delay="0"/>
+                                          </p:stCondLst>
+                                        </p:cTn>
+                                        <p:tgtEl>
+                                          <p:spTgt spid="36"/>
+                                        </p:tgtEl>
+                                        <p:attrNameLst>
+                                          <p:attrName>style.visibility</p:attrName>
+                                        </p:attrNameLst>
+                                      </p:cBhvr>
+                                      <p:to>
+                                        <p:strVal val="visible"/>
+                                      </p:to>
+                                    </p:set>
+                                    <p:animEffect transition="in" filter="fade">
+                                      <p:cBhvr>
+                                        <p:cTn id="88" dur="700"/>
+                                        <p:tgtEl>
+                                          <p:spTgt spid="36"/>
+                                        </p:tgtEl>
+                                      </p:cBhvr>
+                                    </p:animEffect>
+                                  </p:childTnLst>
+                                </p:cTn>
+                              </p:par>
+                            </p:childTnLst>
+                          </p:cTn>
+                        </p:par>
+                      </p:childTnLst>
+                    </p:cTn>
+                  </p:par>
+                </p:childTnLst>
+              </p:cTn>
+              <p:prevCondLst>
+                <p:cond evt="onPrev" delay="0">
+                  <p:tgtEl>
+                    <p:sldTgt/>
+                  </p:tgtEl>
+                </p:cond>
+              </p:prevCondLst>
+              <p:nextCondLst>
+                <p:cond evt="onNext" delay="0">
+                  <p:tgtEl>
+                    <p:sldTgt/>
+                  </p:tgtEl>
+                </p:cond>
+              </p:nextCondLst>
+            </p:seq>
+          </p:childTnLst>
+        </p:cTn>
+      </p:par>
+    </p:tnLst>
+    <p:bldLst>
+      <p:bldP spid="7" grpId="0" animBg="1"/>
+      <p:bldP spid="17" grpId="0" animBg="1"/>
+      <p:bldP spid="18" grpId="0" animBg="1"/>
+      <p:bldP spid="14" grpId="0" animBg="1"/>
+      <p:bldP spid="19" grpId="0" animBg="1"/>
+      <p:bldP spid="20" grpId="0" animBg="1"/>
+      <p:bldP spid="21" grpId="0" animBg="1"/>
+      <p:bldP spid="15" grpId="0" animBg="1"/>
+      <p:bldP spid="22" grpId="0" animBg="1"/>
+      <p:bldP spid="23" grpId="0" animBg="1"/>
+      <p:bldP spid="25" grpId="0" animBg="1"/>
+      <p:bldP spid="24" grpId="0" animBg="1"/>
+      <p:bldP spid="26" grpId="0" animBg="1"/>
+      <p:bldP spid="27" grpId="0" animBg="1"/>
+      <p:bldP spid="28" grpId="0" animBg="1"/>
+      <p:bldP spid="29" grpId="0" animBg="1"/>
+      <p:bldP spid="16" grpId="0" animBg="1"/>
+      <p:bldP spid="30" grpId="0" animBg="1"/>
+      <p:bldP spid="31" grpId="0" animBg="1"/>
+      <p:bldP spid="32" grpId="0" animBg="1"/>
+      <p:bldP spid="33" grpId="0" animBg="1"/>
+      <p:bldP spid="34" grpId="0" animBg="1"/>
+      <p:bldP spid="35" grpId="0" animBg="1"/>
+      <p:bldP spid="36" grpId="0" animBg="1"/>
+    </p:bldLst>
+  </p:timing>
+</p:sld>
+</file>
+
+<file path=ppt/slides/slide13.xml><?xml version="1.0" encoding="utf-8"?>
+<p:sld xmlns:a="http://schemas.openxmlformats.org/drawingml/2006/main" xmlns:p="http://schemas.openxmlformats.org/presentationml/2006/main" xmlns:r="http://schemas.openxmlformats.org/officeDocument/2006/relationships">
+  <p:cSld>
+    <p:spTree>
+      <p:nvGrpSpPr>
+        <p:cNvPr id="1" name=""/>
+        <p:cNvGrpSpPr/>
+        <p:nvPr/>
+      </p:nvGrpSpPr>
+      <p:grpSpPr/>
+      <p:sp>
+        <p:nvSpPr>
+          <p:cNvPr id="2" name="static-bg"/>
+          <p:cNvSpPr/>
+          <p:nvPr/>
+        </p:nvSpPr>
+        <p:spPr>
+          <a:xfrm>
+            <a:off x="0" y="0"/>
+            <a:ext cx="12191695" cy="6858000"/>
+          </a:xfrm>
+          <a:prstGeom prst="rect">
+            <a:avLst/>
+          </a:prstGeom>
+          <a:solidFill>
             <a:srgbClr val="EDE6DA"/>
           </a:solidFill>
           <a:ln>
@@ -9076,7 +11782,7 @@
                 <a:ea typeface="Plus Jakarta Sans"/>
                 <a:cs typeface="Plus Jakarta Sans"/>
               </a:rPr>
-              <a:t>12 / 17</a:t>
+              <a:t>13 / 18</a:t>
             </a:r>
           </a:p>
         </p:txBody>
@@ -11615,7 +14321,7 @@
 </p:sld>
 </file>
 
-<file path=ppt/slides/slide13.xml><?xml version="1.0" encoding="utf-8"?>
+<file path=ppt/slides/slide14.xml><?xml version="1.0" encoding="utf-8"?>
 <p:sld xmlns:a="http://schemas.openxmlformats.org/drawingml/2006/main" xmlns:p="http://schemas.openxmlformats.org/presentationml/2006/main" xmlns:r="http://schemas.openxmlformats.org/officeDocument/2006/relationships">
   <p:cSld>
     <p:spTree>
@@ -11760,7 +14466,7 @@
                 <a:ea typeface="Plus Jakarta Sans"/>
                 <a:cs typeface="Plus Jakarta Sans"/>
               </a:rPr>
-              <a:t>13 / 17</a:t>
+              <a:t>14 / 18</a:t>
             </a:r>
           </a:p>
         </p:txBody>
@@ -13482,7 +16188,7 @@
 </p:sld>
 </file>
 
-<file path=ppt/slides/slide14.xml><?xml version="1.0" encoding="utf-8"?>
+<file path=ppt/slides/slide15.xml><?xml version="1.0" encoding="utf-8"?>
 <p:sld xmlns:a="http://schemas.openxmlformats.org/drawingml/2006/main" xmlns:p="http://schemas.openxmlformats.org/presentationml/2006/main" xmlns:r="http://schemas.openxmlformats.org/officeDocument/2006/relationships">
   <p:cSld>
     <p:spTree>
@@ -13627,7 +16333,7 @@
                 <a:ea typeface="Plus Jakarta Sans"/>
                 <a:cs typeface="Plus Jakarta Sans"/>
               </a:rPr>
-              <a:t>14 / 17</a:t>
+              <a:t>15 / 18</a:t>
             </a:r>
           </a:p>
         </p:txBody>
@@ -13705,7 +16411,7 @@
                 <a:ea typeface="Plus Jakarta Sans"/>
                 <a:cs typeface="Plus Jakarta Sans"/>
               </a:rPr>
-              <a:t>Ten days from your advance to a bookable room.</a:t>
+              <a:t>Fifteen days from booking to a bookable room.</a:t>
             </a:r>
           </a:p>
         </p:txBody>
@@ -13718,7 +16424,7 @@
         </p:nvSpPr>
         <p:spPr>
           <a:xfrm>
-            <a:off x="685800" y="2834640"/>
+            <a:off x="685800" y="2606040"/>
             <a:ext cx="10820095" cy="14630"/>
           </a:xfrm>
           <a:prstGeom prst="rect">
@@ -13747,7 +16453,7 @@
         </p:nvSpPr>
         <p:spPr>
           <a:xfrm>
-            <a:off x="685800" y="2743200"/>
+            <a:off x="685800" y="2514600"/>
             <a:ext cx="201168" cy="201168"/>
           </a:xfrm>
           <a:prstGeom prst="ellipse">
@@ -13776,8 +16482,8 @@
         </p:nvSpPr>
         <p:spPr>
           <a:xfrm>
-            <a:off x="685800" y="3200400"/>
-            <a:ext cx="1981139" cy="640080"/>
+            <a:off x="685800" y="2971800"/>
+            <a:ext cx="1666189" cy="457200"/>
           </a:xfrm>
           <a:prstGeom prst="rect">
             <a:avLst/>
@@ -13790,17 +16496,13 @@
           </a:bodyPr>
           <a:lstStyle/>
           <a:p>
-            <a:pPr algn="l">
-              <a:lnSpc>
-                <a:spcPct val="92000"/>
-              </a:lnSpc>
-            </a:pPr>
-            <a:r>
-              <a:rPr sz="3400" b="0" i="0">
+            <a:pPr algn="l"/>
+            <a:r>
+              <a:rPr sz="2100" b="1" i="0">
                 <a:solidFill>
                   <a:srgbClr val="1B1815"/>
                 </a:solidFill>
-                <a:latin typeface="Cormorant Garamond"/>
+                <a:latin typeface="Plus Jakarta Sans"/>
                 <a:ea typeface="Plus Jakarta Sans"/>
                 <a:cs typeface="Plus Jakarta Sans"/>
               </a:rPr>
@@ -13817,8 +16519,8 @@
         </p:nvSpPr>
         <p:spPr>
           <a:xfrm>
-            <a:off x="685800" y="3977639"/>
-            <a:ext cx="1843979" cy="1645920"/>
+            <a:off x="685800" y="3566160"/>
+            <a:ext cx="1529029" cy="1371600"/>
           </a:xfrm>
           <a:prstGeom prst="rect">
             <a:avLst/>
@@ -13837,7 +16539,7 @@
               </a:lnSpc>
             </a:pPr>
             <a:r>
-              <a:rPr sz="1050" b="0" i="0">
+              <a:rPr sz="1000" b="0" i="0">
                 <a:solidFill>
                   <a:srgbClr val="4A423A"/>
                 </a:solidFill>
@@ -13845,20 +16547,88 @@
                 <a:ea typeface="Plus Jakarta Sans"/>
                 <a:cs typeface="Plus Jakarta Sans"/>
               </a:rPr>
-              <a:t>You send photos and measurements. We confirm the price within 24 hours.</a:t>
-            </a:r>
-          </a:p>
-        </p:txBody>
-      </p:sp>
-      <p:sp>
-        <p:nvSpPr>
-          <p:cNvPr id="13" name="Oval 12"/>
+              <a:t>Send photos and measurements. We confirm the price within 24 hours.</a:t>
+            </a:r>
+          </a:p>
+        </p:txBody>
+      </p:sp>
+      <p:sp>
+        <p:nvSpPr>
+          <p:cNvPr id="13" name="Rounded Rectangle 12"/>
           <p:cNvSpPr/>
           <p:nvPr/>
         </p:nvSpPr>
         <p:spPr>
           <a:xfrm>
-            <a:off x="2849819" y="2743200"/>
+            <a:off x="685800" y="4892040"/>
+            <a:ext cx="1574749" cy="329184"/>
+          </a:xfrm>
+          <a:prstGeom prst="roundRect">
+            <a:avLst>
+              <a:gd name="adj" fmla="val 50000"/>
+            </a:avLst>
+          </a:prstGeom>
+          <a:solidFill>
+            <a:srgbClr val="1B1815"/>
+          </a:solidFill>
+          <a:ln>
+            <a:noFill/>
+          </a:ln>
+        </p:spPr>
+        <p:txBody>
+          <a:bodyPr rtlCol="0" anchor="ctr"/>
+          <a:lstStyle/>
+          <a:p>
+            <a:pPr algn="ctr"/>
+          </a:p>
+        </p:txBody>
+      </p:sp>
+      <p:sp>
+        <p:nvSpPr>
+          <p:cNvPr id="14" name="TextBox 13"/>
+          <p:cNvSpPr txBox="1"/>
+          <p:nvPr/>
+        </p:nvSpPr>
+        <p:spPr>
+          <a:xfrm>
+            <a:off x="685800" y="4956048"/>
+            <a:ext cx="1574749" cy="228600"/>
+          </a:xfrm>
+          <a:prstGeom prst="rect">
+            <a:avLst/>
+          </a:prstGeom>
+          <a:noFill/>
+        </p:spPr>
+        <p:txBody>
+          <a:bodyPr wrap="square" lIns="0" rIns="0" tIns="0" bIns="0">
+            <a:spAutoFit/>
+          </a:bodyPr>
+          <a:lstStyle/>
+          <a:p>
+            <a:pPr algn="ctr"/>
+            <a:r>
+              <a:rPr sz="850" b="1" i="0">
+                <a:solidFill>
+                  <a:srgbClr val="EDE6DA"/>
+                </a:solidFill>
+                <a:latin typeface="Plus Jakarta Sans"/>
+                <a:ea typeface="Plus Jakarta Sans"/>
+                <a:cs typeface="Plus Jakarta Sans"/>
+              </a:rPr>
+              <a:t>10% to book</a:t>
+            </a:r>
+          </a:p>
+        </p:txBody>
+      </p:sp>
+      <p:sp>
+        <p:nvSpPr>
+          <p:cNvPr id="15" name="Oval 14"/>
+          <p:cNvSpPr/>
+          <p:nvPr/>
+        </p:nvSpPr>
+        <p:spPr>
+          <a:xfrm>
+            <a:off x="2489149" y="2514600"/>
             <a:ext cx="201168" cy="201168"/>
           </a:xfrm>
           <a:prstGeom prst="ellipse">
@@ -13881,14 +16651,14 @@
       </p:sp>
       <p:sp>
         <p:nvSpPr>
-          <p:cNvPr id="14" name="TextBox 13"/>
+          <p:cNvPr id="16" name="TextBox 15"/>
           <p:cNvSpPr txBox="1"/>
           <p:nvPr/>
         </p:nvSpPr>
         <p:spPr>
           <a:xfrm>
-            <a:off x="2849819" y="3200400"/>
-            <a:ext cx="1981139" cy="640080"/>
+            <a:off x="2489149" y="2971800"/>
+            <a:ext cx="1666189" cy="457200"/>
           </a:xfrm>
           <a:prstGeom prst="rect">
             <a:avLst/>
@@ -13901,17 +16671,13 @@
           </a:bodyPr>
           <a:lstStyle/>
           <a:p>
-            <a:pPr algn="l">
-              <a:lnSpc>
-                <a:spcPct val="92000"/>
-              </a:lnSpc>
-            </a:pPr>
-            <a:r>
-              <a:rPr sz="3400" b="0" i="0">
+            <a:pPr algn="l"/>
+            <a:r>
+              <a:rPr sz="2100" b="1" i="0">
                 <a:solidFill>
                   <a:srgbClr val="1B1815"/>
                 </a:solidFill>
-                <a:latin typeface="Cormorant Garamond"/>
+                <a:latin typeface="Plus Jakarta Sans"/>
                 <a:ea typeface="Plus Jakarta Sans"/>
                 <a:cs typeface="Plus Jakarta Sans"/>
               </a:rPr>
@@ -13922,14 +16688,14 @@
       </p:sp>
       <p:sp>
         <p:nvSpPr>
-          <p:cNvPr id="15" name="TextBox 14"/>
+          <p:cNvPr id="17" name="TextBox 16"/>
           <p:cNvSpPr txBox="1"/>
           <p:nvPr/>
         </p:nvSpPr>
         <p:spPr>
           <a:xfrm>
-            <a:off x="2849819" y="3977639"/>
-            <a:ext cx="1843979" cy="1645920"/>
+            <a:off x="2489149" y="3566160"/>
+            <a:ext cx="1529029" cy="1371600"/>
           </a:xfrm>
           <a:prstGeom prst="rect">
             <a:avLst/>
@@ -13948,7 +16714,7 @@
               </a:lnSpc>
             </a:pPr>
             <a:r>
-              <a:rPr sz="1050" b="0" i="0">
+              <a:rPr sz="1000" b="0" i="0">
                 <a:solidFill>
                   <a:srgbClr val="4A423A"/>
                 </a:solidFill>
@@ -13956,24 +16722,26 @@
                 <a:ea typeface="Plus Jakarta Sans"/>
                 <a:cs typeface="Plus Jakarta Sans"/>
               </a:rPr>
-              <a:t>You pay 50%, approve the design plan, and we start sourcing.</a:t>
-            </a:r>
-          </a:p>
-        </p:txBody>
-      </p:sp>
-      <p:sp>
-        <p:nvSpPr>
-          <p:cNvPr id="16" name="Oval 15"/>
+              <a:t>Approve the design plan with the actual items. Sourcing starts.</a:t>
+            </a:r>
+          </a:p>
+        </p:txBody>
+      </p:sp>
+      <p:sp>
+        <p:nvSpPr>
+          <p:cNvPr id="18" name="Rounded Rectangle 17"/>
           <p:cNvSpPr/>
           <p:nvPr/>
         </p:nvSpPr>
         <p:spPr>
           <a:xfrm>
-            <a:off x="5013838" y="2743200"/>
-            <a:ext cx="201168" cy="201168"/>
-          </a:xfrm>
-          <a:prstGeom prst="ellipse">
-            <a:avLst/>
+            <a:off x="2489149" y="4892040"/>
+            <a:ext cx="1574749" cy="329184"/>
+          </a:xfrm>
+          <a:prstGeom prst="roundRect">
+            <a:avLst>
+              <a:gd name="adj" fmla="val 50000"/>
+            </a:avLst>
           </a:prstGeom>
           <a:solidFill>
             <a:srgbClr val="B8845A"/>
@@ -13992,14 +16760,14 @@
       </p:sp>
       <p:sp>
         <p:nvSpPr>
-          <p:cNvPr id="17" name="TextBox 16"/>
+          <p:cNvPr id="19" name="TextBox 18"/>
           <p:cNvSpPr txBox="1"/>
           <p:nvPr/>
         </p:nvSpPr>
         <p:spPr>
           <a:xfrm>
-            <a:off x="5013838" y="3200400"/>
-            <a:ext cx="1981139" cy="640080"/>
+            <a:off x="2489149" y="4956048"/>
+            <a:ext cx="1574749" cy="228600"/>
           </a:xfrm>
           <a:prstGeom prst="rect">
             <a:avLst/>
@@ -14012,35 +16780,97 @@
           </a:bodyPr>
           <a:lstStyle/>
           <a:p>
-            <a:pPr algn="l">
-              <a:lnSpc>
-                <a:spcPct val="92000"/>
-              </a:lnSpc>
-            </a:pPr>
-            <a:r>
-              <a:rPr sz="3400" b="0" i="0">
+            <a:pPr algn="ctr"/>
+            <a:r>
+              <a:rPr sz="850" b="1" i="0">
+                <a:solidFill>
+                  <a:srgbClr val="FFFFFF"/>
+                </a:solidFill>
+                <a:latin typeface="Plus Jakarta Sans"/>
+                <a:ea typeface="Plus Jakarta Sans"/>
+                <a:cs typeface="Plus Jakarta Sans"/>
+              </a:rPr>
+              <a:t>30%</a:t>
+            </a:r>
+          </a:p>
+        </p:txBody>
+      </p:sp>
+      <p:sp>
+        <p:nvSpPr>
+          <p:cNvPr id="20" name="Oval 19"/>
+          <p:cNvSpPr/>
+          <p:nvPr/>
+        </p:nvSpPr>
+        <p:spPr>
+          <a:xfrm>
+            <a:off x="4292498" y="2514600"/>
+            <a:ext cx="201168" cy="201168"/>
+          </a:xfrm>
+          <a:prstGeom prst="ellipse">
+            <a:avLst/>
+          </a:prstGeom>
+          <a:solidFill>
+            <a:srgbClr val="B8845A"/>
+          </a:solidFill>
+          <a:ln>
+            <a:noFill/>
+          </a:ln>
+        </p:spPr>
+        <p:txBody>
+          <a:bodyPr rtlCol="0" anchor="ctr"/>
+          <a:lstStyle/>
+          <a:p>
+            <a:pPr algn="ctr"/>
+          </a:p>
+        </p:txBody>
+      </p:sp>
+      <p:sp>
+        <p:nvSpPr>
+          <p:cNvPr id="21" name="TextBox 20"/>
+          <p:cNvSpPr txBox="1"/>
+          <p:nvPr/>
+        </p:nvSpPr>
+        <p:spPr>
+          <a:xfrm>
+            <a:off x="4292498" y="2971800"/>
+            <a:ext cx="1666189" cy="457200"/>
+          </a:xfrm>
+          <a:prstGeom prst="rect">
+            <a:avLst/>
+          </a:prstGeom>
+          <a:noFill/>
+        </p:spPr>
+        <p:txBody>
+          <a:bodyPr wrap="square" lIns="0" rIns="0" tIns="0" bIns="0">
+            <a:spAutoFit/>
+          </a:bodyPr>
+          <a:lstStyle/>
+          <a:p>
+            <a:pPr algn="l"/>
+            <a:r>
+              <a:rPr sz="2100" b="1" i="0">
                 <a:solidFill>
                   <a:srgbClr val="1B1815"/>
                 </a:solidFill>
-                <a:latin typeface="Cormorant Garamond"/>
+                <a:latin typeface="Plus Jakarta Sans"/>
                 <a:ea typeface="Plus Jakarta Sans"/>
                 <a:cs typeface="Plus Jakarta Sans"/>
               </a:rPr>
-              <a:t>Day 2–8</a:t>
-            </a:r>
-          </a:p>
-        </p:txBody>
-      </p:sp>
-      <p:sp>
-        <p:nvSpPr>
-          <p:cNvPr id="18" name="TextBox 17"/>
+              <a:t>Day 2–12</a:t>
+            </a:r>
+          </a:p>
+        </p:txBody>
+      </p:sp>
+      <p:sp>
+        <p:nvSpPr>
+          <p:cNvPr id="22" name="TextBox 21"/>
           <p:cNvSpPr txBox="1"/>
           <p:nvPr/>
         </p:nvSpPr>
         <p:spPr>
           <a:xfrm>
-            <a:off x="5013838" y="3977639"/>
-            <a:ext cx="1843979" cy="1645920"/>
+            <a:off x="4292498" y="3566160"/>
+            <a:ext cx="1529029" cy="1371600"/>
           </a:xfrm>
           <a:prstGeom prst="rect">
             <a:avLst/>
@@ -14059,7 +16889,7 @@
               </a:lnSpc>
             </a:pPr>
             <a:r>
-              <a:rPr sz="1050" b="0" i="0">
+              <a:rPr sz="1000" b="0" i="0">
                 <a:solidFill>
                   <a:srgbClr val="4A423A"/>
                 </a:solidFill>
@@ -14074,17 +16904,19 @@
       </p:sp>
       <p:sp>
         <p:nvSpPr>
-          <p:cNvPr id="19" name="Oval 18"/>
+          <p:cNvPr id="23" name="Rounded Rectangle 22"/>
           <p:cNvSpPr/>
           <p:nvPr/>
         </p:nvSpPr>
         <p:spPr>
           <a:xfrm>
-            <a:off x="7177857" y="2743200"/>
-            <a:ext cx="201168" cy="201168"/>
-          </a:xfrm>
-          <a:prstGeom prst="ellipse">
-            <a:avLst/>
+            <a:off x="4292498" y="4892040"/>
+            <a:ext cx="1574749" cy="329184"/>
+          </a:xfrm>
+          <a:prstGeom prst="roundRect">
+            <a:avLst>
+              <a:gd name="adj" fmla="val 50000"/>
+            </a:avLst>
           </a:prstGeom>
           <a:solidFill>
             <a:srgbClr val="B8845A"/>
@@ -14103,14 +16935,14 @@
       </p:sp>
       <p:sp>
         <p:nvSpPr>
-          <p:cNvPr id="20" name="TextBox 19"/>
+          <p:cNvPr id="24" name="TextBox 23"/>
           <p:cNvSpPr txBox="1"/>
           <p:nvPr/>
         </p:nvSpPr>
         <p:spPr>
           <a:xfrm>
-            <a:off x="7177857" y="3200400"/>
-            <a:ext cx="1981139" cy="640080"/>
+            <a:off x="4292498" y="4956048"/>
+            <a:ext cx="1574749" cy="228600"/>
           </a:xfrm>
           <a:prstGeom prst="rect">
             <a:avLst/>
@@ -14123,35 +16955,97 @@
           </a:bodyPr>
           <a:lstStyle/>
           <a:p>
-            <a:pPr algn="l">
-              <a:lnSpc>
-                <a:spcPct val="92000"/>
-              </a:lnSpc>
-            </a:pPr>
-            <a:r>
-              <a:rPr sz="3400" b="0" i="0">
+            <a:pPr algn="ctr"/>
+            <a:r>
+              <a:rPr sz="850" b="1" i="0">
+                <a:solidFill>
+                  <a:srgbClr val="FFFFFF"/>
+                </a:solidFill>
+                <a:latin typeface="Plus Jakarta Sans"/>
+                <a:ea typeface="Plus Jakarta Sans"/>
+                <a:cs typeface="Plus Jakarta Sans"/>
+              </a:rPr>
+              <a:t>30% by day 7</a:t>
+            </a:r>
+          </a:p>
+        </p:txBody>
+      </p:sp>
+      <p:sp>
+        <p:nvSpPr>
+          <p:cNvPr id="25" name="Oval 24"/>
+          <p:cNvSpPr/>
+          <p:nvPr/>
+        </p:nvSpPr>
+        <p:spPr>
+          <a:xfrm>
+            <a:off x="6095847" y="2514600"/>
+            <a:ext cx="201168" cy="201168"/>
+          </a:xfrm>
+          <a:prstGeom prst="ellipse">
+            <a:avLst/>
+          </a:prstGeom>
+          <a:solidFill>
+            <a:srgbClr val="B8845A"/>
+          </a:solidFill>
+          <a:ln>
+            <a:noFill/>
+          </a:ln>
+        </p:spPr>
+        <p:txBody>
+          <a:bodyPr rtlCol="0" anchor="ctr"/>
+          <a:lstStyle/>
+          <a:p>
+            <a:pPr algn="ctr"/>
+          </a:p>
+        </p:txBody>
+      </p:sp>
+      <p:sp>
+        <p:nvSpPr>
+          <p:cNvPr id="26" name="TextBox 25"/>
+          <p:cNvSpPr txBox="1"/>
+          <p:nvPr/>
+        </p:nvSpPr>
+        <p:spPr>
+          <a:xfrm>
+            <a:off x="6095847" y="2971800"/>
+            <a:ext cx="1666189" cy="457200"/>
+          </a:xfrm>
+          <a:prstGeom prst="rect">
+            <a:avLst/>
+          </a:prstGeom>
+          <a:noFill/>
+        </p:spPr>
+        <p:txBody>
+          <a:bodyPr wrap="square" lIns="0" rIns="0" tIns="0" bIns="0">
+            <a:spAutoFit/>
+          </a:bodyPr>
+          <a:lstStyle/>
+          <a:p>
+            <a:pPr algn="l"/>
+            <a:r>
+              <a:rPr sz="2100" b="1" i="0">
                 <a:solidFill>
                   <a:srgbClr val="1B1815"/>
                 </a:solidFill>
-                <a:latin typeface="Cormorant Garamond"/>
+                <a:latin typeface="Plus Jakarta Sans"/>
                 <a:ea typeface="Plus Jakarta Sans"/>
                 <a:cs typeface="Plus Jakarta Sans"/>
               </a:rPr>
-              <a:t>Day 9</a:t>
-            </a:r>
-          </a:p>
-        </p:txBody>
-      </p:sp>
-      <p:sp>
-        <p:nvSpPr>
-          <p:cNvPr id="21" name="TextBox 20"/>
+              <a:t>Day 13</a:t>
+            </a:r>
+          </a:p>
+        </p:txBody>
+      </p:sp>
+      <p:sp>
+        <p:nvSpPr>
+          <p:cNvPr id="27" name="TextBox 26"/>
           <p:cNvSpPr txBox="1"/>
           <p:nvPr/>
         </p:nvSpPr>
         <p:spPr>
           <a:xfrm>
-            <a:off x="7177857" y="3977639"/>
-            <a:ext cx="1843979" cy="1645920"/>
+            <a:off x="6095847" y="3566160"/>
+            <a:ext cx="1529029" cy="1371600"/>
           </a:xfrm>
           <a:prstGeom prst="rect">
             <a:avLst/>
@@ -14170,7 +17064,182 @@
               </a:lnSpc>
             </a:pPr>
             <a:r>
-              <a:rPr sz="1050" b="0" i="0">
+              <a:rPr sz="1000" b="0" i="0">
+                <a:solidFill>
+                  <a:srgbClr val="4A423A"/>
+                </a:solidFill>
+                <a:latin typeface="Plus Jakarta Sans"/>
+                <a:ea typeface="Plus Jakarta Sans"/>
+                <a:cs typeface="Plus Jakarta Sans"/>
+              </a:rPr>
+              <a:t>Everything is packed and dispatched to your studio.</a:t>
+            </a:r>
+          </a:p>
+        </p:txBody>
+      </p:sp>
+      <p:sp>
+        <p:nvSpPr>
+          <p:cNvPr id="28" name="Rounded Rectangle 27"/>
+          <p:cNvSpPr/>
+          <p:nvPr/>
+        </p:nvSpPr>
+        <p:spPr>
+          <a:xfrm>
+            <a:off x="6095847" y="4892040"/>
+            <a:ext cx="1574749" cy="329184"/>
+          </a:xfrm>
+          <a:prstGeom prst="roundRect">
+            <a:avLst>
+              <a:gd name="adj" fmla="val 50000"/>
+            </a:avLst>
+          </a:prstGeom>
+          <a:solidFill>
+            <a:srgbClr val="B8845A"/>
+          </a:solidFill>
+          <a:ln>
+            <a:noFill/>
+          </a:ln>
+        </p:spPr>
+        <p:txBody>
+          <a:bodyPr rtlCol="0" anchor="ctr"/>
+          <a:lstStyle/>
+          <a:p>
+            <a:pPr algn="ctr"/>
+          </a:p>
+        </p:txBody>
+      </p:sp>
+      <p:sp>
+        <p:nvSpPr>
+          <p:cNvPr id="29" name="TextBox 28"/>
+          <p:cNvSpPr txBox="1"/>
+          <p:nvPr/>
+        </p:nvSpPr>
+        <p:spPr>
+          <a:xfrm>
+            <a:off x="6095847" y="4956048"/>
+            <a:ext cx="1574749" cy="228600"/>
+          </a:xfrm>
+          <a:prstGeom prst="rect">
+            <a:avLst/>
+          </a:prstGeom>
+          <a:noFill/>
+        </p:spPr>
+        <p:txBody>
+          <a:bodyPr wrap="square" lIns="0" rIns="0" tIns="0" bIns="0">
+            <a:spAutoFit/>
+          </a:bodyPr>
+          <a:lstStyle/>
+          <a:p>
+            <a:pPr algn="ctr"/>
+            <a:r>
+              <a:rPr sz="850" b="1" i="0">
+                <a:solidFill>
+                  <a:srgbClr val="FFFFFF"/>
+                </a:solidFill>
+                <a:latin typeface="Plus Jakarta Sans"/>
+                <a:ea typeface="Plus Jakarta Sans"/>
+                <a:cs typeface="Plus Jakarta Sans"/>
+              </a:rPr>
+              <a:t>30% before delivery</a:t>
+            </a:r>
+          </a:p>
+        </p:txBody>
+      </p:sp>
+      <p:sp>
+        <p:nvSpPr>
+          <p:cNvPr id="30" name="Oval 29"/>
+          <p:cNvSpPr/>
+          <p:nvPr/>
+        </p:nvSpPr>
+        <p:spPr>
+          <a:xfrm>
+            <a:off x="7899196" y="2514600"/>
+            <a:ext cx="201168" cy="201168"/>
+          </a:xfrm>
+          <a:prstGeom prst="ellipse">
+            <a:avLst/>
+          </a:prstGeom>
+          <a:solidFill>
+            <a:srgbClr val="B8845A"/>
+          </a:solidFill>
+          <a:ln>
+            <a:noFill/>
+          </a:ln>
+        </p:spPr>
+        <p:txBody>
+          <a:bodyPr rtlCol="0" anchor="ctr"/>
+          <a:lstStyle/>
+          <a:p>
+            <a:pPr algn="ctr"/>
+          </a:p>
+        </p:txBody>
+      </p:sp>
+      <p:sp>
+        <p:nvSpPr>
+          <p:cNvPr id="31" name="TextBox 30"/>
+          <p:cNvSpPr txBox="1"/>
+          <p:nvPr/>
+        </p:nvSpPr>
+        <p:spPr>
+          <a:xfrm>
+            <a:off x="7899196" y="2971800"/>
+            <a:ext cx="1666189" cy="457200"/>
+          </a:xfrm>
+          <a:prstGeom prst="rect">
+            <a:avLst/>
+          </a:prstGeom>
+          <a:noFill/>
+        </p:spPr>
+        <p:txBody>
+          <a:bodyPr wrap="square" lIns="0" rIns="0" tIns="0" bIns="0">
+            <a:spAutoFit/>
+          </a:bodyPr>
+          <a:lstStyle/>
+          <a:p>
+            <a:pPr algn="l"/>
+            <a:r>
+              <a:rPr sz="2100" b="1" i="0">
+                <a:solidFill>
+                  <a:srgbClr val="1B1815"/>
+                </a:solidFill>
+                <a:latin typeface="Plus Jakarta Sans"/>
+                <a:ea typeface="Plus Jakarta Sans"/>
+                <a:cs typeface="Plus Jakarta Sans"/>
+              </a:rPr>
+              <a:t>Day 14</a:t>
+            </a:r>
+          </a:p>
+        </p:txBody>
+      </p:sp>
+      <p:sp>
+        <p:nvSpPr>
+          <p:cNvPr id="32" name="TextBox 31"/>
+          <p:cNvSpPr txBox="1"/>
+          <p:nvPr/>
+        </p:nvSpPr>
+        <p:spPr>
+          <a:xfrm>
+            <a:off x="7899196" y="3566160"/>
+            <a:ext cx="1529029" cy="1371600"/>
+          </a:xfrm>
+          <a:prstGeom prst="rect">
+            <a:avLst/>
+          </a:prstGeom>
+          <a:noFill/>
+        </p:spPr>
+        <p:txBody>
+          <a:bodyPr wrap="square" lIns="0" rIns="0" tIns="0" bIns="0">
+            <a:spAutoFit/>
+          </a:bodyPr>
+          <a:lstStyle/>
+          <a:p>
+            <a:pPr algn="l">
+              <a:lnSpc>
+                <a:spcPct val="145000"/>
+              </a:lnSpc>
+            </a:pPr>
+            <a:r>
+              <a:rPr sz="1000" b="0" i="0">
                 <a:solidFill>
                   <a:srgbClr val="4A423A"/>
                 </a:solidFill>
@@ -14185,13 +17254,13 @@
       </p:sp>
       <p:sp>
         <p:nvSpPr>
-          <p:cNvPr id="22" name="Oval 21"/>
+          <p:cNvPr id="33" name="Oval 32"/>
           <p:cNvSpPr/>
           <p:nvPr/>
         </p:nvSpPr>
         <p:spPr>
           <a:xfrm>
-            <a:off x="9341876" y="2743200"/>
+            <a:off x="9702546" y="2514600"/>
             <a:ext cx="201168" cy="201168"/>
           </a:xfrm>
           <a:prstGeom prst="ellipse">
@@ -14214,14 +17283,14 @@
       </p:sp>
       <p:sp>
         <p:nvSpPr>
-          <p:cNvPr id="23" name="TextBox 22"/>
+          <p:cNvPr id="34" name="TextBox 33"/>
           <p:cNvSpPr txBox="1"/>
           <p:nvPr/>
         </p:nvSpPr>
         <p:spPr>
           <a:xfrm>
-            <a:off x="9341876" y="3200400"/>
-            <a:ext cx="1981139" cy="640080"/>
+            <a:off x="9702546" y="2971800"/>
+            <a:ext cx="1666189" cy="457200"/>
           </a:xfrm>
           <a:prstGeom prst="rect">
             <a:avLst/>
@@ -14234,35 +17303,31 @@
           </a:bodyPr>
           <a:lstStyle/>
           <a:p>
-            <a:pPr algn="l">
-              <a:lnSpc>
-                <a:spcPct val="92000"/>
-              </a:lnSpc>
-            </a:pPr>
-            <a:r>
-              <a:rPr sz="3400" b="0" i="0">
+            <a:pPr algn="l"/>
+            <a:r>
+              <a:rPr sz="2100" b="1" i="0">
                 <a:solidFill>
                   <a:srgbClr val="1B1815"/>
                 </a:solidFill>
-                <a:latin typeface="Cormorant Garamond"/>
+                <a:latin typeface="Plus Jakarta Sans"/>
                 <a:ea typeface="Plus Jakarta Sans"/>
                 <a:cs typeface="Plus Jakarta Sans"/>
               </a:rPr>
-              <a:t>Day 10</a:t>
-            </a:r>
-          </a:p>
-        </p:txBody>
-      </p:sp>
-      <p:sp>
-        <p:nvSpPr>
-          <p:cNvPr id="24" name="TextBox 23"/>
+              <a:t>Day 15</a:t>
+            </a:r>
+          </a:p>
+        </p:txBody>
+      </p:sp>
+      <p:sp>
+        <p:nvSpPr>
+          <p:cNvPr id="35" name="TextBox 34"/>
           <p:cNvSpPr txBox="1"/>
           <p:nvPr/>
         </p:nvSpPr>
         <p:spPr>
           <a:xfrm>
-            <a:off x="9341876" y="3977639"/>
-            <a:ext cx="1843979" cy="1645920"/>
+            <a:off x="9702546" y="3566160"/>
+            <a:ext cx="1529029" cy="1371600"/>
           </a:xfrm>
           <a:prstGeom prst="rect">
             <a:avLst/>
@@ -14281,7 +17346,7 @@
               </a:lnSpc>
             </a:pPr>
             <a:r>
-              <a:rPr sz="1050" b="0" i="0">
+              <a:rPr sz="1000" b="0" i="0">
                 <a:solidFill>
                   <a:srgbClr val="4A423A"/>
                 </a:solidFill>
@@ -14289,14 +17354,82 @@
                 <a:ea typeface="Plus Jakarta Sans"/>
                 <a:cs typeface="Plus Jakarta Sans"/>
               </a:rPr>
-              <a:t>Deep clean, professional shoot, balance 50%. Images sent that evening.</a:t>
-            </a:r>
-          </a:p>
-        </p:txBody>
-      </p:sp>
-      <p:sp>
-        <p:nvSpPr>
-          <p:cNvPr id="25" name="Rectangle 24"/>
+              <a:t>Deep clean and professional shoot. Images sent that evening.</a:t>
+            </a:r>
+          </a:p>
+        </p:txBody>
+      </p:sp>
+      <p:sp>
+        <p:nvSpPr>
+          <p:cNvPr id="36" name="Rounded Rectangle 35"/>
+          <p:cNvSpPr/>
+          <p:nvPr/>
+        </p:nvSpPr>
+        <p:spPr>
+          <a:xfrm>
+            <a:off x="9702546" y="4892040"/>
+            <a:ext cx="1574749" cy="329184"/>
+          </a:xfrm>
+          <a:prstGeom prst="roundRect">
+            <a:avLst>
+              <a:gd name="adj" fmla="val 50000"/>
+            </a:avLst>
+          </a:prstGeom>
+          <a:solidFill>
+            <a:srgbClr val="E2D8C8"/>
+          </a:solidFill>
+          <a:ln>
+            <a:noFill/>
+          </a:ln>
+        </p:spPr>
+        <p:txBody>
+          <a:bodyPr rtlCol="0" anchor="ctr"/>
+          <a:lstStyle/>
+          <a:p>
+            <a:pPr algn="ctr"/>
+          </a:p>
+        </p:txBody>
+      </p:sp>
+      <p:sp>
+        <p:nvSpPr>
+          <p:cNvPr id="37" name="TextBox 36"/>
+          <p:cNvSpPr txBox="1"/>
+          <p:nvPr/>
+        </p:nvSpPr>
+        <p:spPr>
+          <a:xfrm>
+            <a:off x="9702546" y="4956048"/>
+            <a:ext cx="1574749" cy="228600"/>
+          </a:xfrm>
+          <a:prstGeom prst="rect">
+            <a:avLst/>
+          </a:prstGeom>
+          <a:noFill/>
+        </p:spPr>
+        <p:txBody>
+          <a:bodyPr wrap="square" lIns="0" rIns="0" tIns="0" bIns="0">
+            <a:spAutoFit/>
+          </a:bodyPr>
+          <a:lstStyle/>
+          <a:p>
+            <a:pPr algn="ctr"/>
+            <a:r>
+              <a:rPr sz="850" b="1" i="0">
+                <a:solidFill>
+                  <a:srgbClr val="1B1815"/>
+                </a:solidFill>
+                <a:latin typeface="Plus Jakarta Sans"/>
+                <a:ea typeface="Plus Jakarta Sans"/>
+                <a:cs typeface="Plus Jakarta Sans"/>
+              </a:rPr>
+              <a:t>Nothing to pay</a:t>
+            </a:r>
+          </a:p>
+        </p:txBody>
+      </p:sp>
+      <p:sp>
+        <p:nvSpPr>
+          <p:cNvPr id="38" name="Rectangle 37"/>
           <p:cNvSpPr/>
           <p:nvPr/>
         </p:nvSpPr>
@@ -14325,14 +17458,14 @@
       </p:sp>
       <p:sp>
         <p:nvSpPr>
-          <p:cNvPr id="26" name="TextBox 25"/>
+          <p:cNvPr id="39" name="TextBox 38"/>
           <p:cNvSpPr txBox="1"/>
           <p:nvPr/>
         </p:nvSpPr>
         <p:spPr>
           <a:xfrm>
             <a:off x="960120" y="5715000"/>
-            <a:ext cx="10058400" cy="274320"/>
+            <a:ext cx="10515600" cy="274320"/>
           </a:xfrm>
           <a:prstGeom prst="rect">
             <a:avLst/>
@@ -14355,7 +17488,7 @@
                 <a:ea typeface="Plus Jakarta Sans"/>
                 <a:cs typeface="Plus Jakarta Sans"/>
               </a:rPr>
-              <a:t>50% to start  ·  50% on day 10, when the room is finished and photographed</a:t>
+              <a:t>10% to book  ·  the balance in three equal parts, all before delivery  ·  nothing to pay on handover day</a:t>
             </a:r>
           </a:p>
         </p:txBody>
@@ -14453,7 +17586,7 @@
                               <p:par>
                                 <p:cTn id="8" presetID="42" presetClass="entr" presetSubtype="0" fill="hold" grpId="0" nodeType="withEffect">
                                   <p:stCondLst>
-                                    <p:cond delay="345"/>
+                                    <p:cond delay="307"/>
                                   </p:stCondLst>
                                   <p:childTnLst>
                                     <p:set>
@@ -14534,7 +17667,7 @@
                               <p:par>
                                 <p:cTn id="13" presetID="22" presetClass="entr" presetSubtype="8" fill="hold" grpId="0" nodeType="withEffect">
                                   <p:stCondLst>
-                                    <p:cond delay="440"/>
+                                    <p:cond delay="364"/>
                                   </p:stCondLst>
                                   <p:childTnLst>
                                     <p:set>
@@ -14569,7 +17702,7 @@
                               <p:par>
                                 <p:cTn id="16" presetID="10" presetClass="entr" presetSubtype="0" fill="hold" grpId="0" nodeType="withEffect">
                                   <p:stCondLst>
-                                    <p:cond delay="535"/>
+                                    <p:cond delay="421"/>
                                   </p:stCondLst>
                                   <p:childTnLst>
                                     <p:set>
@@ -14604,7 +17737,7 @@
                               <p:par>
                                 <p:cTn id="19" presetID="10" presetClass="entr" presetSubtype="0" fill="hold" grpId="0" nodeType="withEffect">
                                   <p:stCondLst>
-                                    <p:cond delay="630"/>
+                                    <p:cond delay="478"/>
                                   </p:stCondLst>
                                   <p:childTnLst>
                                     <p:set>
@@ -14615,7 +17748,7 @@
                                           </p:stCondLst>
                                         </p:cTn>
                                         <p:tgtEl>
-                                          <p:spTgt spid="13"/>
+                                          <p:spTgt spid="15"/>
                                         </p:tgtEl>
                                         <p:attrNameLst>
                                           <p:attrName>style.visibility</p:attrName>
@@ -14629,7 +17762,7 @@
                                       <p:cBhvr>
                                         <p:cTn id="21" dur="700"/>
                                         <p:tgtEl>
-                                          <p:spTgt spid="13"/>
+                                          <p:spTgt spid="15"/>
                                         </p:tgtEl>
                                       </p:cBhvr>
                                     </p:animEffect>
@@ -14639,7 +17772,7 @@
                               <p:par>
                                 <p:cTn id="22" presetID="10" presetClass="entr" presetSubtype="0" fill="hold" grpId="0" nodeType="withEffect">
                                   <p:stCondLst>
-                                    <p:cond delay="725"/>
+                                    <p:cond delay="535"/>
                                   </p:stCondLst>
                                   <p:childTnLst>
                                     <p:set>
@@ -14650,7 +17783,7 @@
                                           </p:stCondLst>
                                         </p:cTn>
                                         <p:tgtEl>
-                                          <p:spTgt spid="16"/>
+                                          <p:spTgt spid="20"/>
                                         </p:tgtEl>
                                         <p:attrNameLst>
                                           <p:attrName>style.visibility</p:attrName>
@@ -14664,7 +17797,7 @@
                                       <p:cBhvr>
                                         <p:cTn id="24" dur="700"/>
                                         <p:tgtEl>
-                                          <p:spTgt spid="16"/>
+                                          <p:spTgt spid="20"/>
                                         </p:tgtEl>
                                       </p:cBhvr>
                                     </p:animEffect>
@@ -14674,7 +17807,7 @@
                               <p:par>
                                 <p:cTn id="25" presetID="10" presetClass="entr" presetSubtype="0" fill="hold" grpId="0" nodeType="withEffect">
                                   <p:stCondLst>
-                                    <p:cond delay="820"/>
+                                    <p:cond delay="592"/>
                                   </p:stCondLst>
                                   <p:childTnLst>
                                     <p:set>
@@ -14685,7 +17818,7 @@
                                           </p:stCondLst>
                                         </p:cTn>
                                         <p:tgtEl>
-                                          <p:spTgt spid="19"/>
+                                          <p:spTgt spid="25"/>
                                         </p:tgtEl>
                                         <p:attrNameLst>
                                           <p:attrName>style.visibility</p:attrName>
@@ -14699,7 +17832,7 @@
                                       <p:cBhvr>
                                         <p:cTn id="27" dur="700"/>
                                         <p:tgtEl>
-                                          <p:spTgt spid="19"/>
+                                          <p:spTgt spid="25"/>
                                         </p:tgtEl>
                                       </p:cBhvr>
                                     </p:animEffect>
@@ -14709,7 +17842,7 @@
                               <p:par>
                                 <p:cTn id="28" presetID="10" presetClass="entr" presetSubtype="0" fill="hold" grpId="0" nodeType="withEffect">
                                   <p:stCondLst>
-                                    <p:cond delay="915"/>
+                                    <p:cond delay="649"/>
                                   </p:stCondLst>
                                   <p:childTnLst>
                                     <p:set>
@@ -14720,7 +17853,7 @@
                                           </p:stCondLst>
                                         </p:cTn>
                                         <p:tgtEl>
-                                          <p:spTgt spid="22"/>
+                                          <p:spTgt spid="30"/>
                                         </p:tgtEl>
                                         <p:attrNameLst>
                                           <p:attrName>style.visibility</p:attrName>
@@ -14734,7 +17867,7 @@
                                       <p:cBhvr>
                                         <p:cTn id="30" dur="700"/>
                                         <p:tgtEl>
-                                          <p:spTgt spid="22"/>
+                                          <p:spTgt spid="30"/>
                                         </p:tgtEl>
                                       </p:cBhvr>
                                     </p:animEffect>
@@ -14742,9 +17875,9 @@
                                 </p:cTn>
                               </p:par>
                               <p:par>
-                                <p:cTn id="31" presetID="42" presetClass="entr" presetSubtype="0" fill="hold" grpId="0" nodeType="withEffect">
+                                <p:cTn id="31" presetID="10" presetClass="entr" presetSubtype="0" fill="hold" grpId="0" nodeType="withEffect">
                                   <p:stCondLst>
-                                    <p:cond delay="1010"/>
+                                    <p:cond delay="706"/>
                                   </p:stCondLst>
                                   <p:childTnLst>
                                     <p:set>
@@ -14755,7 +17888,7 @@
                                           </p:stCondLst>
                                         </p:cTn>
                                         <p:tgtEl>
-                                          <p:spTgt spid="11"/>
+                                          <p:spTgt spid="33"/>
                                         </p:tgtEl>
                                         <p:attrNameLst>
                                           <p:attrName>style.visibility</p:attrName>
@@ -14767,7 +17900,42 @@
                                     </p:set>
                                     <p:animEffect transition="in" filter="fade">
                                       <p:cBhvr>
-                                        <p:cTn id="33" dur="900"/>
+                                        <p:cTn id="33" dur="700"/>
+                                        <p:tgtEl>
+                                          <p:spTgt spid="33"/>
+                                        </p:tgtEl>
+                                      </p:cBhvr>
+                                    </p:animEffect>
+                                  </p:childTnLst>
+                                </p:cTn>
+                              </p:par>
+                              <p:par>
+                                <p:cTn id="34" presetID="42" presetClass="entr" presetSubtype="0" fill="hold" grpId="0" nodeType="withEffect">
+                                  <p:stCondLst>
+                                    <p:cond delay="763"/>
+                                  </p:stCondLst>
+                                  <p:childTnLst>
+                                    <p:set>
+                                      <p:cBhvr>
+                                        <p:cTn id="35" dur="1" fill="hold">
+                                          <p:stCondLst>
+                                            <p:cond delay="0"/>
+                                          </p:stCondLst>
+                                        </p:cTn>
+                                        <p:tgtEl>
+                                          <p:spTgt spid="11"/>
+                                        </p:tgtEl>
+                                        <p:attrNameLst>
+                                          <p:attrName>style.visibility</p:attrName>
+                                        </p:attrNameLst>
+                                      </p:cBhvr>
+                                      <p:to>
+                                        <p:strVal val="visible"/>
+                                      </p:to>
+                                    </p:set>
+                                    <p:animEffect transition="in" filter="fade">
+                                      <p:cBhvr>
+                                        <p:cTn id="36" dur="900"/>
                                         <p:tgtEl>
                                           <p:spTgt spid="11"/>
                                         </p:tgtEl>
@@ -14775,7 +17943,7 @@
                                     </p:animEffect>
                                     <p:anim calcmode="lin" valueType="num">
                                       <p:cBhvr>
-                                        <p:cTn id="34" dur="900" decel="100000"/>
+                                        <p:cTn id="37" dur="900" decel="100000"/>
                                         <p:tgtEl>
                                           <p:spTgt spid="11"/>
                                         </p:tgtEl>
@@ -14798,7 +17966,7 @@
                                     </p:anim>
                                     <p:anim calcmode="lin" valueType="num">
                                       <p:cBhvr>
-                                        <p:cTn id="35" dur="900" decel="100000"/>
+                                        <p:cTn id="38" dur="900" decel="100000"/>
                                         <p:tgtEl>
                                           <p:spTgt spid="11"/>
                                         </p:tgtEl>
@@ -14823,20 +17991,20 @@
                                 </p:cTn>
                               </p:par>
                               <p:par>
-                                <p:cTn id="36" presetID="42" presetClass="entr" presetSubtype="0" fill="hold" grpId="0" nodeType="withEffect">
+                                <p:cTn id="39" presetID="42" presetClass="entr" presetSubtype="0" fill="hold" grpId="0" nodeType="withEffect">
                                   <p:stCondLst>
-                                    <p:cond delay="1105"/>
+                                    <p:cond delay="820"/>
                                   </p:stCondLst>
                                   <p:childTnLst>
                                     <p:set>
                                       <p:cBhvr>
-                                        <p:cTn id="37" dur="1" fill="hold">
+                                        <p:cTn id="40" dur="1" fill="hold">
                                           <p:stCondLst>
                                             <p:cond delay="0"/>
                                           </p:stCondLst>
                                         </p:cTn>
                                         <p:tgtEl>
-                                          <p:spTgt spid="14"/>
+                                          <p:spTgt spid="16"/>
                                         </p:tgtEl>
                                         <p:attrNameLst>
                                           <p:attrName>style.visibility</p:attrName>
@@ -14848,17 +18016,17 @@
                                     </p:set>
                                     <p:animEffect transition="in" filter="fade">
                                       <p:cBhvr>
-                                        <p:cTn id="38" dur="900"/>
-                                        <p:tgtEl>
-                                          <p:spTgt spid="14"/>
+                                        <p:cTn id="41" dur="900"/>
+                                        <p:tgtEl>
+                                          <p:spTgt spid="16"/>
                                         </p:tgtEl>
                                       </p:cBhvr>
                                     </p:animEffect>
                                     <p:anim calcmode="lin" valueType="num">
                                       <p:cBhvr>
-                                        <p:cTn id="39" dur="900" decel="100000"/>
-                                        <p:tgtEl>
-                                          <p:spTgt spid="14"/>
+                                        <p:cTn id="42" dur="900" decel="100000"/>
+                                        <p:tgtEl>
+                                          <p:spTgt spid="16"/>
                                         </p:tgtEl>
                                         <p:attrNameLst>
                                           <p:attrName>ppt_x</p:attrName>
@@ -14879,9 +18047,9 @@
                                     </p:anim>
                                     <p:anim calcmode="lin" valueType="num">
                                       <p:cBhvr>
-                                        <p:cTn id="40" dur="900" decel="100000"/>
-                                        <p:tgtEl>
-                                          <p:spTgt spid="14"/>
+                                        <p:cTn id="43" dur="900" decel="100000"/>
+                                        <p:tgtEl>
+                                          <p:spTgt spid="16"/>
                                         </p:tgtEl>
                                         <p:attrNameLst>
                                           <p:attrName>ppt_y</p:attrName>
@@ -14904,20 +18072,20 @@
                                 </p:cTn>
                               </p:par>
                               <p:par>
-                                <p:cTn id="41" presetID="42" presetClass="entr" presetSubtype="0" fill="hold" grpId="0" nodeType="withEffect">
+                                <p:cTn id="44" presetID="42" presetClass="entr" presetSubtype="0" fill="hold" grpId="0" nodeType="withEffect">
                                   <p:stCondLst>
-                                    <p:cond delay="1200"/>
+                                    <p:cond delay="877"/>
                                   </p:stCondLst>
                                   <p:childTnLst>
                                     <p:set>
                                       <p:cBhvr>
-                                        <p:cTn id="42" dur="1" fill="hold">
+                                        <p:cTn id="45" dur="1" fill="hold">
                                           <p:stCondLst>
                                             <p:cond delay="0"/>
                                           </p:stCondLst>
                                         </p:cTn>
                                         <p:tgtEl>
-                                          <p:spTgt spid="17"/>
+                                          <p:spTgt spid="21"/>
                                         </p:tgtEl>
                                         <p:attrNameLst>
                                           <p:attrName>style.visibility</p:attrName>
@@ -14929,17 +18097,17 @@
                                     </p:set>
                                     <p:animEffect transition="in" filter="fade">
                                       <p:cBhvr>
-                                        <p:cTn id="43" dur="900"/>
-                                        <p:tgtEl>
-                                          <p:spTgt spid="17"/>
+                                        <p:cTn id="46" dur="900"/>
+                                        <p:tgtEl>
+                                          <p:spTgt spid="21"/>
                                         </p:tgtEl>
                                       </p:cBhvr>
                                     </p:animEffect>
                                     <p:anim calcmode="lin" valueType="num">
                                       <p:cBhvr>
-                                        <p:cTn id="44" dur="900" decel="100000"/>
-                                        <p:tgtEl>
-                                          <p:spTgt spid="17"/>
+                                        <p:cTn id="47" dur="900" decel="100000"/>
+                                        <p:tgtEl>
+                                          <p:spTgt spid="21"/>
                                         </p:tgtEl>
                                         <p:attrNameLst>
                                           <p:attrName>ppt_x</p:attrName>
@@ -14960,9 +18128,9 @@
                                     </p:anim>
                                     <p:anim calcmode="lin" valueType="num">
                                       <p:cBhvr>
-                                        <p:cTn id="45" dur="900" decel="100000"/>
-                                        <p:tgtEl>
-                                          <p:spTgt spid="17"/>
+                                        <p:cTn id="48" dur="900" decel="100000"/>
+                                        <p:tgtEl>
+                                          <p:spTgt spid="21"/>
                                         </p:tgtEl>
                                         <p:attrNameLst>
                                           <p:attrName>ppt_y</p:attrName>
@@ -14985,20 +18153,20 @@
                                 </p:cTn>
                               </p:par>
                               <p:par>
-                                <p:cTn id="46" presetID="42" presetClass="entr" presetSubtype="0" fill="hold" grpId="0" nodeType="withEffect">
+                                <p:cTn id="49" presetID="42" presetClass="entr" presetSubtype="0" fill="hold" grpId="0" nodeType="withEffect">
                                   <p:stCondLst>
-                                    <p:cond delay="1295"/>
+                                    <p:cond delay="934"/>
                                   </p:stCondLst>
                                   <p:childTnLst>
                                     <p:set>
                                       <p:cBhvr>
-                                        <p:cTn id="47" dur="1" fill="hold">
+                                        <p:cTn id="50" dur="1" fill="hold">
                                           <p:stCondLst>
                                             <p:cond delay="0"/>
                                           </p:stCondLst>
                                         </p:cTn>
                                         <p:tgtEl>
-                                          <p:spTgt spid="20"/>
+                                          <p:spTgt spid="26"/>
                                         </p:tgtEl>
                                         <p:attrNameLst>
                                           <p:attrName>style.visibility</p:attrName>
@@ -15010,17 +18178,17 @@
                                     </p:set>
                                     <p:animEffect transition="in" filter="fade">
                                       <p:cBhvr>
-                                        <p:cTn id="48" dur="900"/>
-                                        <p:tgtEl>
-                                          <p:spTgt spid="20"/>
+                                        <p:cTn id="51" dur="900"/>
+                                        <p:tgtEl>
+                                          <p:spTgt spid="26"/>
                                         </p:tgtEl>
                                       </p:cBhvr>
                                     </p:animEffect>
                                     <p:anim calcmode="lin" valueType="num">
                                       <p:cBhvr>
-                                        <p:cTn id="49" dur="900" decel="100000"/>
-                                        <p:tgtEl>
-                                          <p:spTgt spid="20"/>
+                                        <p:cTn id="52" dur="900" decel="100000"/>
+                                        <p:tgtEl>
+                                          <p:spTgt spid="26"/>
                                         </p:tgtEl>
                                         <p:attrNameLst>
                                           <p:attrName>ppt_x</p:attrName>
@@ -15041,9 +18209,9 @@
                                     </p:anim>
                                     <p:anim calcmode="lin" valueType="num">
                                       <p:cBhvr>
-                                        <p:cTn id="50" dur="900" decel="100000"/>
-                                        <p:tgtEl>
-                                          <p:spTgt spid="20"/>
+                                        <p:cTn id="53" dur="900" decel="100000"/>
+                                        <p:tgtEl>
+                                          <p:spTgt spid="26"/>
                                         </p:tgtEl>
                                         <p:attrNameLst>
                                           <p:attrName>ppt_y</p:attrName>
@@ -15066,20 +18234,20 @@
                                 </p:cTn>
                               </p:par>
                               <p:par>
-                                <p:cTn id="51" presetID="42" presetClass="entr" presetSubtype="0" fill="hold" grpId="0" nodeType="withEffect">
+                                <p:cTn id="54" presetID="42" presetClass="entr" presetSubtype="0" fill="hold" grpId="0" nodeType="withEffect">
                                   <p:stCondLst>
-                                    <p:cond delay="1390"/>
+                                    <p:cond delay="991"/>
                                   </p:stCondLst>
                                   <p:childTnLst>
                                     <p:set>
                                       <p:cBhvr>
-                                        <p:cTn id="52" dur="1" fill="hold">
+                                        <p:cTn id="55" dur="1" fill="hold">
                                           <p:stCondLst>
                                             <p:cond delay="0"/>
                                           </p:stCondLst>
                                         </p:cTn>
                                         <p:tgtEl>
-                                          <p:spTgt spid="23"/>
+                                          <p:spTgt spid="31"/>
                                         </p:tgtEl>
                                         <p:attrNameLst>
                                           <p:attrName>style.visibility</p:attrName>
@@ -15091,17 +18259,17 @@
                                     </p:set>
                                     <p:animEffect transition="in" filter="fade">
                                       <p:cBhvr>
-                                        <p:cTn id="53" dur="900"/>
-                                        <p:tgtEl>
-                                          <p:spTgt spid="23"/>
+                                        <p:cTn id="56" dur="900"/>
+                                        <p:tgtEl>
+                                          <p:spTgt spid="31"/>
                                         </p:tgtEl>
                                       </p:cBhvr>
                                     </p:animEffect>
                                     <p:anim calcmode="lin" valueType="num">
                                       <p:cBhvr>
-                                        <p:cTn id="54" dur="900" decel="100000"/>
-                                        <p:tgtEl>
-                                          <p:spTgt spid="23"/>
+                                        <p:cTn id="57" dur="900" decel="100000"/>
+                                        <p:tgtEl>
+                                          <p:spTgt spid="31"/>
                                         </p:tgtEl>
                                         <p:attrNameLst>
                                           <p:attrName>ppt_x</p:attrName>
@@ -15122,9 +18290,9 @@
                                     </p:anim>
                                     <p:anim calcmode="lin" valueType="num">
                                       <p:cBhvr>
-                                        <p:cTn id="55" dur="900" decel="100000"/>
-                                        <p:tgtEl>
-                                          <p:spTgt spid="23"/>
+                                        <p:cTn id="58" dur="900" decel="100000"/>
+                                        <p:tgtEl>
+                                          <p:spTgt spid="31"/>
                                         </p:tgtEl>
                                         <p:attrNameLst>
                                           <p:attrName>ppt_y</p:attrName>
@@ -15147,20 +18315,20 @@
                                 </p:cTn>
                               </p:par>
                               <p:par>
-                                <p:cTn id="56" presetID="10" presetClass="entr" presetSubtype="0" fill="hold" grpId="0" nodeType="withEffect">
+                                <p:cTn id="59" presetID="42" presetClass="entr" presetSubtype="0" fill="hold" grpId="0" nodeType="withEffect">
                                   <p:stCondLst>
-                                    <p:cond delay="1485"/>
+                                    <p:cond delay="1048"/>
                                   </p:stCondLst>
                                   <p:childTnLst>
                                     <p:set>
                                       <p:cBhvr>
-                                        <p:cTn id="57" dur="1" fill="hold">
+                                        <p:cTn id="60" dur="1" fill="hold">
                                           <p:stCondLst>
                                             <p:cond delay="0"/>
                                           </p:stCondLst>
                                         </p:cTn>
                                         <p:tgtEl>
-                                          <p:spTgt spid="12"/>
+                                          <p:spTgt spid="34"/>
                                         </p:tgtEl>
                                         <p:attrNameLst>
                                           <p:attrName>style.visibility</p:attrName>
@@ -15172,7 +18340,88 @@
                                     </p:set>
                                     <p:animEffect transition="in" filter="fade">
                                       <p:cBhvr>
-                                        <p:cTn id="58" dur="700"/>
+                                        <p:cTn id="61" dur="900"/>
+                                        <p:tgtEl>
+                                          <p:spTgt spid="34"/>
+                                        </p:tgtEl>
+                                      </p:cBhvr>
+                                    </p:animEffect>
+                                    <p:anim calcmode="lin" valueType="num">
+                                      <p:cBhvr>
+                                        <p:cTn id="62" dur="900" decel="100000"/>
+                                        <p:tgtEl>
+                                          <p:spTgt spid="34"/>
+                                        </p:tgtEl>
+                                        <p:attrNameLst>
+                                          <p:attrName>ppt_x</p:attrName>
+                                        </p:attrNameLst>
+                                      </p:cBhvr>
+                                      <p:tavLst>
+                                        <p:tav tm="0">
+                                          <p:val>
+                                            <p:strVal val="#ppt_x"/>
+                                          </p:val>
+                                        </p:tav>
+                                        <p:tav tm="100000">
+                                          <p:val>
+                                            <p:strVal val="#ppt_x"/>
+                                          </p:val>
+                                        </p:tav>
+                                      </p:tavLst>
+                                    </p:anim>
+                                    <p:anim calcmode="lin" valueType="num">
+                                      <p:cBhvr>
+                                        <p:cTn id="63" dur="900" decel="100000"/>
+                                        <p:tgtEl>
+                                          <p:spTgt spid="34"/>
+                                        </p:tgtEl>
+                                        <p:attrNameLst>
+                                          <p:attrName>ppt_y</p:attrName>
+                                        </p:attrNameLst>
+                                      </p:cBhvr>
+                                      <p:tavLst>
+                                        <p:tav tm="0">
+                                          <p:val>
+                                            <p:strVal val="#ppt_y+.035"/>
+                                          </p:val>
+                                        </p:tav>
+                                        <p:tav tm="100000">
+                                          <p:val>
+                                            <p:strVal val="#ppt_y"/>
+                                          </p:val>
+                                        </p:tav>
+                                      </p:tavLst>
+                                    </p:anim>
+                                  </p:childTnLst>
+                                </p:cTn>
+                              </p:par>
+                              <p:par>
+                                <p:cTn id="64" presetID="10" presetClass="entr" presetSubtype="0" fill="hold" grpId="0" nodeType="withEffect">
+                                  <p:stCondLst>
+                                    <p:cond delay="1105"/>
+                                  </p:stCondLst>
+                                  <p:childTnLst>
+                                    <p:set>
+                                      <p:cBhvr>
+                                        <p:cTn id="65" dur="1" fill="hold">
+                                          <p:stCondLst>
+                                            <p:cond delay="0"/>
+                                          </p:stCondLst>
+                                        </p:cTn>
+                                        <p:tgtEl>
+                                          <p:spTgt spid="12"/>
+                                        </p:tgtEl>
+                                        <p:attrNameLst>
+                                          <p:attrName>style.visibility</p:attrName>
+                                        </p:attrNameLst>
+                                      </p:cBhvr>
+                                      <p:to>
+                                        <p:strVal val="visible"/>
+                                      </p:to>
+                                    </p:set>
+                                    <p:animEffect transition="in" filter="fade">
+                                      <p:cBhvr>
+                                        <p:cTn id="66" dur="700"/>
                                         <p:tgtEl>
                                           <p:spTgt spid="12"/>
                                         </p:tgtEl>
@@ -15182,20 +18431,20 @@
                                 </p:cTn>
                               </p:par>
                               <p:par>
-                                <p:cTn id="59" presetID="10" presetClass="entr" presetSubtype="0" fill="hold" grpId="0" nodeType="withEffect">
+                                <p:cTn id="67" presetID="10" presetClass="entr" presetSubtype="0" fill="hold" grpId="0" nodeType="withEffect">
                                   <p:stCondLst>
-                                    <p:cond delay="1580"/>
+                                    <p:cond delay="1162"/>
                                   </p:stCondLst>
                                   <p:childTnLst>
                                     <p:set>
                                       <p:cBhvr>
-                                        <p:cTn id="60" dur="1" fill="hold">
+                                        <p:cTn id="68" dur="1" fill="hold">
                                           <p:stCondLst>
                                             <p:cond delay="0"/>
                                           </p:stCondLst>
                                         </p:cTn>
                                         <p:tgtEl>
-                                          <p:spTgt spid="15"/>
+                                          <p:spTgt spid="17"/>
                                         </p:tgtEl>
                                         <p:attrNameLst>
                                           <p:attrName>style.visibility</p:attrName>
@@ -15207,9 +18456,9 @@
                                     </p:set>
                                     <p:animEffect transition="in" filter="fade">
                                       <p:cBhvr>
-                                        <p:cTn id="61" dur="700"/>
-                                        <p:tgtEl>
-                                          <p:spTgt spid="15"/>
+                                        <p:cTn id="69" dur="700"/>
+                                        <p:tgtEl>
+                                          <p:spTgt spid="17"/>
                                         </p:tgtEl>
                                       </p:cBhvr>
                                     </p:animEffect>
@@ -15217,20 +18466,300 @@
                                 </p:cTn>
                               </p:par>
                               <p:par>
-                                <p:cTn id="62" presetID="10" presetClass="entr" presetSubtype="0" fill="hold" grpId="0" nodeType="withEffect">
+                                <p:cTn id="70" presetID="10" presetClass="entr" presetSubtype="0" fill="hold" grpId="0" nodeType="withEffect">
+                                  <p:stCondLst>
+                                    <p:cond delay="1219"/>
+                                  </p:stCondLst>
+                                  <p:childTnLst>
+                                    <p:set>
+                                      <p:cBhvr>
+                                        <p:cTn id="71" dur="1" fill="hold">
+                                          <p:stCondLst>
+                                            <p:cond delay="0"/>
+                                          </p:stCondLst>
+                                        </p:cTn>
+                                        <p:tgtEl>
+                                          <p:spTgt spid="22"/>
+                                        </p:tgtEl>
+                                        <p:attrNameLst>
+                                          <p:attrName>style.visibility</p:attrName>
+                                        </p:attrNameLst>
+                                      </p:cBhvr>
+                                      <p:to>
+                                        <p:strVal val="visible"/>
+                                      </p:to>
+                                    </p:set>
+                                    <p:animEffect transition="in" filter="fade">
+                                      <p:cBhvr>
+                                        <p:cTn id="72" dur="700"/>
+                                        <p:tgtEl>
+                                          <p:spTgt spid="22"/>
+                                        </p:tgtEl>
+                                      </p:cBhvr>
+                                    </p:animEffect>
+                                  </p:childTnLst>
+                                </p:cTn>
+                              </p:par>
+                              <p:par>
+                                <p:cTn id="73" presetID="10" presetClass="entr" presetSubtype="0" fill="hold" grpId="0" nodeType="withEffect">
+                                  <p:stCondLst>
+                                    <p:cond delay="1276"/>
+                                  </p:stCondLst>
+                                  <p:childTnLst>
+                                    <p:set>
+                                      <p:cBhvr>
+                                        <p:cTn id="74" dur="1" fill="hold">
+                                          <p:stCondLst>
+                                            <p:cond delay="0"/>
+                                          </p:stCondLst>
+                                        </p:cTn>
+                                        <p:tgtEl>
+                                          <p:spTgt spid="27"/>
+                                        </p:tgtEl>
+                                        <p:attrNameLst>
+                                          <p:attrName>style.visibility</p:attrName>
+                                        </p:attrNameLst>
+                                      </p:cBhvr>
+                                      <p:to>
+                                        <p:strVal val="visible"/>
+                                      </p:to>
+                                    </p:set>
+                                    <p:animEffect transition="in" filter="fade">
+                                      <p:cBhvr>
+                                        <p:cTn id="75" dur="700"/>
+                                        <p:tgtEl>
+                                          <p:spTgt spid="27"/>
+                                        </p:tgtEl>
+                                      </p:cBhvr>
+                                    </p:animEffect>
+                                  </p:childTnLst>
+                                </p:cTn>
+                              </p:par>
+                              <p:par>
+                                <p:cTn id="76" presetID="10" presetClass="entr" presetSubtype="0" fill="hold" grpId="0" nodeType="withEffect">
+                                  <p:stCondLst>
+                                    <p:cond delay="1333"/>
+                                  </p:stCondLst>
+                                  <p:childTnLst>
+                                    <p:set>
+                                      <p:cBhvr>
+                                        <p:cTn id="77" dur="1" fill="hold">
+                                          <p:stCondLst>
+                                            <p:cond delay="0"/>
+                                          </p:stCondLst>
+                                        </p:cTn>
+                                        <p:tgtEl>
+                                          <p:spTgt spid="32"/>
+                                        </p:tgtEl>
+                                        <p:attrNameLst>
+                                          <p:attrName>style.visibility</p:attrName>
+                                        </p:attrNameLst>
+                                      </p:cBhvr>
+                                      <p:to>
+                                        <p:strVal val="visible"/>
+                                      </p:to>
+                                    </p:set>
+                                    <p:animEffect transition="in" filter="fade">
+                                      <p:cBhvr>
+                                        <p:cTn id="78" dur="700"/>
+                                        <p:tgtEl>
+                                          <p:spTgt spid="32"/>
+                                        </p:tgtEl>
+                                      </p:cBhvr>
+                                    </p:animEffect>
+                                  </p:childTnLst>
+                                </p:cTn>
+                              </p:par>
+                              <p:par>
+                                <p:cTn id="79" presetID="10" presetClass="entr" presetSubtype="0" fill="hold" grpId="0" nodeType="withEffect">
+                                  <p:stCondLst>
+                                    <p:cond delay="1390"/>
+                                  </p:stCondLst>
+                                  <p:childTnLst>
+                                    <p:set>
+                                      <p:cBhvr>
+                                        <p:cTn id="80" dur="1" fill="hold">
+                                          <p:stCondLst>
+                                            <p:cond delay="0"/>
+                                          </p:stCondLst>
+                                        </p:cTn>
+                                        <p:tgtEl>
+                                          <p:spTgt spid="35"/>
+                                        </p:tgtEl>
+                                        <p:attrNameLst>
+                                          <p:attrName>style.visibility</p:attrName>
+                                        </p:attrNameLst>
+                                      </p:cBhvr>
+                                      <p:to>
+                                        <p:strVal val="visible"/>
+                                      </p:to>
+                                    </p:set>
+                                    <p:animEffect transition="in" filter="fade">
+                                      <p:cBhvr>
+                                        <p:cTn id="81" dur="700"/>
+                                        <p:tgtEl>
+                                          <p:spTgt spid="35"/>
+                                        </p:tgtEl>
+                                      </p:cBhvr>
+                                    </p:animEffect>
+                                  </p:childTnLst>
+                                </p:cTn>
+                              </p:par>
+                              <p:par>
+                                <p:cTn id="82" presetID="10" presetClass="entr" presetSubtype="0" fill="hold" grpId="0" nodeType="withEffect">
+                                  <p:stCondLst>
+                                    <p:cond delay="1447"/>
+                                  </p:stCondLst>
+                                  <p:childTnLst>
+                                    <p:set>
+                                      <p:cBhvr>
+                                        <p:cTn id="83" dur="1" fill="hold">
+                                          <p:stCondLst>
+                                            <p:cond delay="0"/>
+                                          </p:stCondLst>
+                                        </p:cTn>
+                                        <p:tgtEl>
+                                          <p:spTgt spid="13"/>
+                                        </p:tgtEl>
+                                        <p:attrNameLst>
+                                          <p:attrName>style.visibility</p:attrName>
+                                        </p:attrNameLst>
+                                      </p:cBhvr>
+                                      <p:to>
+                                        <p:strVal val="visible"/>
+                                      </p:to>
+                                    </p:set>
+                                    <p:animEffect transition="in" filter="fade">
+                                      <p:cBhvr>
+                                        <p:cTn id="84" dur="700"/>
+                                        <p:tgtEl>
+                                          <p:spTgt spid="13"/>
+                                        </p:tgtEl>
+                                      </p:cBhvr>
+                                    </p:animEffect>
+                                  </p:childTnLst>
+                                </p:cTn>
+                              </p:par>
+                              <p:par>
+                                <p:cTn id="85" presetID="10" presetClass="entr" presetSubtype="0" fill="hold" grpId="0" nodeType="withEffect">
+                                  <p:stCondLst>
+                                    <p:cond delay="1504"/>
+                                  </p:stCondLst>
+                                  <p:childTnLst>
+                                    <p:set>
+                                      <p:cBhvr>
+                                        <p:cTn id="86" dur="1" fill="hold">
+                                          <p:stCondLst>
+                                            <p:cond delay="0"/>
+                                          </p:stCondLst>
+                                        </p:cTn>
+                                        <p:tgtEl>
+                                          <p:spTgt spid="14"/>
+                                        </p:tgtEl>
+                                        <p:attrNameLst>
+                                          <p:attrName>style.visibility</p:attrName>
+                                        </p:attrNameLst>
+                                      </p:cBhvr>
+                                      <p:to>
+                                        <p:strVal val="visible"/>
+                                      </p:to>
+                                    </p:set>
+                                    <p:animEffect transition="in" filter="fade">
+                                      <p:cBhvr>
+                                        <p:cTn id="87" dur="700"/>
+                                        <p:tgtEl>
+                                          <p:spTgt spid="14"/>
+                                        </p:tgtEl>
+                                      </p:cBhvr>
+                                    </p:animEffect>
+                                  </p:childTnLst>
+                                </p:cTn>
+                              </p:par>
+                              <p:par>
+                                <p:cTn id="88" presetID="10" presetClass="entr" presetSubtype="0" fill="hold" grpId="0" nodeType="withEffect">
+                                  <p:stCondLst>
+                                    <p:cond delay="1561"/>
+                                  </p:stCondLst>
+                                  <p:childTnLst>
+                                    <p:set>
+                                      <p:cBhvr>
+                                        <p:cTn id="89" dur="1" fill="hold">
+                                          <p:stCondLst>
+                                            <p:cond delay="0"/>
+                                          </p:stCondLst>
+                                        </p:cTn>
+                                        <p:tgtEl>
+                                          <p:spTgt spid="18"/>
+                                        </p:tgtEl>
+                                        <p:attrNameLst>
+                                          <p:attrName>style.visibility</p:attrName>
+                                        </p:attrNameLst>
+                                      </p:cBhvr>
+                                      <p:to>
+                                        <p:strVal val="visible"/>
+                                      </p:to>
+                                    </p:set>
+                                    <p:animEffect transition="in" filter="fade">
+                                      <p:cBhvr>
+                                        <p:cTn id="90" dur="700"/>
+                                        <p:tgtEl>
+                                          <p:spTgt spid="18"/>
+                                        </p:tgtEl>
+                                      </p:cBhvr>
+                                    </p:animEffect>
+                                  </p:childTnLst>
+                                </p:cTn>
+                              </p:par>
+                              <p:par>
+                                <p:cTn id="91" presetID="10" presetClass="entr" presetSubtype="0" fill="hold" grpId="0" nodeType="withEffect">
+                                  <p:stCondLst>
+                                    <p:cond delay="1618"/>
+                                  </p:stCondLst>
+                                  <p:childTnLst>
+                                    <p:set>
+                                      <p:cBhvr>
+                                        <p:cTn id="92" dur="1" fill="hold">
+                                          <p:stCondLst>
+                                            <p:cond delay="0"/>
+                                          </p:stCondLst>
+                                        </p:cTn>
+                                        <p:tgtEl>
+                                          <p:spTgt spid="19"/>
+                                        </p:tgtEl>
+                                        <p:attrNameLst>
+                                          <p:attrName>style.visibility</p:attrName>
+                                        </p:attrNameLst>
+                                      </p:cBhvr>
+                                      <p:to>
+                                        <p:strVal val="visible"/>
+                                      </p:to>
+                                    </p:set>
+                                    <p:animEffect transition="in" filter="fade">
+                                      <p:cBhvr>
+                                        <p:cTn id="93" dur="700"/>
+                                        <p:tgtEl>
+                                          <p:spTgt spid="19"/>
+                                        </p:tgtEl>
+                                      </p:cBhvr>
+                                    </p:animEffect>
+                                  </p:childTnLst>
+                                </p:cTn>
+                              </p:par>
+                              <p:par>
+                                <p:cTn id="94" presetID="10" presetClass="entr" presetSubtype="0" fill="hold" grpId="0" nodeType="withEffect">
                                   <p:stCondLst>
                                     <p:cond delay="1675"/>
                                   </p:stCondLst>
                                   <p:childTnLst>
                                     <p:set>
                                       <p:cBhvr>
-                                        <p:cTn id="63" dur="1" fill="hold">
+                                        <p:cTn id="95" dur="1" fill="hold">
                                           <p:stCondLst>
                                             <p:cond delay="0"/>
                                           </p:stCondLst>
                                         </p:cTn>
                                         <p:tgtEl>
-                                          <p:spTgt spid="18"/>
+                                          <p:spTgt spid="23"/>
                                         </p:tgtEl>
                                         <p:attrNameLst>
                                           <p:attrName>style.visibility</p:attrName>
@@ -15242,9 +18771,9 @@
                                     </p:set>
                                     <p:animEffect transition="in" filter="fade">
                                       <p:cBhvr>
-                                        <p:cTn id="64" dur="700"/>
-                                        <p:tgtEl>
-                                          <p:spTgt spid="18"/>
+                                        <p:cTn id="96" dur="700"/>
+                                        <p:tgtEl>
+                                          <p:spTgt spid="23"/>
                                         </p:tgtEl>
                                       </p:cBhvr>
                                     </p:animEffect>
@@ -15252,20 +18781,20 @@
                                 </p:cTn>
                               </p:par>
                               <p:par>
-                                <p:cTn id="65" presetID="10" presetClass="entr" presetSubtype="0" fill="hold" grpId="0" nodeType="withEffect">
+                                <p:cTn id="97" presetID="10" presetClass="entr" presetSubtype="0" fill="hold" grpId="0" nodeType="withEffect">
                                   <p:stCondLst>
-                                    <p:cond delay="1770"/>
+                                    <p:cond delay="1732"/>
                                   </p:stCondLst>
                                   <p:childTnLst>
                                     <p:set>
                                       <p:cBhvr>
-                                        <p:cTn id="66" dur="1" fill="hold">
+                                        <p:cTn id="98" dur="1" fill="hold">
                                           <p:stCondLst>
                                             <p:cond delay="0"/>
                                           </p:stCondLst>
                                         </p:cTn>
                                         <p:tgtEl>
-                                          <p:spTgt spid="21"/>
+                                          <p:spTgt spid="24"/>
                                         </p:tgtEl>
                                         <p:attrNameLst>
                                           <p:attrName>style.visibility</p:attrName>
@@ -15277,9 +18806,9 @@
                                     </p:set>
                                     <p:animEffect transition="in" filter="fade">
                                       <p:cBhvr>
-                                        <p:cTn id="67" dur="700"/>
-                                        <p:tgtEl>
-                                          <p:spTgt spid="21"/>
+                                        <p:cTn id="99" dur="700"/>
+                                        <p:tgtEl>
+                                          <p:spTgt spid="24"/>
                                         </p:tgtEl>
                                       </p:cBhvr>
                                     </p:animEffect>
@@ -15287,20 +18816,20 @@
                                 </p:cTn>
                               </p:par>
                               <p:par>
-                                <p:cTn id="68" presetID="10" presetClass="entr" presetSubtype="0" fill="hold" grpId="0" nodeType="withEffect">
+                                <p:cTn id="100" presetID="10" presetClass="entr" presetSubtype="0" fill="hold" grpId="0" nodeType="withEffect">
                                   <p:stCondLst>
-                                    <p:cond delay="1865"/>
+                                    <p:cond delay="1789"/>
                                   </p:stCondLst>
                                   <p:childTnLst>
                                     <p:set>
                                       <p:cBhvr>
-                                        <p:cTn id="69" dur="1" fill="hold">
+                                        <p:cTn id="101" dur="1" fill="hold">
                                           <p:stCondLst>
                                             <p:cond delay="0"/>
                                           </p:stCondLst>
                                         </p:cTn>
                                         <p:tgtEl>
-                                          <p:spTgt spid="24"/>
+                                          <p:spTgt spid="28"/>
                                         </p:tgtEl>
                                         <p:attrNameLst>
                                           <p:attrName>style.visibility</p:attrName>
@@ -15312,9 +18841,9 @@
                                     </p:set>
                                     <p:animEffect transition="in" filter="fade">
                                       <p:cBhvr>
-                                        <p:cTn id="70" dur="700"/>
-                                        <p:tgtEl>
-                                          <p:spTgt spid="24"/>
+                                        <p:cTn id="102" dur="700"/>
+                                        <p:tgtEl>
+                                          <p:spTgt spid="28"/>
                                         </p:tgtEl>
                                       </p:cBhvr>
                                     </p:animEffect>
@@ -15322,20 +18851,90 @@
                                 </p:cTn>
                               </p:par>
                               <p:par>
-                                <p:cTn id="71" presetID="10" presetClass="entr" presetSubtype="0" fill="hold" grpId="0" nodeType="withEffect">
+                                <p:cTn id="103" presetID="10" presetClass="entr" presetSubtype="0" fill="hold" grpId="0" nodeType="withEffect">
+                                  <p:stCondLst>
+                                    <p:cond delay="1846"/>
+                                  </p:stCondLst>
+                                  <p:childTnLst>
+                                    <p:set>
+                                      <p:cBhvr>
+                                        <p:cTn id="104" dur="1" fill="hold">
+                                          <p:stCondLst>
+                                            <p:cond delay="0"/>
+                                          </p:stCondLst>
+                                        </p:cTn>
+                                        <p:tgtEl>
+                                          <p:spTgt spid="29"/>
+                                        </p:tgtEl>
+                                        <p:attrNameLst>
+                                          <p:attrName>style.visibility</p:attrName>
+                                        </p:attrNameLst>
+                                      </p:cBhvr>
+                                      <p:to>
+                                        <p:strVal val="visible"/>
+                                      </p:to>
+                                    </p:set>
+                                    <p:animEffect transition="in" filter="fade">
+                                      <p:cBhvr>
+                                        <p:cTn id="105" dur="700"/>
+                                        <p:tgtEl>
+                                          <p:spTgt spid="29"/>
+                                        </p:tgtEl>
+                                      </p:cBhvr>
+                                    </p:animEffect>
+                                  </p:childTnLst>
+                                </p:cTn>
+                              </p:par>
+                              <p:par>
+                                <p:cTn id="106" presetID="10" presetClass="entr" presetSubtype="0" fill="hold" grpId="0" nodeType="withEffect">
+                                  <p:stCondLst>
+                                    <p:cond delay="1903"/>
+                                  </p:stCondLst>
+                                  <p:childTnLst>
+                                    <p:set>
+                                      <p:cBhvr>
+                                        <p:cTn id="107" dur="1" fill="hold">
+                                          <p:stCondLst>
+                                            <p:cond delay="0"/>
+                                          </p:stCondLst>
+                                        </p:cTn>
+                                        <p:tgtEl>
+                                          <p:spTgt spid="36"/>
+                                        </p:tgtEl>
+                                        <p:attrNameLst>
+                                          <p:attrName>style.visibility</p:attrName>
+                                        </p:attrNameLst>
+                                      </p:cBhvr>
+                                      <p:to>
+                                        <p:strVal val="visible"/>
+                                      </p:to>
+                                    </p:set>
+                                    <p:animEffect transition="in" filter="fade">
+                                      <p:cBhvr>
+                                        <p:cTn id="108" dur="700"/>
+                                        <p:tgtEl>
+                                          <p:spTgt spid="36"/>
+                                        </p:tgtEl>
+                                      </p:cBhvr>
+                                    </p:animEffect>
+                                  </p:childTnLst>
+                                </p:cTn>
+                              </p:par>
+                              <p:par>
+                                <p:cTn id="109" presetID="10" presetClass="entr" presetSubtype="0" fill="hold" grpId="0" nodeType="withEffect">
                                   <p:stCondLst>
                                     <p:cond delay="1960"/>
                                   </p:stCondLst>
                                   <p:childTnLst>
                                     <p:set>
                                       <p:cBhvr>
-                                        <p:cTn id="72" dur="1" fill="hold">
+                                        <p:cTn id="110" dur="1" fill="hold">
                                           <p:stCondLst>
                                             <p:cond delay="0"/>
                                           </p:stCondLst>
                                         </p:cTn>
                                         <p:tgtEl>
-                                          <p:spTgt spid="25"/>
+                                          <p:spTgt spid="37"/>
                                         </p:tgtEl>
                                         <p:attrNameLst>
                                           <p:attrName>style.visibility</p:attrName>
@@ -15347,9 +18946,9 @@
                                     </p:set>
                                     <p:animEffect transition="in" filter="fade">
                                       <p:cBhvr>
-                                        <p:cTn id="73" dur="700"/>
-                                        <p:tgtEl>
-                                          <p:spTgt spid="25"/>
+                                        <p:cTn id="111" dur="700"/>
+                                        <p:tgtEl>
+                                          <p:spTgt spid="37"/>
                                         </p:tgtEl>
                                       </p:cBhvr>
                                     </p:animEffect>
@@ -15357,20 +18956,20 @@
                                 </p:cTn>
                               </p:par>
                               <p:par>
-                                <p:cTn id="74" presetID="10" presetClass="entr" presetSubtype="0" fill="hold" grpId="0" nodeType="withEffect">
+                                <p:cTn id="112" presetID="10" presetClass="entr" presetSubtype="0" fill="hold" grpId="0" nodeType="withEffect">
                                   <p:stCondLst>
-                                    <p:cond delay="2055"/>
+                                    <p:cond delay="2017"/>
                                   </p:stCondLst>
                                   <p:childTnLst>
                                     <p:set>
                                       <p:cBhvr>
-                                        <p:cTn id="75" dur="1" fill="hold">
+                                        <p:cTn id="113" dur="1" fill="hold">
                                           <p:stCondLst>
                                             <p:cond delay="0"/>
                                           </p:stCondLst>
                                         </p:cTn>
                                         <p:tgtEl>
-                                          <p:spTgt spid="26"/>
+                                          <p:spTgt spid="38"/>
                                         </p:tgtEl>
                                         <p:attrNameLst>
                                           <p:attrName>style.visibility</p:attrName>
@@ -15382,9 +18981,44 @@
                                     </p:set>
                                     <p:animEffect transition="in" filter="fade">
                                       <p:cBhvr>
-                                        <p:cTn id="76" dur="700"/>
-                                        <p:tgtEl>
-                                          <p:spTgt spid="26"/>
+                                        <p:cTn id="114" dur="700"/>
+                                        <p:tgtEl>
+                                          <p:spTgt spid="38"/>
+                                        </p:tgtEl>
+                                      </p:cBhvr>
+                                    </p:animEffect>
+                                  </p:childTnLst>
+                                </p:cTn>
+                              </p:par>
+                              <p:par>
+                                <p:cTn id="115" presetID="10" presetClass="entr" presetSubtype="0" fill="hold" grpId="0" nodeType="withEffect">
+                                  <p:stCondLst>
+                                    <p:cond delay="2074"/>
+                                  </p:stCondLst>
+                                  <p:childTnLst>
+                                    <p:set>
+                                      <p:cBhvr>
+                                        <p:cTn id="116" dur="1" fill="hold">
+                                          <p:stCondLst>
+                                            <p:cond delay="0"/>
+                                          </p:stCondLst>
+                                        </p:cTn>
+                                        <p:tgtEl>
+                                          <p:spTgt spid="39"/>
+                                        </p:tgtEl>
+                                        <p:attrNameLst>
+                                          <p:attrName>style.visibility</p:attrName>
+                                        </p:attrNameLst>
+                                      </p:cBhvr>
+                                      <p:to>
+                                        <p:strVal val="visible"/>
+                                      </p:to>
+                                    </p:set>
+                                    <p:animEffect transition="in" filter="fade">
+                                      <p:cBhvr>
+                                        <p:cTn id="117" dur="700"/>
+                                        <p:tgtEl>
+                                          <p:spTgt spid="39"/>
                                         </p:tgtEl>
                                       </p:cBhvr>
                                     </p:animEffect>
@@ -15423,28 +19057,41 @@
       <p:bldP spid="8" grpId="0" animBg="1"/>
       <p:bldP spid="9" grpId="0" animBg="1"/>
       <p:bldP spid="10" grpId="0" animBg="1"/>
+      <p:bldP spid="15" grpId="0" animBg="1"/>
+      <p:bldP spid="20" grpId="0" animBg="1"/>
+      <p:bldP spid="25" grpId="0" animBg="1"/>
+      <p:bldP spid="30" grpId="0" animBg="1"/>
+      <p:bldP spid="33" grpId="0" animBg="1"/>
+      <p:bldP spid="11" grpId="0" animBg="1"/>
+      <p:bldP spid="16" grpId="0" animBg="1"/>
+      <p:bldP spid="21" grpId="0" animBg="1"/>
+      <p:bldP spid="26" grpId="0" animBg="1"/>
+      <p:bldP spid="31" grpId="0" animBg="1"/>
+      <p:bldP spid="34" grpId="0" animBg="1"/>
+      <p:bldP spid="12" grpId="0" animBg="1"/>
+      <p:bldP spid="17" grpId="0" animBg="1"/>
+      <p:bldP spid="22" grpId="0" animBg="1"/>
+      <p:bldP spid="27" grpId="0" animBg="1"/>
+      <p:bldP spid="32" grpId="0" animBg="1"/>
+      <p:bldP spid="35" grpId="0" animBg="1"/>
       <p:bldP spid="13" grpId="0" animBg="1"/>
-      <p:bldP spid="16" grpId="0" animBg="1"/>
+      <p:bldP spid="14" grpId="0" animBg="1"/>
+      <p:bldP spid="18" grpId="0" animBg="1"/>
       <p:bldP spid="19" grpId="0" animBg="1"/>
-      <p:bldP spid="22" grpId="0" animBg="1"/>
-      <p:bldP spid="11" grpId="0" animBg="1"/>
-      <p:bldP spid="14" grpId="0" animBg="1"/>
-      <p:bldP spid="17" grpId="0" animBg="1"/>
-      <p:bldP spid="20" grpId="0" animBg="1"/>
       <p:bldP spid="23" grpId="0" animBg="1"/>
-      <p:bldP spid="12" grpId="0" animBg="1"/>
-      <p:bldP spid="15" grpId="0" animBg="1"/>
-      <p:bldP spid="18" grpId="0" animBg="1"/>
-      <p:bldP spid="21" grpId="0" animBg="1"/>
       <p:bldP spid="24" grpId="0" animBg="1"/>
-      <p:bldP spid="25" grpId="0" animBg="1"/>
-      <p:bldP spid="26" grpId="0" animBg="1"/>
+      <p:bldP spid="28" grpId="0" animBg="1"/>
+      <p:bldP spid="29" grpId="0" animBg="1"/>
+      <p:bldP spid="36" grpId="0" animBg="1"/>
+      <p:bldP spid="37" grpId="0" animBg="1"/>
+      <p:bldP spid="38" grpId="0" animBg="1"/>
+      <p:bldP spid="39" grpId="0" animBg="1"/>
     </p:bldLst>
   </p:timing>
 </p:sld>
 </file>
 
-<file path=ppt/slides/slide15.xml><?xml version="1.0" encoding="utf-8"?>
+<file path=ppt/slides/slide16.xml><?xml version="1.0" encoding="utf-8"?>
 <p:sld xmlns:a="http://schemas.openxmlformats.org/drawingml/2006/main" xmlns:p="http://schemas.openxmlformats.org/presentationml/2006/main" xmlns:r="http://schemas.openxmlformats.org/officeDocument/2006/relationships">
   <p:cSld>
     <p:spTree>
@@ -15589,7 +19236,7 @@
                 <a:ea typeface="Plus Jakarta Sans"/>
                 <a:cs typeface="Plus Jakarta Sans"/>
               </a:rPr>
-              <a:t>15 / 17</a:t>
+              <a:t>16 / 18</a:t>
             </a:r>
           </a:p>
         </p:txBody>
@@ -17733,7 +21380,7 @@
 </p:sld>
 </file>
 
-<file path=ppt/slides/slide16.xml><?xml version="1.0" encoding="utf-8"?>
+<file path=ppt/slides/slide17.xml><?xml version="1.0" encoding="utf-8"?>
 <p:sld xmlns:a="http://schemas.openxmlformats.org/drawingml/2006/main" xmlns:p="http://schemas.openxmlformats.org/presentationml/2006/main" xmlns:r="http://schemas.openxmlformats.org/officeDocument/2006/relationships">
   <p:cSld>
     <p:spTree>
@@ -17878,7 +21525,7 @@
                 <a:ea typeface="Plus Jakarta Sans"/>
                 <a:cs typeface="Plus Jakarta Sans"/>
               </a:rPr>
-              <a:t>16 / 17</a:t>
+              <a:t>17 / 18</a:t>
             </a:r>
           </a:p>
         </p:txBody>
@@ -18023,7 +21670,7 @@
               </a:rPr>
               <a:t>A price in 24 hours.
 A finished room
-in ten days.</a:t>
+in fifteen days.</a:t>
             </a:r>
           </a:p>
         </p:txBody>
@@ -18331,7 +21978,7 @@
                 <a:ea typeface="Plus Jakarta Sans"/>
                 <a:cs typeface="Plus Jakarta Sans"/>
               </a:rPr>
-              <a:t>35% off  ·  plus GST</a:t>
+              <a:t>35% off  ·  free Red Flag gift  ·  10% to book  ·  plus GST</a:t>
             </a:r>
           </a:p>
         </p:txBody>
@@ -18959,7 +22606,7 @@
 </p:sld>
 </file>
 
-<file path=ppt/slides/slide17.xml><?xml version="1.0" encoding="utf-8"?>
+<file path=ppt/slides/slide18.xml><?xml version="1.0" encoding="utf-8"?>
 <p:sld xmlns:a="http://schemas.openxmlformats.org/drawingml/2006/main" xmlns:p="http://schemas.openxmlformats.org/presentationml/2006/main" xmlns:r="http://schemas.openxmlformats.org/officeDocument/2006/relationships">
   <p:cSld>
     <p:spTree>
@@ -19714,7 +23361,7 @@
                 <a:ea typeface="Plus Jakarta Sans"/>
                 <a:cs typeface="Plus Jakarta Sans"/>
               </a:rPr>
-              <a:t>02 / 17</a:t>
+              <a:t>02 / 18</a:t>
             </a:r>
           </a:p>
         </p:txBody>
@@ -19816,7 +23463,7 @@
                 <a:ea typeface="Plus Jakarta Sans"/>
                 <a:cs typeface="Plus Jakarta Sans"/>
               </a:rPr>
-              <a:t>Ten days after you order, your studio looks like a boutique hotel room.</a:t>
+              <a:t>Fifteen days after you book, your studio looks like a boutique hotel room.</a:t>
             </a:r>
           </a:p>
         </p:txBody>
@@ -21191,7 +24838,7 @@
                 <a:ea typeface="Plus Jakarta Sans"/>
                 <a:cs typeface="Plus Jakarta Sans"/>
               </a:rPr>
-              <a:t>03 / 17</a:t>
+              <a:t>03 / 18</a:t>
             </a:r>
           </a:p>
         </p:txBody>
@@ -22744,7 +26391,7 @@
                 <a:ea typeface="Plus Jakarta Sans"/>
                 <a:cs typeface="Plus Jakarta Sans"/>
               </a:rPr>
-              <a:t>04 / 17</a:t>
+              <a:t>04 / 18</a:t>
             </a:r>
           </a:p>
         </p:txBody>
@@ -23581,7 +27228,7 @@
                 <a:ea typeface="Plus Jakarta Sans"/>
                 <a:cs typeface="Plus Jakarta Sans"/>
               </a:rPr>
-              <a:t>05 / 17</a:t>
+              <a:t>05 / 18</a:t>
             </a:r>
           </a:p>
         </p:txBody>
@@ -24417,7 +28064,7 @@
                 <a:ea typeface="Plus Jakarta Sans"/>
                 <a:cs typeface="Plus Jakarta Sans"/>
               </a:rPr>
-              <a:t>06 / 17</a:t>
+              <a:t>06 / 18</a:t>
             </a:r>
           </a:p>
         </p:txBody>
@@ -28162,7 +31809,7 @@
                 <a:ea typeface="Plus Jakarta Sans"/>
                 <a:cs typeface="Plus Jakarta Sans"/>
               </a:rPr>
-              <a:t>07 / 17</a:t>
+              <a:t>07 / 18</a:t>
             </a:r>
           </a:p>
         </p:txBody>
@@ -32095,7 +35742,7 @@
                 <a:ea typeface="Plus Jakarta Sans"/>
                 <a:cs typeface="Plus Jakarta Sans"/>
               </a:rPr>
-              <a:t>08 / 17</a:t>
+              <a:t>08 / 18</a:t>
             </a:r>
           </a:p>
         </p:txBody>
@@ -35447,7 +39094,7 @@
                 <a:ea typeface="Plus Jakarta Sans"/>
                 <a:cs typeface="Plus Jakarta Sans"/>
               </a:rPr>
-              <a:t>09 / 17</a:t>
+              <a:t>09 / 18</a:t>
             </a:r>
           </a:p>
         </p:txBody>
